--- a/reports/presentation/Road Safety Predictive Analytics — Group 6.pptx
+++ b/reports/presentation/Road Safety Predictive Analytics — Group 6.pptx
@@ -10017,7 +10017,7 @@
                 <a:ea typeface="Public Sans" pitchFamily="34" charset="-122"/>
                 <a:cs typeface="Public Sans" pitchFamily="34" charset="-120"/>
               </a:rPr>
-              <a:t>[Best of Nuno's / Pedro's models — must beat lift 2.08× and PR-AUC 0.122 on 2024–25]</a:t>
+              <a:t>Gradient Boosting (Pedro): PR-AUC 0.126, lift 2.10× on 2024–25 · [Nuno's model to add]</a:t>
             </a:r>
             <a:endParaRPr lang="en-US" sz="1200" dirty="0"/>
           </a:p>
@@ -11384,7 +11384,213 @@
                           <a:ea typeface="Public Sans" pitchFamily="34" charset="-122"/>
                           <a:cs typeface="Public Sans" pitchFamily="34" charset="-120"/>
                         </a:rPr>
-                        <a:t>Model 1 — [Nuno]</a:t>
+                        <a:t>Model 1 — Gradient Boosting (Pedro)</a:t>
+                      </a:r>
+                      <a:endParaRPr lang="en-US" sz="1300" dirty="0">
+                        <a:latin typeface="Public Sans" charset="0"/>
+                        <a:ea typeface="Public Sans" charset="0"/>
+                        <a:cs typeface="Public Sans" charset="0"/>
+                      </a:endParaRPr>
+                    </a:p>
+                  </a:txBody>
+                  <a:tcPr marL="57785" marR="57785" marT="57785" marB="57785" anchor="t">
+                    <a:lnL w="12700" cap="flat" cmpd="sng" algn="ctr">
+                      <a:solidFill>
+                        <a:srgbClr val="C8C8C6"/>
+                      </a:solidFill>
+                      <a:prstDash val="solid"/>
+                      <a:round/>
+                      <a:headEnd type="none" w="med" len="med"/>
+                      <a:tailEnd type="none" w="med" len="med"/>
+                    </a:lnL>
+                    <a:lnR w="12700" cap="flat" cmpd="sng" algn="ctr">
+                      <a:solidFill>
+                        <a:srgbClr val="C8C8C6"/>
+                      </a:solidFill>
+                      <a:prstDash val="solid"/>
+                      <a:round/>
+                      <a:headEnd type="none" w="med" len="med"/>
+                      <a:tailEnd type="none" w="med" len="med"/>
+                    </a:lnR>
+                    <a:lnT w="12700" cap="flat" cmpd="sng" algn="ctr">
+                      <a:solidFill>
+                        <a:srgbClr val="C8C8C6"/>
+                      </a:solidFill>
+                      <a:prstDash val="solid"/>
+                      <a:round/>
+                      <a:headEnd type="none" w="med" len="med"/>
+                      <a:tailEnd type="none" w="med" len="med"/>
+                    </a:lnT>
+                    <a:lnB w="12700" cap="flat" cmpd="sng" algn="ctr">
+                      <a:solidFill>
+                        <a:srgbClr val="C8C8C6"/>
+                      </a:solidFill>
+                      <a:prstDash val="solid"/>
+                      <a:round/>
+                      <a:headEnd type="none" w="med" len="med"/>
+                      <a:tailEnd type="none" w="med" len="med"/>
+                    </a:lnB>
+                  </a:tcPr>
+                </a:tc>
+                <a:tc>
+                  <a:txBody>
+                    <a:bodyPr/>
+                    <a:lstStyle/>
+                    <a:p>
+                      <a:pPr indent="0" marL="0">
+                        <a:lnSpc>
+                          <a:spcPts val="1820"/>
+                        </a:lnSpc>
+                        <a:buNone/>
+                      </a:pPr>
+                      <a:r>
+                        <a:rPr lang="en-US" sz="1300" dirty="0">
+                          <a:solidFill>
+                            <a:srgbClr val="15213B"/>
+                          </a:solidFill>
+                          <a:latin typeface="Public Sans" pitchFamily="34" charset="0"/>
+                          <a:ea typeface="Public Sans" pitchFamily="34" charset="-122"/>
+                          <a:cs typeface="Public Sans" pitchFamily="34" charset="-120"/>
+                        </a:rPr>
+                        <a:t>Learns interactions of road, place and time (e.g. rural × night × downhill); Random Forest tested alongside</a:t>
+                      </a:r>
+                      <a:endParaRPr lang="en-US" sz="1300" dirty="0">
+                        <a:latin typeface="Public Sans" charset="0"/>
+                        <a:ea typeface="Public Sans" charset="0"/>
+                        <a:cs typeface="Public Sans" charset="0"/>
+                      </a:endParaRPr>
+                    </a:p>
+                  </a:txBody>
+                  <a:tcPr marL="57785" marR="57785" marT="57785" marB="57785" anchor="t">
+                    <a:lnL w="12700" cap="flat" cmpd="sng" algn="ctr">
+                      <a:solidFill>
+                        <a:srgbClr val="C8C8C6"/>
+                      </a:solidFill>
+                      <a:prstDash val="solid"/>
+                      <a:round/>
+                      <a:headEnd type="none" w="med" len="med"/>
+                      <a:tailEnd type="none" w="med" len="med"/>
+                    </a:lnL>
+                    <a:lnR w="12700" cap="flat" cmpd="sng" algn="ctr">
+                      <a:solidFill>
+                        <a:srgbClr val="C8C8C6"/>
+                      </a:solidFill>
+                      <a:prstDash val="solid"/>
+                      <a:round/>
+                      <a:headEnd type="none" w="med" len="med"/>
+                      <a:tailEnd type="none" w="med" len="med"/>
+                    </a:lnR>
+                    <a:lnT w="12700" cap="flat" cmpd="sng" algn="ctr">
+                      <a:solidFill>
+                        <a:srgbClr val="C8C8C6"/>
+                      </a:solidFill>
+                      <a:prstDash val="solid"/>
+                      <a:round/>
+                      <a:headEnd type="none" w="med" len="med"/>
+                      <a:tailEnd type="none" w="med" len="med"/>
+                    </a:lnT>
+                    <a:lnB w="12700" cap="flat" cmpd="sng" algn="ctr">
+                      <a:solidFill>
+                        <a:srgbClr val="C8C8C6"/>
+                      </a:solidFill>
+                      <a:prstDash val="solid"/>
+                      <a:round/>
+                      <a:headEnd type="none" w="med" len="med"/>
+                      <a:tailEnd type="none" w="med" len="med"/>
+                    </a:lnB>
+                  </a:tcPr>
+                </a:tc>
+                <a:tc>
+                  <a:txBody>
+                    <a:bodyPr/>
+                    <a:lstStyle/>
+                    <a:p>
+                      <a:pPr indent="0" marL="0">
+                        <a:lnSpc>
+                          <a:spcPts val="1820"/>
+                        </a:lnSpc>
+                        <a:buNone/>
+                      </a:pPr>
+                      <a:r>
+                        <a:rPr lang="en-US" sz="1300" dirty="0">
+                          <a:solidFill>
+                            <a:srgbClr val="15213B"/>
+                          </a:solidFill>
+                          <a:latin typeface="Public Sans" pitchFamily="34" charset="0"/>
+                          <a:ea typeface="Public Sans" pitchFamily="34" charset="-122"/>
+                          <a:cs typeface="Public Sans" pitchFamily="34" charset="-120"/>
+                        </a:rPr>
+                        <a:t>✓ Done (Pedro)</a:t>
+                      </a:r>
+                      <a:endParaRPr lang="en-US" sz="1300" dirty="0">
+                        <a:latin typeface="Public Sans" charset="0"/>
+                        <a:ea typeface="Public Sans" charset="0"/>
+                        <a:cs typeface="Public Sans" charset="0"/>
+                      </a:endParaRPr>
+                    </a:p>
+                  </a:txBody>
+                  <a:tcPr marL="57785" marR="57785" marT="57785" marB="57785" anchor="t">
+                    <a:lnL w="12700" cap="flat" cmpd="sng" algn="ctr">
+                      <a:solidFill>
+                        <a:srgbClr val="C8C8C6"/>
+                      </a:solidFill>
+                      <a:prstDash val="solid"/>
+                      <a:round/>
+                      <a:headEnd type="none" w="med" len="med"/>
+                      <a:tailEnd type="none" w="med" len="med"/>
+                    </a:lnL>
+                    <a:lnR w="12700" cap="flat" cmpd="sng" algn="ctr">
+                      <a:solidFill>
+                        <a:srgbClr val="C8C8C6"/>
+                      </a:solidFill>
+                      <a:prstDash val="solid"/>
+                      <a:round/>
+                      <a:headEnd type="none" w="med" len="med"/>
+                      <a:tailEnd type="none" w="med" len="med"/>
+                    </a:lnR>
+                    <a:lnT w="12700" cap="flat" cmpd="sng" algn="ctr">
+                      <a:solidFill>
+                        <a:srgbClr val="C8C8C6"/>
+                      </a:solidFill>
+                      <a:prstDash val="solid"/>
+                      <a:round/>
+                      <a:headEnd type="none" w="med" len="med"/>
+                      <a:tailEnd type="none" w="med" len="med"/>
+                    </a:lnT>
+                    <a:lnB w="12700" cap="flat" cmpd="sng" algn="ctr">
+                      <a:solidFill>
+                        <a:srgbClr val="C8C8C6"/>
+                      </a:solidFill>
+                      <a:prstDash val="solid"/>
+                      <a:round/>
+                      <a:headEnd type="none" w="med" len="med"/>
+                      <a:tailEnd type="none" w="med" len="med"/>
+                    </a:lnB>
+                  </a:tcPr>
+                </a:tc>
+              </a:tr>
+              <a:tr h="359321">
+                <a:tc>
+                  <a:txBody>
+                    <a:bodyPr/>
+                    <a:lstStyle/>
+                    <a:p>
+                      <a:pPr indent="0" marL="0">
+                        <a:lnSpc>
+                          <a:spcPts val="1820"/>
+                        </a:lnSpc>
+                        <a:buNone/>
+                      </a:pPr>
+                      <a:r>
+                        <a:rPr lang="en-US" sz="1300" dirty="0">
+                          <a:solidFill>
+                            <a:srgbClr val="15213B"/>
+                          </a:solidFill>
+                          <a:latin typeface="Public Sans" pitchFamily="34" charset="0"/>
+                          <a:ea typeface="Public Sans" pitchFamily="34" charset="-122"/>
+                          <a:cs typeface="Public Sans" pitchFamily="34" charset="-120"/>
+                        </a:rPr>
+                        <a:t>Model 2 — [Nuno]</a:t>
                       </a:r>
                       <a:endParaRPr lang="en-US" sz="1300" dirty="0">
                         <a:latin typeface="Public Sans" charset="0"/>
@@ -11521,212 +11727,6 @@
                           <a:cs typeface="Public Sans" pitchFamily="34" charset="-120"/>
                         </a:rPr>
                         <a:t>[ ] Nuno</a:t>
-                      </a:r>
-                      <a:endParaRPr lang="en-US" sz="1300" dirty="0">
-                        <a:latin typeface="Public Sans" charset="0"/>
-                        <a:ea typeface="Public Sans" charset="0"/>
-                        <a:cs typeface="Public Sans" charset="0"/>
-                      </a:endParaRPr>
-                    </a:p>
-                  </a:txBody>
-                  <a:tcPr marL="57785" marR="57785" marT="57785" marB="57785" anchor="t">
-                    <a:lnL w="12700" cap="flat" cmpd="sng" algn="ctr">
-                      <a:solidFill>
-                        <a:srgbClr val="C8C8C6"/>
-                      </a:solidFill>
-                      <a:prstDash val="solid"/>
-                      <a:round/>
-                      <a:headEnd type="none" w="med" len="med"/>
-                      <a:tailEnd type="none" w="med" len="med"/>
-                    </a:lnL>
-                    <a:lnR w="12700" cap="flat" cmpd="sng" algn="ctr">
-                      <a:solidFill>
-                        <a:srgbClr val="C8C8C6"/>
-                      </a:solidFill>
-                      <a:prstDash val="solid"/>
-                      <a:round/>
-                      <a:headEnd type="none" w="med" len="med"/>
-                      <a:tailEnd type="none" w="med" len="med"/>
-                    </a:lnR>
-                    <a:lnT w="12700" cap="flat" cmpd="sng" algn="ctr">
-                      <a:solidFill>
-                        <a:srgbClr val="C8C8C6"/>
-                      </a:solidFill>
-                      <a:prstDash val="solid"/>
-                      <a:round/>
-                      <a:headEnd type="none" w="med" len="med"/>
-                      <a:tailEnd type="none" w="med" len="med"/>
-                    </a:lnT>
-                    <a:lnB w="12700" cap="flat" cmpd="sng" algn="ctr">
-                      <a:solidFill>
-                        <a:srgbClr val="C8C8C6"/>
-                      </a:solidFill>
-                      <a:prstDash val="solid"/>
-                      <a:round/>
-                      <a:headEnd type="none" w="med" len="med"/>
-                      <a:tailEnd type="none" w="med" len="med"/>
-                    </a:lnB>
-                  </a:tcPr>
-                </a:tc>
-              </a:tr>
-              <a:tr h="359321">
-                <a:tc>
-                  <a:txBody>
-                    <a:bodyPr/>
-                    <a:lstStyle/>
-                    <a:p>
-                      <a:pPr indent="0" marL="0">
-                        <a:lnSpc>
-                          <a:spcPts val="1820"/>
-                        </a:lnSpc>
-                        <a:buNone/>
-                      </a:pPr>
-                      <a:r>
-                        <a:rPr lang="en-US" sz="1300" dirty="0">
-                          <a:solidFill>
-                            <a:srgbClr val="15213B"/>
-                          </a:solidFill>
-                          <a:latin typeface="Public Sans" pitchFamily="34" charset="0"/>
-                          <a:ea typeface="Public Sans" pitchFamily="34" charset="-122"/>
-                          <a:cs typeface="Public Sans" pitchFamily="34" charset="-120"/>
-                        </a:rPr>
-                        <a:t>Model 2 — [Pedro]</a:t>
-                      </a:r>
-                      <a:endParaRPr lang="en-US" sz="1300" dirty="0">
-                        <a:latin typeface="Public Sans" charset="0"/>
-                        <a:ea typeface="Public Sans" charset="0"/>
-                        <a:cs typeface="Public Sans" charset="0"/>
-                      </a:endParaRPr>
-                    </a:p>
-                  </a:txBody>
-                  <a:tcPr marL="57785" marR="57785" marT="57785" marB="57785" anchor="t">
-                    <a:lnL w="12700" cap="flat" cmpd="sng" algn="ctr">
-                      <a:solidFill>
-                        <a:srgbClr val="C8C8C6"/>
-                      </a:solidFill>
-                      <a:prstDash val="solid"/>
-                      <a:round/>
-                      <a:headEnd type="none" w="med" len="med"/>
-                      <a:tailEnd type="none" w="med" len="med"/>
-                    </a:lnL>
-                    <a:lnR w="12700" cap="flat" cmpd="sng" algn="ctr">
-                      <a:solidFill>
-                        <a:srgbClr val="C8C8C6"/>
-                      </a:solidFill>
-                      <a:prstDash val="solid"/>
-                      <a:round/>
-                      <a:headEnd type="none" w="med" len="med"/>
-                      <a:tailEnd type="none" w="med" len="med"/>
-                    </a:lnR>
-                    <a:lnT w="12700" cap="flat" cmpd="sng" algn="ctr">
-                      <a:solidFill>
-                        <a:srgbClr val="C8C8C6"/>
-                      </a:solidFill>
-                      <a:prstDash val="solid"/>
-                      <a:round/>
-                      <a:headEnd type="none" w="med" len="med"/>
-                      <a:tailEnd type="none" w="med" len="med"/>
-                    </a:lnT>
-                    <a:lnB w="12700" cap="flat" cmpd="sng" algn="ctr">
-                      <a:solidFill>
-                        <a:srgbClr val="C8C8C6"/>
-                      </a:solidFill>
-                      <a:prstDash val="solid"/>
-                      <a:round/>
-                      <a:headEnd type="none" w="med" len="med"/>
-                      <a:tailEnd type="none" w="med" len="med"/>
-                    </a:lnB>
-                  </a:tcPr>
-                </a:tc>
-                <a:tc>
-                  <a:txBody>
-                    <a:bodyPr/>
-                    <a:lstStyle/>
-                    <a:p>
-                      <a:pPr indent="0" marL="0">
-                        <a:lnSpc>
-                          <a:spcPts val="1820"/>
-                        </a:lnSpc>
-                        <a:buNone/>
-                      </a:pPr>
-                      <a:r>
-                        <a:rPr lang="en-US" sz="1300" dirty="0">
-                          <a:solidFill>
-                            <a:srgbClr val="15213B"/>
-                          </a:solidFill>
-                          <a:latin typeface="Public Sans" pitchFamily="34" charset="0"/>
-                          <a:ea typeface="Public Sans" pitchFamily="34" charset="-122"/>
-                          <a:cs typeface="Public Sans" pitchFamily="34" charset="-120"/>
-                        </a:rPr>
-                        <a:t>[to fill]</a:t>
-                      </a:r>
-                      <a:endParaRPr lang="en-US" sz="1300" dirty="0">
-                        <a:latin typeface="Public Sans" charset="0"/>
-                        <a:ea typeface="Public Sans" charset="0"/>
-                        <a:cs typeface="Public Sans" charset="0"/>
-                      </a:endParaRPr>
-                    </a:p>
-                  </a:txBody>
-                  <a:tcPr marL="57785" marR="57785" marT="57785" marB="57785" anchor="t">
-                    <a:lnL w="12700" cap="flat" cmpd="sng" algn="ctr">
-                      <a:solidFill>
-                        <a:srgbClr val="C8C8C6"/>
-                      </a:solidFill>
-                      <a:prstDash val="solid"/>
-                      <a:round/>
-                      <a:headEnd type="none" w="med" len="med"/>
-                      <a:tailEnd type="none" w="med" len="med"/>
-                    </a:lnL>
-                    <a:lnR w="12700" cap="flat" cmpd="sng" algn="ctr">
-                      <a:solidFill>
-                        <a:srgbClr val="C8C8C6"/>
-                      </a:solidFill>
-                      <a:prstDash val="solid"/>
-                      <a:round/>
-                      <a:headEnd type="none" w="med" len="med"/>
-                      <a:tailEnd type="none" w="med" len="med"/>
-                    </a:lnR>
-                    <a:lnT w="12700" cap="flat" cmpd="sng" algn="ctr">
-                      <a:solidFill>
-                        <a:srgbClr val="C8C8C6"/>
-                      </a:solidFill>
-                      <a:prstDash val="solid"/>
-                      <a:round/>
-                      <a:headEnd type="none" w="med" len="med"/>
-                      <a:tailEnd type="none" w="med" len="med"/>
-                    </a:lnT>
-                    <a:lnB w="12700" cap="flat" cmpd="sng" algn="ctr">
-                      <a:solidFill>
-                        <a:srgbClr val="C8C8C6"/>
-                      </a:solidFill>
-                      <a:prstDash val="solid"/>
-                      <a:round/>
-                      <a:headEnd type="none" w="med" len="med"/>
-                      <a:tailEnd type="none" w="med" len="med"/>
-                    </a:lnB>
-                  </a:tcPr>
-                </a:tc>
-                <a:tc>
-                  <a:txBody>
-                    <a:bodyPr/>
-                    <a:lstStyle/>
-                    <a:p>
-                      <a:pPr indent="0" marL="0">
-                        <a:lnSpc>
-                          <a:spcPts val="1820"/>
-                        </a:lnSpc>
-                        <a:buNone/>
-                      </a:pPr>
-                      <a:r>
-                        <a:rPr lang="en-US" sz="1300" dirty="0">
-                          <a:solidFill>
-                            <a:srgbClr val="15213B"/>
-                          </a:solidFill>
-                          <a:latin typeface="Public Sans" pitchFamily="34" charset="0"/>
-                          <a:ea typeface="Public Sans" pitchFamily="34" charset="-122"/>
-                          <a:cs typeface="Public Sans" pitchFamily="34" charset="-120"/>
-                        </a:rPr>
-                        <a:t>[ ] Pedro</a:t>
                       </a:r>
                       <a:endParaRPr lang="en-US" sz="1300" dirty="0">
                         <a:latin typeface="Public Sans" charset="0"/>
@@ -15121,7 +15121,7 @@
                 <a:ea typeface="Libre Baskerville" pitchFamily="18" charset="-122"/>
                 <a:cs typeface="Libre Baskerville" pitchFamily="18" charset="-120"/>
               </a:rPr>
-              <a:t>Model 1 — [Nuno: model name]</a:t>
+              <a:t>Model 1 — Gradient Boosting (tree ensemble)</a:t>
             </a:r>
             <a:endParaRPr lang="en-US" sz="3000" dirty="0"/>
           </a:p>
@@ -15166,7 +15166,7 @@
                 <a:ea typeface="Public Sans" pitchFamily="34" charset="-122"/>
                 <a:cs typeface="Public Sans" pitchFamily="34" charset="-120"/>
               </a:rPr>
-              <a:t>[To be filled by Nuno]</a:t>
+              <a:t>Histogram Gradient Boosting, compared with a Random Forest; class weights for the 5% fatal rate, no scaling needed.</a:t>
             </a:r>
             <a:endParaRPr lang="en-US" sz="1300" dirty="0"/>
           </a:p>
@@ -15187,7 +15187,7 @@
                 <a:ea typeface="Public Sans" pitchFamily="34" charset="-122"/>
                 <a:cs typeface="Public Sans" pitchFamily="34" charset="-120"/>
               </a:rPr>
-              <a:t>[Model chosen and why it fits the problem]</a:t>
+              <a:t>Why: fatality risk comes from combinations (rural × night × downhill); trees learn these interactions without hand-crafting.</a:t>
             </a:r>
             <a:endParaRPr lang="en-US" sz="1300" dirty="0"/>
           </a:p>
@@ -15208,7 +15208,7 @@
                 <a:ea typeface="Public Sans" pitchFamily="34" charset="-122"/>
                 <a:cs typeface="Public Sans" pitchFamily="34" charset="-120"/>
               </a:rPr>
-              <a:t>[Tuning on validation 2022–2023: what was tried, what was kept]</a:t>
+              <a:t>Tuning on validation 2022–23: 13 configs. Small, regularised trees won (lr 0.03, 15 leaves, 150 trees); training on 2015+ only gave no gain.</a:t>
             </a:r>
             <a:endParaRPr lang="en-US" sz="1300" dirty="0"/>
           </a:p>
@@ -15229,7 +15229,7 @@
                 <a:ea typeface="Public Sans" pitchFamily="34" charset="-122"/>
                 <a:cs typeface="Public Sans" pitchFamily="34" charset="-120"/>
               </a:rPr>
-              <a:t>[Validation results: PR-AUC, recall &amp; lift @ top 15%, Brier after calibration]</a:t>
+              <a:t>Validation: PR-AUC 0.134, lift 2.24×. Test 2024–25: PR-AUC 0.126, recall 31.5%, lift 2.10×, Brier 0.064 after sigmoid calibration.</a:t>
             </a:r>
             <a:endParaRPr lang="en-US" sz="1300" dirty="0"/>
           </a:p>
@@ -15250,7 +15250,7 @@
                 <a:ea typeface="Public Sans" pitchFamily="34" charset="-122"/>
                 <a:cs typeface="Public Sans" pitchFamily="34" charset="-120"/>
               </a:rPr>
-              <a:t>[What the model learned: most important features]</a:t>
+              <a:t>Top drivers: time of day, roadway type, historical segment risk, then downhill, rural area and day of week (matches the EDA).</a:t>
             </a:r>
             <a:endParaRPr lang="en-US" sz="1300" dirty="0"/>
           </a:p>
@@ -15344,6 +15344,54 @@
           </a:p>
         </p:txBody>
       </p:sp>
+      <p:pic>
+        <p:nvPicPr>
+          <p:cNvPr id="7" name="Picture 6" descr="task3_trees_feature_importance.png"/>
+          <p:cNvPicPr>
+            <a:picLocks noChangeAspect="1"/>
+          </p:cNvPicPr>
+          <p:nvPr/>
+        </p:nvPicPr>
+        <p:blipFill>
+          <a:blip r:embed="rId2"/>
+          <a:stretch>
+            <a:fillRect/>
+          </a:stretch>
+        </p:blipFill>
+        <p:spPr>
+          <a:xfrm>
+            <a:off x="910844" y="3500000"/>
+            <a:ext cx="3290000" cy="2350000"/>
+          </a:xfrm>
+          <a:prstGeom prst="rect">
+            <a:avLst/>
+          </a:prstGeom>
+        </p:spPr>
+      </p:pic>
+      <p:pic>
+        <p:nvPicPr>
+          <p:cNvPr id="8" name="Picture 7" descr="task3_trees_pr_curve.png"/>
+          <p:cNvPicPr>
+            <a:picLocks noChangeAspect="1"/>
+          </p:cNvPicPr>
+          <p:nvPr/>
+        </p:nvPicPr>
+        <p:blipFill>
+          <a:blip r:embed="rId3"/>
+          <a:stretch>
+            <a:fillRect/>
+          </a:stretch>
+        </p:blipFill>
+        <p:spPr>
+          <a:xfrm>
+            <a:off x="4500844" y="3500000"/>
+            <a:ext cx="3290000" cy="2350000"/>
+          </a:xfrm>
+          <a:prstGeom prst="rect">
+            <a:avLst/>
+          </a:prstGeom>
+        </p:spPr>
+      </p:pic>
     </p:spTree>
   </p:cSld>
   <p:clrMapOvr>
@@ -15460,7 +15508,7 @@
                 <a:ea typeface="Libre Baskerville" pitchFamily="18" charset="-122"/>
                 <a:cs typeface="Libre Baskerville" pitchFamily="18" charset="-120"/>
               </a:rPr>
-              <a:t>Model 2 — [Pedro: model name]</a:t>
+              <a:t>Model 2 — [Nuno: model name]</a:t>
             </a:r>
             <a:endParaRPr lang="en-US" sz="3000" dirty="0"/>
           </a:p>
@@ -15505,7 +15553,7 @@
                 <a:ea typeface="Public Sans" pitchFamily="34" charset="-122"/>
                 <a:cs typeface="Public Sans" pitchFamily="34" charset="-120"/>
               </a:rPr>
-              <a:t>[To be filled by Pedro]</a:t>
+              <a:t>[To be filled by Nuno]</a:t>
             </a:r>
             <a:endParaRPr lang="en-US" sz="1300" dirty="0"/>
           </a:p>
@@ -17104,7 +17152,417 @@
                           <a:ea typeface="Public Sans" pitchFamily="34" charset="-122"/>
                           <a:cs typeface="Public Sans" pitchFamily="34" charset="-120"/>
                         </a:rPr>
-                        <a:t>Model 1 — [Nuno]</a:t>
+                        <a:t>Model 1 — Gradient Boosting + calibration</a:t>
+                      </a:r>
+                      <a:endParaRPr lang="en-US" sz="1300" dirty="0">
+                        <a:latin typeface="Public Sans" charset="0"/>
+                        <a:ea typeface="Public Sans" charset="0"/>
+                        <a:cs typeface="Public Sans" charset="0"/>
+                      </a:endParaRPr>
+                    </a:p>
+                  </a:txBody>
+                  <a:tcPr marL="57785" marR="57785" marT="57785" marB="57785" anchor="t">
+                    <a:lnL w="12700" cap="flat" cmpd="sng" algn="ctr">
+                      <a:solidFill>
+                        <a:srgbClr val="C8C8C6"/>
+                      </a:solidFill>
+                      <a:prstDash val="solid"/>
+                      <a:round/>
+                      <a:headEnd type="none" w="med" len="med"/>
+                      <a:tailEnd type="none" w="med" len="med"/>
+                    </a:lnL>
+                    <a:lnR w="12700" cap="flat" cmpd="sng" algn="ctr">
+                      <a:solidFill>
+                        <a:srgbClr val="C8C8C6"/>
+                      </a:solidFill>
+                      <a:prstDash val="solid"/>
+                      <a:round/>
+                      <a:headEnd type="none" w="med" len="med"/>
+                      <a:tailEnd type="none" w="med" len="med"/>
+                    </a:lnR>
+                    <a:lnT w="12700" cap="flat" cmpd="sng" algn="ctr">
+                      <a:solidFill>
+                        <a:srgbClr val="C8C8C6"/>
+                      </a:solidFill>
+                      <a:prstDash val="solid"/>
+                      <a:round/>
+                      <a:headEnd type="none" w="med" len="med"/>
+                      <a:tailEnd type="none" w="med" len="med"/>
+                    </a:lnT>
+                    <a:lnB w="12700" cap="flat" cmpd="sng" algn="ctr">
+                      <a:solidFill>
+                        <a:srgbClr val="C8C8C6"/>
+                      </a:solidFill>
+                      <a:prstDash val="solid"/>
+                      <a:round/>
+                      <a:headEnd type="none" w="med" len="med"/>
+                      <a:tailEnd type="none" w="med" len="med"/>
+                    </a:lnB>
+                  </a:tcPr>
+                </a:tc>
+                <a:tc>
+                  <a:txBody>
+                    <a:bodyPr/>
+                    <a:lstStyle/>
+                    <a:p>
+                      <a:pPr indent="0" marL="0">
+                        <a:lnSpc>
+                          <a:spcPts val="1820"/>
+                        </a:lnSpc>
+                        <a:buNone/>
+                      </a:pPr>
+                      <a:r>
+                        <a:rPr lang="en-US" sz="1300" dirty="0">
+                          <a:solidFill>
+                            <a:srgbClr val="15213B"/>
+                          </a:solidFill>
+                          <a:latin typeface="Public Sans" pitchFamily="34" charset="0"/>
+                          <a:ea typeface="Public Sans" pitchFamily="34" charset="-122"/>
+                          <a:cs typeface="Public Sans" pitchFamily="34" charset="-120"/>
+                        </a:rPr>
+                        <a:t>0.673</a:t>
+                      </a:r>
+                      <a:endParaRPr lang="en-US" sz="1300" dirty="0">
+                        <a:latin typeface="Public Sans" charset="0"/>
+                        <a:ea typeface="Public Sans" charset="0"/>
+                        <a:cs typeface="Public Sans" charset="0"/>
+                      </a:endParaRPr>
+                    </a:p>
+                  </a:txBody>
+                  <a:tcPr marL="57785" marR="57785" marT="57785" marB="57785" anchor="t">
+                    <a:lnL w="12700" cap="flat" cmpd="sng" algn="ctr">
+                      <a:solidFill>
+                        <a:srgbClr val="C8C8C6"/>
+                      </a:solidFill>
+                      <a:prstDash val="solid"/>
+                      <a:round/>
+                      <a:headEnd type="none" w="med" len="med"/>
+                      <a:tailEnd type="none" w="med" len="med"/>
+                    </a:lnL>
+                    <a:lnR w="12700" cap="flat" cmpd="sng" algn="ctr">
+                      <a:solidFill>
+                        <a:srgbClr val="C8C8C6"/>
+                      </a:solidFill>
+                      <a:prstDash val="solid"/>
+                      <a:round/>
+                      <a:headEnd type="none" w="med" len="med"/>
+                      <a:tailEnd type="none" w="med" len="med"/>
+                    </a:lnR>
+                    <a:lnT w="12700" cap="flat" cmpd="sng" algn="ctr">
+                      <a:solidFill>
+                        <a:srgbClr val="C8C8C6"/>
+                      </a:solidFill>
+                      <a:prstDash val="solid"/>
+                      <a:round/>
+                      <a:headEnd type="none" w="med" len="med"/>
+                      <a:tailEnd type="none" w="med" len="med"/>
+                    </a:lnT>
+                    <a:lnB w="12700" cap="flat" cmpd="sng" algn="ctr">
+                      <a:solidFill>
+                        <a:srgbClr val="C8C8C6"/>
+                      </a:solidFill>
+                      <a:prstDash val="solid"/>
+                      <a:round/>
+                      <a:headEnd type="none" w="med" len="med"/>
+                      <a:tailEnd type="none" w="med" len="med"/>
+                    </a:lnB>
+                  </a:tcPr>
+                </a:tc>
+                <a:tc>
+                  <a:txBody>
+                    <a:bodyPr/>
+                    <a:lstStyle/>
+                    <a:p>
+                      <a:pPr indent="0" marL="0">
+                        <a:lnSpc>
+                          <a:spcPts val="1820"/>
+                        </a:lnSpc>
+                        <a:buNone/>
+                      </a:pPr>
+                      <a:r>
+                        <a:rPr lang="en-US" sz="1300" dirty="0">
+                          <a:solidFill>
+                            <a:srgbClr val="15213B"/>
+                          </a:solidFill>
+                          <a:latin typeface="Public Sans" pitchFamily="34" charset="0"/>
+                          <a:ea typeface="Public Sans" pitchFamily="34" charset="-122"/>
+                          <a:cs typeface="Public Sans" pitchFamily="34" charset="-120"/>
+                        </a:rPr>
+                        <a:t>0.126</a:t>
+                      </a:r>
+                      <a:endParaRPr lang="en-US" sz="1300" dirty="0">
+                        <a:latin typeface="Public Sans" charset="0"/>
+                        <a:ea typeface="Public Sans" charset="0"/>
+                        <a:cs typeface="Public Sans" charset="0"/>
+                      </a:endParaRPr>
+                    </a:p>
+                  </a:txBody>
+                  <a:tcPr marL="57785" marR="57785" marT="57785" marB="57785" anchor="t">
+                    <a:lnL w="12700" cap="flat" cmpd="sng" algn="ctr">
+                      <a:solidFill>
+                        <a:srgbClr val="C8C8C6"/>
+                      </a:solidFill>
+                      <a:prstDash val="solid"/>
+                      <a:round/>
+                      <a:headEnd type="none" w="med" len="med"/>
+                      <a:tailEnd type="none" w="med" len="med"/>
+                    </a:lnL>
+                    <a:lnR w="12700" cap="flat" cmpd="sng" algn="ctr">
+                      <a:solidFill>
+                        <a:srgbClr val="C8C8C6"/>
+                      </a:solidFill>
+                      <a:prstDash val="solid"/>
+                      <a:round/>
+                      <a:headEnd type="none" w="med" len="med"/>
+                      <a:tailEnd type="none" w="med" len="med"/>
+                    </a:lnR>
+                    <a:lnT w="12700" cap="flat" cmpd="sng" algn="ctr">
+                      <a:solidFill>
+                        <a:srgbClr val="C8C8C6"/>
+                      </a:solidFill>
+                      <a:prstDash val="solid"/>
+                      <a:round/>
+                      <a:headEnd type="none" w="med" len="med"/>
+                      <a:tailEnd type="none" w="med" len="med"/>
+                    </a:lnT>
+                    <a:lnB w="12700" cap="flat" cmpd="sng" algn="ctr">
+                      <a:solidFill>
+                        <a:srgbClr val="C8C8C6"/>
+                      </a:solidFill>
+                      <a:prstDash val="solid"/>
+                      <a:round/>
+                      <a:headEnd type="none" w="med" len="med"/>
+                      <a:tailEnd type="none" w="med" len="med"/>
+                    </a:lnB>
+                  </a:tcPr>
+                </a:tc>
+                <a:tc>
+                  <a:txBody>
+                    <a:bodyPr/>
+                    <a:lstStyle/>
+                    <a:p>
+                      <a:pPr indent="0" marL="0">
+                        <a:lnSpc>
+                          <a:spcPts val="1820"/>
+                        </a:lnSpc>
+                        <a:buNone/>
+                      </a:pPr>
+                      <a:r>
+                        <a:rPr lang="en-US" sz="1300" dirty="0">
+                          <a:solidFill>
+                            <a:srgbClr val="15213B"/>
+                          </a:solidFill>
+                          <a:latin typeface="Public Sans" pitchFamily="34" charset="0"/>
+                          <a:ea typeface="Public Sans" pitchFamily="34" charset="-122"/>
+                          <a:cs typeface="Public Sans" pitchFamily="34" charset="-120"/>
+                        </a:rPr>
+                        <a:t>31.5%</a:t>
+                      </a:r>
+                      <a:endParaRPr lang="en-US" sz="1300" dirty="0">
+                        <a:latin typeface="Public Sans" charset="0"/>
+                        <a:ea typeface="Public Sans" charset="0"/>
+                        <a:cs typeface="Public Sans" charset="0"/>
+                      </a:endParaRPr>
+                    </a:p>
+                  </a:txBody>
+                  <a:tcPr marL="57785" marR="57785" marT="57785" marB="57785" anchor="t">
+                    <a:lnL w="12700" cap="flat" cmpd="sng" algn="ctr">
+                      <a:solidFill>
+                        <a:srgbClr val="C8C8C6"/>
+                      </a:solidFill>
+                      <a:prstDash val="solid"/>
+                      <a:round/>
+                      <a:headEnd type="none" w="med" len="med"/>
+                      <a:tailEnd type="none" w="med" len="med"/>
+                    </a:lnL>
+                    <a:lnR w="12700" cap="flat" cmpd="sng" algn="ctr">
+                      <a:solidFill>
+                        <a:srgbClr val="C8C8C6"/>
+                      </a:solidFill>
+                      <a:prstDash val="solid"/>
+                      <a:round/>
+                      <a:headEnd type="none" w="med" len="med"/>
+                      <a:tailEnd type="none" w="med" len="med"/>
+                    </a:lnR>
+                    <a:lnT w="12700" cap="flat" cmpd="sng" algn="ctr">
+                      <a:solidFill>
+                        <a:srgbClr val="C8C8C6"/>
+                      </a:solidFill>
+                      <a:prstDash val="solid"/>
+                      <a:round/>
+                      <a:headEnd type="none" w="med" len="med"/>
+                      <a:tailEnd type="none" w="med" len="med"/>
+                    </a:lnT>
+                    <a:lnB w="12700" cap="flat" cmpd="sng" algn="ctr">
+                      <a:solidFill>
+                        <a:srgbClr val="C8C8C6"/>
+                      </a:solidFill>
+                      <a:prstDash val="solid"/>
+                      <a:round/>
+                      <a:headEnd type="none" w="med" len="med"/>
+                      <a:tailEnd type="none" w="med" len="med"/>
+                    </a:lnB>
+                  </a:tcPr>
+                </a:tc>
+                <a:tc>
+                  <a:txBody>
+                    <a:bodyPr/>
+                    <a:lstStyle/>
+                    <a:p>
+                      <a:pPr indent="0" marL="0">
+                        <a:lnSpc>
+                          <a:spcPts val="1820"/>
+                        </a:lnSpc>
+                        <a:buNone/>
+                      </a:pPr>
+                      <a:r>
+                        <a:rPr lang="en-US" sz="1300" dirty="0">
+                          <a:solidFill>
+                            <a:srgbClr val="15213B"/>
+                          </a:solidFill>
+                          <a:latin typeface="Public Sans" pitchFamily="34" charset="0"/>
+                          <a:ea typeface="Public Sans" pitchFamily="34" charset="-122"/>
+                          <a:cs typeface="Public Sans" pitchFamily="34" charset="-120"/>
+                        </a:rPr>
+                        <a:t>2.10×</a:t>
+                      </a:r>
+                      <a:endParaRPr lang="en-US" sz="1300" dirty="0">
+                        <a:latin typeface="Public Sans" charset="0"/>
+                        <a:ea typeface="Public Sans" charset="0"/>
+                        <a:cs typeface="Public Sans" charset="0"/>
+                      </a:endParaRPr>
+                    </a:p>
+                  </a:txBody>
+                  <a:tcPr marL="57785" marR="57785" marT="57785" marB="57785" anchor="t">
+                    <a:lnL w="12700" cap="flat" cmpd="sng" algn="ctr">
+                      <a:solidFill>
+                        <a:srgbClr val="C8C8C6"/>
+                      </a:solidFill>
+                      <a:prstDash val="solid"/>
+                      <a:round/>
+                      <a:headEnd type="none" w="med" len="med"/>
+                      <a:tailEnd type="none" w="med" len="med"/>
+                    </a:lnL>
+                    <a:lnR w="12700" cap="flat" cmpd="sng" algn="ctr">
+                      <a:solidFill>
+                        <a:srgbClr val="C8C8C6"/>
+                      </a:solidFill>
+                      <a:prstDash val="solid"/>
+                      <a:round/>
+                      <a:headEnd type="none" w="med" len="med"/>
+                      <a:tailEnd type="none" w="med" len="med"/>
+                    </a:lnR>
+                    <a:lnT w="12700" cap="flat" cmpd="sng" algn="ctr">
+                      <a:solidFill>
+                        <a:srgbClr val="C8C8C6"/>
+                      </a:solidFill>
+                      <a:prstDash val="solid"/>
+                      <a:round/>
+                      <a:headEnd type="none" w="med" len="med"/>
+                      <a:tailEnd type="none" w="med" len="med"/>
+                    </a:lnT>
+                    <a:lnB w="12700" cap="flat" cmpd="sng" algn="ctr">
+                      <a:solidFill>
+                        <a:srgbClr val="C8C8C6"/>
+                      </a:solidFill>
+                      <a:prstDash val="solid"/>
+                      <a:round/>
+                      <a:headEnd type="none" w="med" len="med"/>
+                      <a:tailEnd type="none" w="med" len="med"/>
+                    </a:lnB>
+                  </a:tcPr>
+                </a:tc>
+                <a:tc>
+                  <a:txBody>
+                    <a:bodyPr/>
+                    <a:lstStyle/>
+                    <a:p>
+                      <a:pPr indent="0" marL="0">
+                        <a:lnSpc>
+                          <a:spcPts val="1820"/>
+                        </a:lnSpc>
+                        <a:buNone/>
+                      </a:pPr>
+                      <a:r>
+                        <a:rPr lang="en-US" sz="1300" dirty="0">
+                          <a:solidFill>
+                            <a:srgbClr val="15213B"/>
+                          </a:solidFill>
+                          <a:latin typeface="Public Sans" pitchFamily="34" charset="0"/>
+                          <a:ea typeface="Public Sans" pitchFamily="34" charset="-122"/>
+                          <a:cs typeface="Public Sans" pitchFamily="34" charset="-120"/>
+                        </a:rPr>
+                        <a:t>0.064</a:t>
+                      </a:r>
+                      <a:endParaRPr lang="en-US" sz="1300" dirty="0">
+                        <a:latin typeface="Public Sans" charset="0"/>
+                        <a:ea typeface="Public Sans" charset="0"/>
+                        <a:cs typeface="Public Sans" charset="0"/>
+                      </a:endParaRPr>
+                    </a:p>
+                  </a:txBody>
+                  <a:tcPr marL="57785" marR="57785" marT="57785" marB="57785" anchor="t">
+                    <a:lnL w="12700" cap="flat" cmpd="sng" algn="ctr">
+                      <a:solidFill>
+                        <a:srgbClr val="C8C8C6"/>
+                      </a:solidFill>
+                      <a:prstDash val="solid"/>
+                      <a:round/>
+                      <a:headEnd type="none" w="med" len="med"/>
+                      <a:tailEnd type="none" w="med" len="med"/>
+                    </a:lnL>
+                    <a:lnR w="12700" cap="flat" cmpd="sng" algn="ctr">
+                      <a:solidFill>
+                        <a:srgbClr val="C8C8C6"/>
+                      </a:solidFill>
+                      <a:prstDash val="solid"/>
+                      <a:round/>
+                      <a:headEnd type="none" w="med" len="med"/>
+                      <a:tailEnd type="none" w="med" len="med"/>
+                    </a:lnR>
+                    <a:lnT w="12700" cap="flat" cmpd="sng" algn="ctr">
+                      <a:solidFill>
+                        <a:srgbClr val="C8C8C6"/>
+                      </a:solidFill>
+                      <a:prstDash val="solid"/>
+                      <a:round/>
+                      <a:headEnd type="none" w="med" len="med"/>
+                      <a:tailEnd type="none" w="med" len="med"/>
+                    </a:lnT>
+                    <a:lnB w="12700" cap="flat" cmpd="sng" algn="ctr">
+                      <a:solidFill>
+                        <a:srgbClr val="C8C8C6"/>
+                      </a:solidFill>
+                      <a:prstDash val="solid"/>
+                      <a:round/>
+                      <a:headEnd type="none" w="med" len="med"/>
+                      <a:tailEnd type="none" w="med" len="med"/>
+                    </a:lnB>
+                  </a:tcPr>
+                </a:tc>
+              </a:tr>
+              <a:tr h="359321">
+                <a:tc>
+                  <a:txBody>
+                    <a:bodyPr/>
+                    <a:lstStyle/>
+                    <a:p>
+                      <a:pPr indent="0" marL="0">
+                        <a:lnSpc>
+                          <a:spcPts val="1820"/>
+                        </a:lnSpc>
+                        <a:buNone/>
+                      </a:pPr>
+                      <a:r>
+                        <a:rPr lang="en-US" sz="1300" dirty="0">
+                          <a:solidFill>
+                            <a:srgbClr val="15213B"/>
+                          </a:solidFill>
+                          <a:latin typeface="Public Sans" pitchFamily="34" charset="0"/>
+                          <a:ea typeface="Public Sans" pitchFamily="34" charset="-122"/>
+                          <a:cs typeface="Public Sans" pitchFamily="34" charset="-120"/>
+                        </a:rPr>
+                        <a:t>Model 2 — [Nuno]</a:t>
                       </a:r>
                       <a:endParaRPr lang="en-US" sz="1300" dirty="0">
                         <a:latin typeface="Public Sans" charset="0"/>
@@ -17493,416 +17951,6 @@
                   </a:tcPr>
                 </a:tc>
               </a:tr>
-              <a:tr h="359321">
-                <a:tc>
-                  <a:txBody>
-                    <a:bodyPr/>
-                    <a:lstStyle/>
-                    <a:p>
-                      <a:pPr indent="0" marL="0">
-                        <a:lnSpc>
-                          <a:spcPts val="1820"/>
-                        </a:lnSpc>
-                        <a:buNone/>
-                      </a:pPr>
-                      <a:r>
-                        <a:rPr lang="en-US" sz="1300" dirty="0">
-                          <a:solidFill>
-                            <a:srgbClr val="15213B"/>
-                          </a:solidFill>
-                          <a:latin typeface="Public Sans" pitchFamily="34" charset="0"/>
-                          <a:ea typeface="Public Sans" pitchFamily="34" charset="-122"/>
-                          <a:cs typeface="Public Sans" pitchFamily="34" charset="-120"/>
-                        </a:rPr>
-                        <a:t>Model 2 — [Pedro]</a:t>
-                      </a:r>
-                      <a:endParaRPr lang="en-US" sz="1300" dirty="0">
-                        <a:latin typeface="Public Sans" charset="0"/>
-                        <a:ea typeface="Public Sans" charset="0"/>
-                        <a:cs typeface="Public Sans" charset="0"/>
-                      </a:endParaRPr>
-                    </a:p>
-                  </a:txBody>
-                  <a:tcPr marL="57785" marR="57785" marT="57785" marB="57785" anchor="t">
-                    <a:lnL w="12700" cap="flat" cmpd="sng" algn="ctr">
-                      <a:solidFill>
-                        <a:srgbClr val="C8C8C6"/>
-                      </a:solidFill>
-                      <a:prstDash val="solid"/>
-                      <a:round/>
-                      <a:headEnd type="none" w="med" len="med"/>
-                      <a:tailEnd type="none" w="med" len="med"/>
-                    </a:lnL>
-                    <a:lnR w="12700" cap="flat" cmpd="sng" algn="ctr">
-                      <a:solidFill>
-                        <a:srgbClr val="C8C8C6"/>
-                      </a:solidFill>
-                      <a:prstDash val="solid"/>
-                      <a:round/>
-                      <a:headEnd type="none" w="med" len="med"/>
-                      <a:tailEnd type="none" w="med" len="med"/>
-                    </a:lnR>
-                    <a:lnT w="12700" cap="flat" cmpd="sng" algn="ctr">
-                      <a:solidFill>
-                        <a:srgbClr val="C8C8C6"/>
-                      </a:solidFill>
-                      <a:prstDash val="solid"/>
-                      <a:round/>
-                      <a:headEnd type="none" w="med" len="med"/>
-                      <a:tailEnd type="none" w="med" len="med"/>
-                    </a:lnT>
-                    <a:lnB w="12700" cap="flat" cmpd="sng" algn="ctr">
-                      <a:solidFill>
-                        <a:srgbClr val="C8C8C6"/>
-                      </a:solidFill>
-                      <a:prstDash val="solid"/>
-                      <a:round/>
-                      <a:headEnd type="none" w="med" len="med"/>
-                      <a:tailEnd type="none" w="med" len="med"/>
-                    </a:lnB>
-                  </a:tcPr>
-                </a:tc>
-                <a:tc>
-                  <a:txBody>
-                    <a:bodyPr/>
-                    <a:lstStyle/>
-                    <a:p>
-                      <a:pPr indent="0" marL="0">
-                        <a:lnSpc>
-                          <a:spcPts val="1820"/>
-                        </a:lnSpc>
-                        <a:buNone/>
-                      </a:pPr>
-                      <a:r>
-                        <a:rPr lang="en-US" sz="1300" dirty="0">
-                          <a:solidFill>
-                            <a:srgbClr val="15213B"/>
-                          </a:solidFill>
-                          <a:latin typeface="Public Sans" pitchFamily="34" charset="0"/>
-                          <a:ea typeface="Public Sans" pitchFamily="34" charset="-122"/>
-                          <a:cs typeface="Public Sans" pitchFamily="34" charset="-120"/>
-                        </a:rPr>
-                        <a:t/>
-                      </a:r>
-                      <a:endParaRPr lang="en-US" sz="1300" dirty="0">
-                        <a:latin typeface="Public Sans" charset="0"/>
-                        <a:ea typeface="Public Sans" charset="0"/>
-                        <a:cs typeface="Public Sans" charset="0"/>
-                      </a:endParaRPr>
-                    </a:p>
-                  </a:txBody>
-                  <a:tcPr marL="57785" marR="57785" marT="57785" marB="57785" anchor="t">
-                    <a:lnL w="12700" cap="flat" cmpd="sng" algn="ctr">
-                      <a:solidFill>
-                        <a:srgbClr val="C8C8C6"/>
-                      </a:solidFill>
-                      <a:prstDash val="solid"/>
-                      <a:round/>
-                      <a:headEnd type="none" w="med" len="med"/>
-                      <a:tailEnd type="none" w="med" len="med"/>
-                    </a:lnL>
-                    <a:lnR w="12700" cap="flat" cmpd="sng" algn="ctr">
-                      <a:solidFill>
-                        <a:srgbClr val="C8C8C6"/>
-                      </a:solidFill>
-                      <a:prstDash val="solid"/>
-                      <a:round/>
-                      <a:headEnd type="none" w="med" len="med"/>
-                      <a:tailEnd type="none" w="med" len="med"/>
-                    </a:lnR>
-                    <a:lnT w="12700" cap="flat" cmpd="sng" algn="ctr">
-                      <a:solidFill>
-                        <a:srgbClr val="C8C8C6"/>
-                      </a:solidFill>
-                      <a:prstDash val="solid"/>
-                      <a:round/>
-                      <a:headEnd type="none" w="med" len="med"/>
-                      <a:tailEnd type="none" w="med" len="med"/>
-                    </a:lnT>
-                    <a:lnB w="12700" cap="flat" cmpd="sng" algn="ctr">
-                      <a:solidFill>
-                        <a:srgbClr val="C8C8C6"/>
-                      </a:solidFill>
-                      <a:prstDash val="solid"/>
-                      <a:round/>
-                      <a:headEnd type="none" w="med" len="med"/>
-                      <a:tailEnd type="none" w="med" len="med"/>
-                    </a:lnB>
-                  </a:tcPr>
-                </a:tc>
-                <a:tc>
-                  <a:txBody>
-                    <a:bodyPr/>
-                    <a:lstStyle/>
-                    <a:p>
-                      <a:pPr indent="0" marL="0">
-                        <a:lnSpc>
-                          <a:spcPts val="1820"/>
-                        </a:lnSpc>
-                        <a:buNone/>
-                      </a:pPr>
-                      <a:r>
-                        <a:rPr lang="en-US" sz="1300" dirty="0">
-                          <a:solidFill>
-                            <a:srgbClr val="15213B"/>
-                          </a:solidFill>
-                          <a:latin typeface="Public Sans" pitchFamily="34" charset="0"/>
-                          <a:ea typeface="Public Sans" pitchFamily="34" charset="-122"/>
-                          <a:cs typeface="Public Sans" pitchFamily="34" charset="-120"/>
-                        </a:rPr>
-                        <a:t/>
-                      </a:r>
-                      <a:endParaRPr lang="en-US" sz="1300" dirty="0">
-                        <a:latin typeface="Public Sans" charset="0"/>
-                        <a:ea typeface="Public Sans" charset="0"/>
-                        <a:cs typeface="Public Sans" charset="0"/>
-                      </a:endParaRPr>
-                    </a:p>
-                  </a:txBody>
-                  <a:tcPr marL="57785" marR="57785" marT="57785" marB="57785" anchor="t">
-                    <a:lnL w="12700" cap="flat" cmpd="sng" algn="ctr">
-                      <a:solidFill>
-                        <a:srgbClr val="C8C8C6"/>
-                      </a:solidFill>
-                      <a:prstDash val="solid"/>
-                      <a:round/>
-                      <a:headEnd type="none" w="med" len="med"/>
-                      <a:tailEnd type="none" w="med" len="med"/>
-                    </a:lnL>
-                    <a:lnR w="12700" cap="flat" cmpd="sng" algn="ctr">
-                      <a:solidFill>
-                        <a:srgbClr val="C8C8C6"/>
-                      </a:solidFill>
-                      <a:prstDash val="solid"/>
-                      <a:round/>
-                      <a:headEnd type="none" w="med" len="med"/>
-                      <a:tailEnd type="none" w="med" len="med"/>
-                    </a:lnR>
-                    <a:lnT w="12700" cap="flat" cmpd="sng" algn="ctr">
-                      <a:solidFill>
-                        <a:srgbClr val="C8C8C6"/>
-                      </a:solidFill>
-                      <a:prstDash val="solid"/>
-                      <a:round/>
-                      <a:headEnd type="none" w="med" len="med"/>
-                      <a:tailEnd type="none" w="med" len="med"/>
-                    </a:lnT>
-                    <a:lnB w="12700" cap="flat" cmpd="sng" algn="ctr">
-                      <a:solidFill>
-                        <a:srgbClr val="C8C8C6"/>
-                      </a:solidFill>
-                      <a:prstDash val="solid"/>
-                      <a:round/>
-                      <a:headEnd type="none" w="med" len="med"/>
-                      <a:tailEnd type="none" w="med" len="med"/>
-                    </a:lnB>
-                  </a:tcPr>
-                </a:tc>
-                <a:tc>
-                  <a:txBody>
-                    <a:bodyPr/>
-                    <a:lstStyle/>
-                    <a:p>
-                      <a:pPr indent="0" marL="0">
-                        <a:lnSpc>
-                          <a:spcPts val="1820"/>
-                        </a:lnSpc>
-                        <a:buNone/>
-                      </a:pPr>
-                      <a:r>
-                        <a:rPr lang="en-US" sz="1300" dirty="0">
-                          <a:solidFill>
-                            <a:srgbClr val="15213B"/>
-                          </a:solidFill>
-                          <a:latin typeface="Public Sans" pitchFamily="34" charset="0"/>
-                          <a:ea typeface="Public Sans" pitchFamily="34" charset="-122"/>
-                          <a:cs typeface="Public Sans" pitchFamily="34" charset="-120"/>
-                        </a:rPr>
-                        <a:t/>
-                      </a:r>
-                      <a:endParaRPr lang="en-US" sz="1300" dirty="0">
-                        <a:latin typeface="Public Sans" charset="0"/>
-                        <a:ea typeface="Public Sans" charset="0"/>
-                        <a:cs typeface="Public Sans" charset="0"/>
-                      </a:endParaRPr>
-                    </a:p>
-                  </a:txBody>
-                  <a:tcPr marL="57785" marR="57785" marT="57785" marB="57785" anchor="t">
-                    <a:lnL w="12700" cap="flat" cmpd="sng" algn="ctr">
-                      <a:solidFill>
-                        <a:srgbClr val="C8C8C6"/>
-                      </a:solidFill>
-                      <a:prstDash val="solid"/>
-                      <a:round/>
-                      <a:headEnd type="none" w="med" len="med"/>
-                      <a:tailEnd type="none" w="med" len="med"/>
-                    </a:lnL>
-                    <a:lnR w="12700" cap="flat" cmpd="sng" algn="ctr">
-                      <a:solidFill>
-                        <a:srgbClr val="C8C8C6"/>
-                      </a:solidFill>
-                      <a:prstDash val="solid"/>
-                      <a:round/>
-                      <a:headEnd type="none" w="med" len="med"/>
-                      <a:tailEnd type="none" w="med" len="med"/>
-                    </a:lnR>
-                    <a:lnT w="12700" cap="flat" cmpd="sng" algn="ctr">
-                      <a:solidFill>
-                        <a:srgbClr val="C8C8C6"/>
-                      </a:solidFill>
-                      <a:prstDash val="solid"/>
-                      <a:round/>
-                      <a:headEnd type="none" w="med" len="med"/>
-                      <a:tailEnd type="none" w="med" len="med"/>
-                    </a:lnT>
-                    <a:lnB w="12700" cap="flat" cmpd="sng" algn="ctr">
-                      <a:solidFill>
-                        <a:srgbClr val="C8C8C6"/>
-                      </a:solidFill>
-                      <a:prstDash val="solid"/>
-                      <a:round/>
-                      <a:headEnd type="none" w="med" len="med"/>
-                      <a:tailEnd type="none" w="med" len="med"/>
-                    </a:lnB>
-                  </a:tcPr>
-                </a:tc>
-                <a:tc>
-                  <a:txBody>
-                    <a:bodyPr/>
-                    <a:lstStyle/>
-                    <a:p>
-                      <a:pPr indent="0" marL="0">
-                        <a:lnSpc>
-                          <a:spcPts val="1820"/>
-                        </a:lnSpc>
-                        <a:buNone/>
-                      </a:pPr>
-                      <a:r>
-                        <a:rPr lang="en-US" sz="1300" dirty="0">
-                          <a:solidFill>
-                            <a:srgbClr val="15213B"/>
-                          </a:solidFill>
-                          <a:latin typeface="Public Sans" pitchFamily="34" charset="0"/>
-                          <a:ea typeface="Public Sans" pitchFamily="34" charset="-122"/>
-                          <a:cs typeface="Public Sans" pitchFamily="34" charset="-120"/>
-                        </a:rPr>
-                        <a:t/>
-                      </a:r>
-                      <a:endParaRPr lang="en-US" sz="1300" dirty="0">
-                        <a:latin typeface="Public Sans" charset="0"/>
-                        <a:ea typeface="Public Sans" charset="0"/>
-                        <a:cs typeface="Public Sans" charset="0"/>
-                      </a:endParaRPr>
-                    </a:p>
-                  </a:txBody>
-                  <a:tcPr marL="57785" marR="57785" marT="57785" marB="57785" anchor="t">
-                    <a:lnL w="12700" cap="flat" cmpd="sng" algn="ctr">
-                      <a:solidFill>
-                        <a:srgbClr val="C8C8C6"/>
-                      </a:solidFill>
-                      <a:prstDash val="solid"/>
-                      <a:round/>
-                      <a:headEnd type="none" w="med" len="med"/>
-                      <a:tailEnd type="none" w="med" len="med"/>
-                    </a:lnL>
-                    <a:lnR w="12700" cap="flat" cmpd="sng" algn="ctr">
-                      <a:solidFill>
-                        <a:srgbClr val="C8C8C6"/>
-                      </a:solidFill>
-                      <a:prstDash val="solid"/>
-                      <a:round/>
-                      <a:headEnd type="none" w="med" len="med"/>
-                      <a:tailEnd type="none" w="med" len="med"/>
-                    </a:lnR>
-                    <a:lnT w="12700" cap="flat" cmpd="sng" algn="ctr">
-                      <a:solidFill>
-                        <a:srgbClr val="C8C8C6"/>
-                      </a:solidFill>
-                      <a:prstDash val="solid"/>
-                      <a:round/>
-                      <a:headEnd type="none" w="med" len="med"/>
-                      <a:tailEnd type="none" w="med" len="med"/>
-                    </a:lnT>
-                    <a:lnB w="12700" cap="flat" cmpd="sng" algn="ctr">
-                      <a:solidFill>
-                        <a:srgbClr val="C8C8C6"/>
-                      </a:solidFill>
-                      <a:prstDash val="solid"/>
-                      <a:round/>
-                      <a:headEnd type="none" w="med" len="med"/>
-                      <a:tailEnd type="none" w="med" len="med"/>
-                    </a:lnB>
-                  </a:tcPr>
-                </a:tc>
-                <a:tc>
-                  <a:txBody>
-                    <a:bodyPr/>
-                    <a:lstStyle/>
-                    <a:p>
-                      <a:pPr indent="0" marL="0">
-                        <a:lnSpc>
-                          <a:spcPts val="1820"/>
-                        </a:lnSpc>
-                        <a:buNone/>
-                      </a:pPr>
-                      <a:r>
-                        <a:rPr lang="en-US" sz="1300" dirty="0">
-                          <a:solidFill>
-                            <a:srgbClr val="15213B"/>
-                          </a:solidFill>
-                          <a:latin typeface="Public Sans" pitchFamily="34" charset="0"/>
-                          <a:ea typeface="Public Sans" pitchFamily="34" charset="-122"/>
-                          <a:cs typeface="Public Sans" pitchFamily="34" charset="-120"/>
-                        </a:rPr>
-                        <a:t/>
-                      </a:r>
-                      <a:endParaRPr lang="en-US" sz="1300" dirty="0">
-                        <a:latin typeface="Public Sans" charset="0"/>
-                        <a:ea typeface="Public Sans" charset="0"/>
-                        <a:cs typeface="Public Sans" charset="0"/>
-                      </a:endParaRPr>
-                    </a:p>
-                  </a:txBody>
-                  <a:tcPr marL="57785" marR="57785" marT="57785" marB="57785" anchor="t">
-                    <a:lnL w="12700" cap="flat" cmpd="sng" algn="ctr">
-                      <a:solidFill>
-                        <a:srgbClr val="C8C8C6"/>
-                      </a:solidFill>
-                      <a:prstDash val="solid"/>
-                      <a:round/>
-                      <a:headEnd type="none" w="med" len="med"/>
-                      <a:tailEnd type="none" w="med" len="med"/>
-                    </a:lnL>
-                    <a:lnR w="12700" cap="flat" cmpd="sng" algn="ctr">
-                      <a:solidFill>
-                        <a:srgbClr val="C8C8C6"/>
-                      </a:solidFill>
-                      <a:prstDash val="solid"/>
-                      <a:round/>
-                      <a:headEnd type="none" w="med" len="med"/>
-                      <a:tailEnd type="none" w="med" len="med"/>
-                    </a:lnR>
-                    <a:lnT w="12700" cap="flat" cmpd="sng" algn="ctr">
-                      <a:solidFill>
-                        <a:srgbClr val="C8C8C6"/>
-                      </a:solidFill>
-                      <a:prstDash val="solid"/>
-                      <a:round/>
-                      <a:headEnd type="none" w="med" len="med"/>
-                      <a:tailEnd type="none" w="med" len="med"/>
-                    </a:lnT>
-                    <a:lnB w="12700" cap="flat" cmpd="sng" algn="ctr">
-                      <a:solidFill>
-                        <a:srgbClr val="C8C8C6"/>
-                      </a:solidFill>
-                      <a:prstDash val="solid"/>
-                      <a:round/>
-                      <a:headEnd type="none" w="med" len="med"/>
-                      <a:tailEnd type="none" w="med" len="med"/>
-                    </a:lnB>
-                  </a:tcPr>
-                </a:tc>
-              </a:tr>
             </a:tbl>
           </a:graphicData>
         </a:graphic>
@@ -17916,7 +17964,7 @@
         <p:spPr>
           <a:xfrm>
             <a:off x="812800" y="4114800"/>
-            <a:ext cx="10566400" cy="853380"/>
+            <a:ext cx="10566400" cy="1150000"/>
           </a:xfrm>
           <a:prstGeom prst="roundRect">
             <a:avLst>
@@ -17949,7 +17997,7 @@
                 <a:ea typeface="Public Sans" pitchFamily="34" charset="-122"/>
                 <a:cs typeface="Public Sans" pitchFamily="34" charset="-120"/>
               </a:rPr>
-              <a:t>[To be filled once Nuno's and Pedro's models are scored: which model wins, and what it means for dispatch — share of fatal crashes reached with 15% of ALS capacity, and cost vs. p*]</a:t>
+              <a:t>Best so far: Gradient Boosting reaches 31.5% of fatal crashes with 15% of ALS capacity (225 of 715 in 2024–25), 2.1× random, 3 more than the baseline. Small gain: with only road, location and time at t=0, the data limits ranking more than the algorithm. [Nuno: add Model 2 and final winner]</a:t>
             </a:r>
             <a:endParaRPr lang="en-US" sz="1400" dirty="0"/>
           </a:p>

--- a/reports/presentation/Road Safety Predictive Analytics — Group 6.pptx
+++ b/reports/presentation/Road Safety Predictive Analytics — Group 6.pptx
@@ -27,6 +27,8 @@
     <p:sldId id="280" r:id="rId35"/>
     <p:sldId id="281" r:id="rId36"/>
     <p:sldId id="282" r:id="rId37"/>
+    <p:sldId id="284" r:id="rId39"/>
+    <p:sldId id="285" r:id="rId40"/>
     <p:sldId id="272" r:id="rId18"/>
     <p:sldId id="273" r:id="rId19"/>
     <p:sldId id="283" r:id="rId38"/>
@@ -10017,7 +10019,7 @@
                 <a:ea typeface="Public Sans" pitchFamily="34" charset="-122"/>
                 <a:cs typeface="Public Sans" pitchFamily="34" charset="-120"/>
               </a:rPr>
-              <a:t>Gradient Boosting (Pedro): PR-AUC 0.126, lift 2.10× on 2024–25 · [Nuno's model to add]</a:t>
+              <a:t>Gradient Boosting (Pedro): PR-AUC 0.126, lift 2.10× · MLP (Nuno): PR-AUC 0.118, lift 2.08×</a:t>
             </a:r>
             <a:endParaRPr lang="en-US" sz="1200" dirty="0"/>
           </a:p>
@@ -11590,7 +11592,7 @@
                           <a:ea typeface="Public Sans" pitchFamily="34" charset="-122"/>
                           <a:cs typeface="Public Sans" pitchFamily="34" charset="-120"/>
                         </a:rPr>
-                        <a:t>Model 2 — [Nuno]</a:t>
+                        <a:t>Model 2 — MLP neural network (Nuno)</a:t>
                       </a:r>
                       <a:endParaRPr lang="en-US" sz="1300" dirty="0">
                         <a:latin typeface="Public Sans" charset="0"/>
@@ -11658,7 +11660,7 @@
                           <a:ea typeface="Public Sans" pitchFamily="34" charset="-122"/>
                           <a:cs typeface="Public Sans" pitchFamily="34" charset="-120"/>
                         </a:rPr>
-                        <a:t>[to fill]</a:t>
+                        <a:t>Different bias from trees: smooth combinations of all features; bag of 5 networks on undersampled data; LDA tested alongside</a:t>
                       </a:r>
                       <a:endParaRPr lang="en-US" sz="1300" dirty="0">
                         <a:latin typeface="Public Sans" charset="0"/>
@@ -11726,7 +11728,7 @@
                           <a:ea typeface="Public Sans" pitchFamily="34" charset="-122"/>
                           <a:cs typeface="Public Sans" pitchFamily="34" charset="-120"/>
                         </a:rPr>
-                        <a:t>[ ] Nuno</a:t>
+                        <a:t>✓ Done (Nuno)</a:t>
                       </a:r>
                       <a:endParaRPr lang="en-US" sz="1300" dirty="0">
                         <a:latin typeface="Public Sans" charset="0"/>
@@ -15508,7 +15510,7 @@
                 <a:ea typeface="Libre Baskerville" pitchFamily="18" charset="-122"/>
                 <a:cs typeface="Libre Baskerville" pitchFamily="18" charset="-120"/>
               </a:rPr>
-              <a:t>Model 2 — [Nuno: model name]</a:t>
+              <a:t>Model 2 — MLP neural network (non-tree)</a:t>
             </a:r>
             <a:endParaRPr lang="en-US" sz="3000" dirty="0"/>
           </a:p>
@@ -15553,7 +15555,7 @@
                 <a:ea typeface="Public Sans" pitchFamily="34" charset="-122"/>
                 <a:cs typeface="Public Sans" pitchFamily="34" charset="-120"/>
               </a:rPr>
-              <a:t>[To be filled by Nuno]</a:t>
+              <a:t>Bag of 5 MLPs (32 → 16 neurons) on the one-hot encoded, scaled features; compared with LDA (linear discriminant analysis).</a:t>
             </a:r>
             <a:endParaRPr lang="en-US" sz="1300" dirty="0"/>
           </a:p>
@@ -15574,7 +15576,7 @@
                 <a:ea typeface="Public Sans" pitchFamily="34" charset="-122"/>
                 <a:cs typeface="Public Sans" pitchFamily="34" charset="-120"/>
               </a:rPr>
-              <a:t>[Model chosen and why it fits the problem]</a:t>
+              <a:t>Why: a different bias from trees (smooth combinations of all features), so it tests whether the ceiling is the algorithm or the data.</a:t>
             </a:r>
             <a:endParaRPr lang="en-US" sz="1300" dirty="0"/>
           </a:p>
@@ -15595,7 +15597,7 @@
                 <a:ea typeface="Public Sans" pitchFamily="34" charset="-122"/>
                 <a:cs typeface="Public Sans" pitchFamily="34" charset="-120"/>
               </a:rPr>
-              <a:t>[Tuning on validation 2022–2023: what was tried, what was kept]</a:t>
+              <a:t>Imbalance &amp; tuning on validation 2022–23: each network sees all fatal crashes + an equal random sample of non-fatal ones; 8 configs. One network varied 0.115–0.125 PR-AUC by seed alone; the average of 5 gave 0.130.</a:t>
             </a:r>
             <a:endParaRPr lang="en-US" sz="1300" dirty="0"/>
           </a:p>
@@ -15616,7 +15618,7 @@
                 <a:ea typeface="Public Sans" pitchFamily="34" charset="-122"/>
                 <a:cs typeface="Public Sans" pitchFamily="34" charset="-120"/>
               </a:rPr>
-              <a:t>[Validation results: PR-AUC, recall &amp; lift @ top 15%, Brier after calibration]</a:t>
+              <a:t>Validation: PR-AUC 0.130, lift 2.17×. Test 2024–25: PR-AUC 0.118, recall 31.2%, lift 2.08×, Brier 0.065 after sigmoid calibration. LDA: lift 1.88×.</a:t>
             </a:r>
             <a:endParaRPr lang="en-US" sz="1300" dirty="0"/>
           </a:p>
@@ -15637,7 +15639,7 @@
                 <a:ea typeface="Public Sans" pitchFamily="34" charset="-122"/>
                 <a:cs typeface="Public Sans" pitchFamily="34" charset="-120"/>
               </a:rPr>
-              <a:t>[What the model learned: most important features]</a:t>
+              <a:t>Top drivers: time of day, roadway type, segment risk, downhill / uphill — the same as Gradient Boosting.</a:t>
             </a:r>
             <a:endParaRPr lang="en-US" sz="1300" dirty="0"/>
           </a:p>
@@ -15731,6 +15733,54 @@
           </a:p>
         </p:txBody>
       </p:sp>
+      <p:pic>
+        <p:nvPicPr>
+          <p:cNvPr id="7" name="Picture 6" descr="task3_nontree_pr_curve.png"/>
+          <p:cNvPicPr>
+            <a:picLocks noChangeAspect="1"/>
+          </p:cNvPicPr>
+          <p:nvPr/>
+        </p:nvPicPr>
+        <p:blipFill>
+          <a:blip r:embed="rId2"/>
+          <a:stretch>
+            <a:fillRect/>
+          </a:stretch>
+        </p:blipFill>
+        <p:spPr>
+          <a:xfrm>
+            <a:off x="910844" y="3500000"/>
+            <a:ext cx="3309184" cy="2350000"/>
+          </a:xfrm>
+          <a:prstGeom prst="rect">
+            <a:avLst/>
+          </a:prstGeom>
+        </p:spPr>
+      </p:pic>
+      <p:pic>
+        <p:nvPicPr>
+          <p:cNvPr id="8" name="Picture 7" descr="task3_nontree_feature_importance.png"/>
+          <p:cNvPicPr>
+            <a:picLocks noChangeAspect="1"/>
+          </p:cNvPicPr>
+          <p:nvPr/>
+        </p:nvPicPr>
+        <p:blipFill>
+          <a:blip r:embed="rId3"/>
+          <a:stretch>
+            <a:fillRect/>
+          </a:stretch>
+        </p:blipFill>
+        <p:spPr>
+          <a:xfrm>
+            <a:off x="4500844" y="3500000"/>
+            <a:ext cx="5702347" cy="2350000"/>
+          </a:xfrm>
+          <a:prstGeom prst="rect">
+            <a:avLst/>
+          </a:prstGeom>
+        </p:spPr>
+      </p:pic>
     </p:spTree>
   </p:cSld>
   <p:clrMapOvr>
@@ -17562,7 +17612,7 @@
                           <a:ea typeface="Public Sans" pitchFamily="34" charset="-122"/>
                           <a:cs typeface="Public Sans" pitchFamily="34" charset="-120"/>
                         </a:rPr>
-                        <a:t>Model 2 — [Nuno]</a:t>
+                        <a:t>Model 2 — MLP neural net (5-bag) + calibration</a:t>
                       </a:r>
                       <a:endParaRPr lang="en-US" sz="1300" dirty="0">
                         <a:latin typeface="Public Sans" charset="0"/>
@@ -17630,7 +17680,7 @@
                           <a:ea typeface="Public Sans" pitchFamily="34" charset="-122"/>
                           <a:cs typeface="Public Sans" pitchFamily="34" charset="-120"/>
                         </a:rPr>
-                        <a:t/>
+                        <a:t>0.665</a:t>
                       </a:r>
                       <a:endParaRPr lang="en-US" sz="1300" dirty="0">
                         <a:latin typeface="Public Sans" charset="0"/>
@@ -17698,7 +17748,7 @@
                           <a:ea typeface="Public Sans" pitchFamily="34" charset="-122"/>
                           <a:cs typeface="Public Sans" pitchFamily="34" charset="-120"/>
                         </a:rPr>
-                        <a:t/>
+                        <a:t>0.118</a:t>
                       </a:r>
                       <a:endParaRPr lang="en-US" sz="1300" dirty="0">
                         <a:latin typeface="Public Sans" charset="0"/>
@@ -17766,7 +17816,7 @@
                           <a:ea typeface="Public Sans" pitchFamily="34" charset="-122"/>
                           <a:cs typeface="Public Sans" pitchFamily="34" charset="-120"/>
                         </a:rPr>
-                        <a:t/>
+                        <a:t>31.2%</a:t>
                       </a:r>
                       <a:endParaRPr lang="en-US" sz="1300" dirty="0">
                         <a:latin typeface="Public Sans" charset="0"/>
@@ -17834,7 +17884,7 @@
                           <a:ea typeface="Public Sans" pitchFamily="34" charset="-122"/>
                           <a:cs typeface="Public Sans" pitchFamily="34" charset="-120"/>
                         </a:rPr>
-                        <a:t/>
+                        <a:t>2.08×</a:t>
                       </a:r>
                       <a:endParaRPr lang="en-US" sz="1300" dirty="0">
                         <a:latin typeface="Public Sans" charset="0"/>
@@ -17902,7 +17952,7 @@
                           <a:ea typeface="Public Sans" pitchFamily="34" charset="-122"/>
                           <a:cs typeface="Public Sans" pitchFamily="34" charset="-120"/>
                         </a:rPr>
-                        <a:t/>
+                        <a:t>0.065</a:t>
                       </a:r>
                       <a:endParaRPr lang="en-US" sz="1300" dirty="0">
                         <a:latin typeface="Public Sans" charset="0"/>
@@ -17997,7 +18047,7 @@
                 <a:ea typeface="Public Sans" pitchFamily="34" charset="-122"/>
                 <a:cs typeface="Public Sans" pitchFamily="34" charset="-120"/>
               </a:rPr>
-              <a:t>Best so far: Gradient Boosting reaches 31.5% of fatal crashes with 15% of ALS capacity (225 of 715 in 2024–25), 2.1× random, 3 more than the baseline. Small gain: with only road, location and time at t=0, the data limits ranking more than the algorithm. [Nuno: add Model 2 and final winner]</a:t>
+              <a:t>Winner, chosen on validation 2022–23 and confirmed on test: Gradient Boosting reaches 31.5% of fatal crashes with 15% of ALS capacity (225 of 715 in 2024–25), 2.1× random. The MLP reaches 223 and the baseline 222: three model families hit the same ceiling — with only road, location and time at t=0, the data limits ranking, not the algorithm. Random Forest (2.08×) and LDA (1.88×) are in the notebook.</a:t>
             </a:r>
             <a:endParaRPr lang="en-US" sz="1400" dirty="0"/>
           </a:p>
@@ -18492,7 +18542,7 @@
                 <a:ea typeface="Public Sans" pitchFamily="34" charset="-122"/>
                 <a:cs typeface="Public Sans" pitchFamily="34" charset="-120"/>
               </a:rPr>
-              <a:t>[After the final models — e.g. best model reaches X% of fatal crashes with 15% of ALS capacity]</a:t>
+              <a:t>Gradient Boosting: 31.5% of fatal crashes with 15% of ALS capacity (2.1× random); MLP &amp; LR within 3 crashes</a:t>
             </a:r>
             <a:endParaRPr lang="en-US" sz="1300" dirty="0"/>
           </a:p>
@@ -18611,7 +18661,7 @@
                 <a:ea typeface="Public Sans" pitchFamily="34" charset="-122"/>
                 <a:cs typeface="Public Sans" pitchFamily="34" charset="-120"/>
               </a:rPr>
-              <a:t>[What dispatch should do — e.g. send ALS to the top-15% risk calls]</a:t>
+              <a:t>Send ALS to the top-15% risk calls (≈ €585k per 1,000 calls vs. random) · base ALS near North-East hotspots</a:t>
             </a:r>
             <a:endParaRPr lang="en-US" sz="1300" dirty="0"/>
           </a:p>
@@ -18849,7 +18899,7 @@
                 <a:ea typeface="Public Sans" pitchFamily="34" charset="-122"/>
                 <a:cs typeface="Public Sans" pitchFamily="34" charset="-120"/>
               </a:rPr>
-              <a:t>Add weather, traffic and caller details at call intake · finer location once GPS covers all years · test training on 2015+ only</a:t>
+              <a:t>Collect GPS at every call and retrain with location risk (test PR-AUC 0.131 → 0.141) · add weather, traffic &amp; caller details</a:t>
             </a:r>
             <a:endParaRPr lang="en-US" sz="1300" dirty="0"/>
           </a:p>
@@ -18937,7 +18987,7 @@
                 <a:ea typeface="Public Sans" pitchFamily="34" charset="-122"/>
                 <a:cs typeface="Public Sans" pitchFamily="34" charset="-120"/>
               </a:rPr>
-              <a:t>24</a:t>
+              <a:t>26</a:t>
             </a:r>
             <a:endParaRPr lang="en-US" sz="1200" dirty="0"/>
           </a:p>
@@ -19898,7 +19948,7 @@
                 <a:ea typeface="Public Sans" pitchFamily="34" charset="-122"/>
                 <a:cs typeface="Public Sans" pitchFamily="34" charset="-120"/>
               </a:rPr>
-              <a:t>26</a:t>
+              <a:t>28</a:t>
             </a:r>
             <a:endParaRPr lang="en-US" sz="1200" dirty="0"/>
           </a:p>
@@ -20744,7 +20794,7 @@
                 <a:ea typeface="Public Sans" pitchFamily="34" charset="-122"/>
                 <a:cs typeface="Public Sans" pitchFamily="34" charset="-120"/>
               </a:rPr>
-              <a:t>27</a:t>
+              <a:t>29</a:t>
             </a:r>
             <a:endParaRPr lang="en-US" sz="1200" dirty="0"/>
           </a:p>
@@ -20924,6 +20974,334 @@
 </p:sld>
 </file>
 
+<file path=ppt/slides/slide29.xml><?xml version="1.0" encoding="utf-8"?>
+<p:sld xmlns:a="http://schemas.openxmlformats.org/drawingml/2006/main" xmlns:p="http://schemas.openxmlformats.org/presentationml/2006/main" xmlns:r="http://schemas.openxmlformats.org/officeDocument/2006/relationships">
+  <p:cSld>
+    <p:spTree>
+      <p:nvGrpSpPr>
+        <p:cNvPr id="1" name=""/>
+        <p:cNvGrpSpPr/>
+        <p:nvPr/>
+      </p:nvGrpSpPr>
+      <p:grpSpPr/>
+      <p:sp>
+        <p:nvSpPr>
+          <p:cNvPr id="2" name="Text 0"/>
+          <p:cNvSpPr/>
+          <p:nvPr/>
+        </p:nvSpPr>
+        <p:spPr>
+          <a:xfrm>
+            <a:off x="812800" y="812800"/>
+            <a:ext cx="10883392" cy="238720"/>
+          </a:xfrm>
+          <a:prstGeom prst="rect">
+            <a:avLst/>
+          </a:prstGeom>
+          <a:noFill/>
+          <a:ln/>
+        </p:spPr>
+        <p:txBody>
+          <a:bodyPr wrap="square" lIns="0" tIns="0" rIns="0" bIns="0" rtlCol="0" anchor="t">
+            <a:normAutofit/>
+          </a:bodyPr>
+          <a:lstStyle/>
+          <a:p>
+            <a:pPr algn="l" indent="0" marL="0">
+              <a:lnSpc>
+                <a:spcPts val="1680"/>
+              </a:lnSpc>
+              <a:buNone/>
+            </a:pPr>
+            <a:r>
+              <a:rPr lang="en-US" sz="1200" b="1" spc="150" kern="0" dirty="0">
+                <a:solidFill>
+                  <a:srgbClr val="15213B"/>
+                </a:solidFill>
+                <a:latin typeface="Public Sans" pitchFamily="34" charset="0"/>
+                <a:ea typeface="Public Sans" pitchFamily="34" charset="-122"/>
+                <a:cs typeface="Public Sans" pitchFamily="34" charset="-120"/>
+              </a:rPr>
+              <a:t>04 · ORIGINALITY</a:t>
+            </a:r>
+            <a:endParaRPr lang="en-US" sz="1200" dirty="0"/>
+          </a:p>
+        </p:txBody>
+      </p:sp>
+      <p:sp>
+        <p:nvSpPr>
+          <p:cNvPr id="3" name="Text 1"/>
+          <p:cNvSpPr/>
+          <p:nvPr>
+            <p:ph type="title"/>
+          </p:nvPr>
+        </p:nvSpPr>
+        <p:spPr>
+          <a:xfrm>
+            <a:off x="812800" y="1026120"/>
+            <a:ext cx="10883392" cy="463550"/>
+          </a:xfrm>
+          <a:prstGeom prst="rect">
+            <a:avLst/>
+          </a:prstGeom>
+          <a:noFill/>
+          <a:ln/>
+        </p:spPr>
+        <p:txBody>
+          <a:bodyPr wrap="square" lIns="0" tIns="0" rIns="0" bIns="0" rtlCol="0" anchor="t">
+            <a:normAutofit/>
+          </a:bodyPr>
+          <a:lstStyle/>
+          <a:p>
+            <a:pPr algn="l" indent="0" marL="0">
+              <a:lnSpc>
+                <a:spcPts val="3450"/>
+              </a:lnSpc>
+              <a:buNone/>
+            </a:pPr>
+            <a:r>
+              <a:rPr lang="en-US" sz="3000" b="1" i="0" dirty="0">
+                <a:solidFill>
+                  <a:srgbClr val="15213B"/>
+                </a:solidFill>
+                <a:latin typeface="Libre Baskerville" pitchFamily="18" charset="0"/>
+                <a:ea typeface="Libre Baskerville" pitchFamily="18" charset="-122"/>
+                <a:cs typeface="Libre Baskerville" pitchFamily="18" charset="-120"/>
+              </a:rPr>
+              <a:t>What is the model worth? Cost-benefit of ALS capacity</a:t>
+            </a:r>
+            <a:endParaRPr lang="en-US" sz="3000" dirty="0"/>
+          </a:p>
+        </p:txBody>
+      </p:sp>
+      <p:sp>
+        <p:nvSpPr>
+          <p:cNvPr id="4" name="Text 2"/>
+          <p:cNvSpPr/>
+          <p:nvPr/>
+        </p:nvSpPr>
+        <p:spPr>
+          <a:xfrm>
+            <a:off x="6400000" y="1642070"/>
+            <a:ext cx="5288572" cy="4300000"/>
+          </a:xfrm>
+          <a:prstGeom prst="rect">
+            <a:avLst/>
+          </a:prstGeom>
+          <a:noFill/>
+          <a:ln/>
+        </p:spPr>
+        <p:txBody>
+          <a:bodyPr wrap="square" lIns="0" tIns="0" rIns="0" bIns="0" rtlCol="0" anchor="t">
+            <a:normAutofit/>
+          </a:bodyPr>
+          <a:lstStyle/>
+          <a:p>
+            <a:pPr algn="l" marL="155956" indent="-155956">
+              <a:lnSpc>
+                <a:spcPts val="1950"/>
+              </a:lnSpc>
+              <a:buSzPct val="100000"/>
+              <a:buChar char="•"/>
+            </a:pPr>
+            <a:r>
+              <a:rPr lang="en-US" sz="1300" dirty="0">
+                <a:solidFill>
+                  <a:srgbClr val="46516B"/>
+                </a:solidFill>
+                <a:latin typeface="Public Sans" pitchFamily="34" charset="0"/>
+                <a:ea typeface="Public Sans" pitchFamily="34" charset="-122"/>
+                <a:cs typeface="Public Sans" pitchFamily="34" charset="-120"/>
+              </a:rPr>
+              <a:t>At 15% capacity, an ALS unit sent by the model reaches a fatal crash 14.9% of the time — vs. 7.1% when sent at random.</a:t>
+            </a:r>
+            <a:endParaRPr lang="en-US" sz="1300" dirty="0"/>
+          </a:p>
+          <a:p>
+            <a:pPr algn="l" marL="155956" indent="-155956">
+              <a:lnSpc>
+                <a:spcPts val="1950"/>
+              </a:lnSpc>
+              <a:buSzPct val="100000"/>
+              <a:buChar char="•"/>
+            </a:pPr>
+            <a:r>
+              <a:rPr lang="en-US" sz="1300" dirty="0">
+                <a:solidFill>
+                  <a:srgbClr val="46516B"/>
+                </a:solidFill>
+                <a:latin typeface="Public Sans" pitchFamily="34" charset="0"/>
+                <a:ea typeface="Public Sans" pitchFamily="34" charset="-122"/>
+                <a:cs typeface="Public Sans" pitchFamily="34" charset="-120"/>
+              </a:rPr>
+              <a:t>≈ €585k of value added per 1,000 calls vs. random dispatch (€2,500 per ALS, €50,000 per fatal crash reached).</a:t>
+            </a:r>
+            <a:endParaRPr lang="en-US" sz="1300" dirty="0"/>
+          </a:p>
+          <a:p>
+            <a:pPr algn="l" marL="155956" indent="-155956">
+              <a:lnSpc>
+                <a:spcPts val="1950"/>
+              </a:lnSpc>
+              <a:buSzPct val="100000"/>
+              <a:buChar char="•"/>
+            </a:pPr>
+            <a:r>
+              <a:rPr lang="en-US" sz="1300" dirty="0">
+                <a:solidFill>
+                  <a:srgbClr val="46516B"/>
+                </a:solidFill>
+                <a:latin typeface="Public Sans" pitchFamily="34" charset="0"/>
+                <a:ea typeface="Public Sans" pitchFamily="34" charset="-122"/>
+                <a:cs typeface="Public Sans" pitchFamily="34" charset="-120"/>
+              </a:rPr>
+              <a:t>Robust to the €50k assumption: dispatch pays off once reaching a fatal crash is worth &gt; €16.8k with the model, vs. &gt; €35.2k at random.</a:t>
+            </a:r>
+            <a:endParaRPr lang="en-US" sz="1300" dirty="0"/>
+          </a:p>
+          <a:p>
+            <a:pPr algn="l" marL="155956" indent="-155956">
+              <a:lnSpc>
+                <a:spcPts val="1950"/>
+              </a:lnSpc>
+              <a:buSzPct val="100000"/>
+              <a:buChar char="•"/>
+            </a:pPr>
+            <a:r>
+              <a:rPr lang="en-US" sz="1300" dirty="0">
+                <a:solidFill>
+                  <a:srgbClr val="46516B"/>
+                </a:solidFill>
+                <a:latin typeface="Public Sans" pitchFamily="34" charset="0"/>
+                <a:ea typeface="Public Sans" pitchFamily="34" charset="-122"/>
+                <a:cs typeface="Public Sans" pitchFamily="34" charset="-120"/>
+              </a:rPr>
+              <a:t>Net benefit peaks at ~64% capacity: ALS is undersized, with diminishing returns — the first 15% is worth €743k per 1,000 calls, the next 10% only €278k more.</a:t>
+            </a:r>
+            <a:endParaRPr lang="en-US" sz="1300" dirty="0"/>
+          </a:p>
+        </p:txBody>
+      </p:sp>
+      <p:sp>
+        <p:nvSpPr>
+          <p:cNvPr id="5" name="Text 3"/>
+          <p:cNvSpPr/>
+          <p:nvPr/>
+        </p:nvSpPr>
+        <p:spPr>
+          <a:xfrm>
+            <a:off x="812800" y="6238280"/>
+            <a:ext cx="4057174" cy="238720"/>
+          </a:xfrm>
+          <a:prstGeom prst="rect">
+            <a:avLst/>
+          </a:prstGeom>
+          <a:noFill/>
+          <a:ln/>
+        </p:spPr>
+        <p:txBody>
+          <a:bodyPr wrap="square" lIns="0" tIns="0" rIns="0" bIns="0" rtlCol="0" anchor="t">
+            <a:normAutofit/>
+          </a:bodyPr>
+          <a:lstStyle/>
+          <a:p>
+            <a:pPr algn="l" indent="0" marL="0">
+              <a:lnSpc>
+                <a:spcPts val="1680"/>
+              </a:lnSpc>
+              <a:buNone/>
+            </a:pPr>
+            <a:r>
+              <a:rPr lang="en-US" sz="1200" dirty="0">
+                <a:solidFill>
+                  <a:srgbClr val="8B9099"/>
+                </a:solidFill>
+                <a:latin typeface="Public Sans" pitchFamily="34" charset="0"/>
+                <a:ea typeface="Public Sans" pitchFamily="34" charset="-122"/>
+                <a:cs typeface="Public Sans" pitchFamily="34" charset="-120"/>
+              </a:rPr>
+              <a:t>Road Safety Predictive Analytics — Group 6</a:t>
+            </a:r>
+            <a:endParaRPr lang="en-US" sz="1200" dirty="0"/>
+          </a:p>
+        </p:txBody>
+      </p:sp>
+      <p:sp>
+        <p:nvSpPr>
+          <p:cNvPr id="6" name="Text 4"/>
+          <p:cNvSpPr/>
+          <p:nvPr/>
+        </p:nvSpPr>
+        <p:spPr>
+          <a:xfrm>
+            <a:off x="11221145" y="6238280"/>
+            <a:ext cx="208855" cy="238720"/>
+          </a:xfrm>
+          <a:prstGeom prst="rect">
+            <a:avLst/>
+          </a:prstGeom>
+          <a:noFill/>
+          <a:ln/>
+        </p:spPr>
+        <p:txBody>
+          <a:bodyPr wrap="square" lIns="0" tIns="0" rIns="0" bIns="0" rtlCol="0" anchor="t">
+            <a:normAutofit/>
+          </a:bodyPr>
+          <a:lstStyle/>
+          <a:p>
+            <a:pPr algn="l" indent="0" marL="0">
+              <a:lnSpc>
+                <a:spcPts val="1680"/>
+              </a:lnSpc>
+              <a:buNone/>
+            </a:pPr>
+            <a:r>
+              <a:rPr lang="en-US" sz="1200" dirty="0">
+                <a:solidFill>
+                  <a:srgbClr val="8B9099"/>
+                </a:solidFill>
+                <a:latin typeface="Public Sans" pitchFamily="34" charset="0"/>
+                <a:ea typeface="Public Sans" pitchFamily="34" charset="-122"/>
+                <a:cs typeface="Public Sans" pitchFamily="34" charset="-120"/>
+              </a:rPr>
+              <a:t>23</a:t>
+            </a:r>
+            <a:endParaRPr lang="en-US" sz="1200" dirty="0"/>
+          </a:p>
+        </p:txBody>
+      </p:sp>
+      <p:pic>
+        <p:nvPicPr>
+          <p:cNvPr id="7" name="Picture 6" descr="task3_value_vs_capacity.png"/>
+          <p:cNvPicPr>
+            <a:picLocks noChangeAspect="1"/>
+          </p:cNvPicPr>
+          <p:nvPr/>
+        </p:nvPicPr>
+        <p:blipFill>
+          <a:blip r:embed="rId2"/>
+          <a:stretch>
+            <a:fillRect/>
+          </a:stretch>
+        </p:blipFill>
+        <p:spPr>
+          <a:xfrm>
+            <a:off x="812800" y="1642070"/>
+            <a:ext cx="5400000" cy="3349367"/>
+          </a:xfrm>
+          <a:prstGeom prst="rect">
+            <a:avLst/>
+          </a:prstGeom>
+        </p:spPr>
+      </p:pic>
+    </p:spTree>
+  </p:cSld>
+  <p:clrMapOvr>
+    <a:masterClrMapping/>
+  </p:clrMapOvr>
+</p:sld>
+</file>
+
 <file path=ppt/slides/slide3.xml><?xml version="1.0" encoding="utf-8"?>
 <p:sld xmlns:a="http://schemas.openxmlformats.org/drawingml/2006/main" xmlns:r="http://schemas.openxmlformats.org/officeDocument/2006/relationships" xmlns:p="http://schemas.openxmlformats.org/presentationml/2006/main">
   <p:cSld name="Slide 3">
@@ -21451,6 +21829,355 @@
           </a:p>
         </p:txBody>
       </p:sp>
+    </p:spTree>
+  </p:cSld>
+  <p:clrMapOvr>
+    <a:masterClrMapping/>
+  </p:clrMapOvr>
+</p:sld>
+</file>
+
+<file path=ppt/slides/slide30.xml><?xml version="1.0" encoding="utf-8"?>
+<p:sld xmlns:a="http://schemas.openxmlformats.org/drawingml/2006/main" xmlns:p="http://schemas.openxmlformats.org/presentationml/2006/main" xmlns:r="http://schemas.openxmlformats.org/officeDocument/2006/relationships">
+  <p:cSld>
+    <p:spTree>
+      <p:nvGrpSpPr>
+        <p:cNvPr id="1" name=""/>
+        <p:cNvGrpSpPr/>
+        <p:nvPr/>
+      </p:nvGrpSpPr>
+      <p:grpSpPr/>
+      <p:sp>
+        <p:nvSpPr>
+          <p:cNvPr id="2" name="Text 0"/>
+          <p:cNvSpPr/>
+          <p:nvPr/>
+        </p:nvSpPr>
+        <p:spPr>
+          <a:xfrm>
+            <a:off x="812800" y="812800"/>
+            <a:ext cx="10883392" cy="238720"/>
+          </a:xfrm>
+          <a:prstGeom prst="rect">
+            <a:avLst/>
+          </a:prstGeom>
+          <a:noFill/>
+          <a:ln/>
+        </p:spPr>
+        <p:txBody>
+          <a:bodyPr wrap="square" lIns="0" tIns="0" rIns="0" bIns="0" rtlCol="0" anchor="t">
+            <a:normAutofit/>
+          </a:bodyPr>
+          <a:lstStyle/>
+          <a:p>
+            <a:pPr algn="l" indent="0" marL="0">
+              <a:lnSpc>
+                <a:spcPts val="1680"/>
+              </a:lnSpc>
+              <a:buNone/>
+            </a:pPr>
+            <a:r>
+              <a:rPr lang="en-US" sz="1200" b="1" spc="150" kern="0" dirty="0">
+                <a:solidFill>
+                  <a:srgbClr val="15213B"/>
+                </a:solidFill>
+                <a:latin typeface="Public Sans" pitchFamily="34" charset="0"/>
+                <a:ea typeface="Public Sans" pitchFamily="34" charset="-122"/>
+                <a:cs typeface="Public Sans" pitchFamily="34" charset="-120"/>
+              </a:rPr>
+              <a:t>04 · ORIGINALITY</a:t>
+            </a:r>
+            <a:endParaRPr lang="en-US" sz="1200" dirty="0"/>
+          </a:p>
+        </p:txBody>
+      </p:sp>
+      <p:sp>
+        <p:nvSpPr>
+          <p:cNvPr id="3" name="Text 1"/>
+          <p:cNvSpPr/>
+          <p:nvPr>
+            <p:ph type="title"/>
+          </p:nvPr>
+        </p:nvSpPr>
+        <p:spPr>
+          <a:xfrm>
+            <a:off x="812800" y="1026120"/>
+            <a:ext cx="10883392" cy="463550"/>
+          </a:xfrm>
+          <a:prstGeom prst="rect">
+            <a:avLst/>
+          </a:prstGeom>
+          <a:noFill/>
+          <a:ln/>
+        </p:spPr>
+        <p:txBody>
+          <a:bodyPr wrap="square" lIns="0" tIns="0" rIns="0" bIns="0" rtlCol="0" anchor="t">
+            <a:normAutofit/>
+          </a:bodyPr>
+          <a:lstStyle/>
+          <a:p>
+            <a:pPr algn="l" indent="0" marL="0">
+              <a:lnSpc>
+                <a:spcPts val="3450"/>
+              </a:lnSpc>
+              <a:buNone/>
+            </a:pPr>
+            <a:r>
+              <a:rPr lang="en-US" sz="3000" b="1" i="0" dirty="0">
+                <a:solidFill>
+                  <a:srgbClr val="15213B"/>
+                </a:solidFill>
+                <a:latin typeface="Libre Baskerville" pitchFamily="18" charset="0"/>
+                <a:ea typeface="Libre Baskerville" pitchFamily="18" charset="-122"/>
+                <a:cs typeface="Libre Baskerville" pitchFamily="18" charset="-120"/>
+              </a:rPr>
+              <a:t>Fatal hotspots persist — and GPS is the missing signal</a:t>
+            </a:r>
+            <a:endParaRPr lang="en-US" sz="3000" dirty="0"/>
+          </a:p>
+        </p:txBody>
+      </p:sp>
+      <p:sp>
+        <p:nvSpPr>
+          <p:cNvPr id="4" name="Text 2"/>
+          <p:cNvSpPr/>
+          <p:nvPr/>
+        </p:nvSpPr>
+        <p:spPr>
+          <a:xfrm>
+            <a:off x="6400000" y="1642070"/>
+            <a:ext cx="5288572" cy="4300000"/>
+          </a:xfrm>
+          <a:prstGeom prst="rect">
+            <a:avLst/>
+          </a:prstGeom>
+          <a:noFill/>
+          <a:ln/>
+        </p:spPr>
+        <p:txBody>
+          <a:bodyPr wrap="square" lIns="0" tIns="0" rIns="0" bIns="0" rtlCol="0" anchor="t">
+            <a:normAutofit/>
+          </a:bodyPr>
+          <a:lstStyle/>
+          <a:p>
+            <a:pPr algn="l" marL="155956" indent="-155956">
+              <a:lnSpc>
+                <a:spcPts val="1950"/>
+              </a:lnSpc>
+              <a:buSzPct val="100000"/>
+              <a:buChar char="•"/>
+            </a:pPr>
+            <a:r>
+              <a:rPr lang="en-US" sz="1300" dirty="0">
+                <a:solidFill>
+                  <a:srgbClr val="46516B"/>
+                </a:solidFill>
+                <a:latin typeface="Public Sans" pitchFamily="34" charset="0"/>
+                <a:ea typeface="Public Sans" pitchFamily="34" charset="-122"/>
+                <a:cs typeface="Public Sans" pitchFamily="34" charset="-120"/>
+              </a:rPr>
+              <a:t>1° grid (≈ 110 km) on the GPS years 2017–2023; hotspots = riskiest cells holding 15% of crashes (109 cells).</a:t>
+            </a:r>
+            <a:endParaRPr lang="en-US" sz="1300" dirty="0"/>
+          </a:p>
+          <a:p>
+            <a:pPr algn="l" marL="155956" indent="-155956">
+              <a:lnSpc>
+                <a:spcPts val="1950"/>
+              </a:lnSpc>
+              <a:buSzPct val="100000"/>
+              <a:buChar char="•"/>
+            </a:pPr>
+            <a:r>
+              <a:rPr lang="en-US" sz="1300" dirty="0">
+                <a:solidFill>
+                  <a:srgbClr val="46516B"/>
+                </a:solidFill>
+                <a:latin typeface="Public Sans" pitchFamily="34" charset="0"/>
+                <a:ea typeface="Public Sans" pitchFamily="34" charset="-122"/>
+                <a:cs typeface="Public Sans" pitchFamily="34" charset="-120"/>
+              </a:rPr>
+              <a:t>Checked on 2024–25, never seen: 14% of crashes but 25.5% of deaths; fatal rate 12.6% vs. 6.2% elsewhere.</a:t>
+            </a:r>
+            <a:endParaRPr lang="en-US" sz="1300" dirty="0"/>
+          </a:p>
+          <a:p>
+            <a:pPr algn="l" marL="155956" indent="-155956">
+              <a:lnSpc>
+                <a:spcPts val="1950"/>
+              </a:lnSpc>
+              <a:buSzPct val="100000"/>
+              <a:buChar char="•"/>
+            </a:pPr>
+            <a:r>
+              <a:rPr lang="en-US" sz="1300" dirty="0">
+                <a:solidFill>
+                  <a:srgbClr val="46516B"/>
+                </a:solidFill>
+                <a:latin typeface="Public Sans" pitchFamily="34" charset="0"/>
+                <a:ea typeface="Public Sans" pitchFamily="34" charset="-122"/>
+                <a:cs typeface="Public Sans" pitchFamily="34" charset="-120"/>
+              </a:rPr>
+              <a:t>Highest risk in the North-East (Pernambuco, Bahia): candidate ALS / helicopter bases and inspections.</a:t>
+            </a:r>
+            <a:endParaRPr lang="en-US" sz="1300" dirty="0"/>
+          </a:p>
+          <a:p>
+            <a:pPr algn="l" marL="155956" indent="-155956">
+              <a:lnSpc>
+                <a:spcPts val="1950"/>
+              </a:lnSpc>
+              <a:buSzPct val="100000"/>
+              <a:buChar char="•"/>
+            </a:pPr>
+            <a:r>
+              <a:rPr lang="en-US" sz="1300" dirty="0">
+                <a:solidFill>
+                  <a:srgbClr val="46516B"/>
+                </a:solidFill>
+                <a:latin typeface="Public Sans" pitchFamily="34" charset="0"/>
+                <a:ea typeface="Public Sans" pitchFamily="34" charset="-122"/>
+                <a:cs typeface="Public Sans" pitchFamily="34" charset="-120"/>
+              </a:rPr>
+              <a:t>Adding GPS cell risk to Gradient Boosting (train 2017–21): test PR-AUC 0.131 → 0.141, validation 0.132 → 0.153 — more than any change of algorithm.</a:t>
+            </a:r>
+            <a:endParaRPr lang="en-US" sz="1300" dirty="0"/>
+          </a:p>
+          <a:p>
+            <a:pPr algn="l" marL="155956" indent="-155956">
+              <a:lnSpc>
+                <a:spcPts val="1950"/>
+              </a:lnSpc>
+              <a:buSzPct val="100000"/>
+              <a:buChar char="•"/>
+            </a:pPr>
+            <a:r>
+              <a:rPr lang="en-US" sz="1300" dirty="0">
+                <a:solidFill>
+                  <a:srgbClr val="46516B"/>
+                </a:solidFill>
+                <a:latin typeface="Public Sans" pitchFamily="34" charset="0"/>
+                <a:ea typeface="Public Sans" pitchFamily="34" charset="-122"/>
+                <a:cs typeface="Public Sans" pitchFamily="34" charset="-120"/>
+              </a:rPr>
+              <a:t>Interactive Folium map: reports/figures/task3_hotspot_map.html</a:t>
+            </a:r>
+            <a:endParaRPr lang="en-US" sz="1300" dirty="0"/>
+          </a:p>
+        </p:txBody>
+      </p:sp>
+      <p:sp>
+        <p:nvSpPr>
+          <p:cNvPr id="5" name="Text 3"/>
+          <p:cNvSpPr/>
+          <p:nvPr/>
+        </p:nvSpPr>
+        <p:spPr>
+          <a:xfrm>
+            <a:off x="812800" y="6238280"/>
+            <a:ext cx="4057174" cy="238720"/>
+          </a:xfrm>
+          <a:prstGeom prst="rect">
+            <a:avLst/>
+          </a:prstGeom>
+          <a:noFill/>
+          <a:ln/>
+        </p:spPr>
+        <p:txBody>
+          <a:bodyPr wrap="square" lIns="0" tIns="0" rIns="0" bIns="0" rtlCol="0" anchor="t">
+            <a:normAutofit/>
+          </a:bodyPr>
+          <a:lstStyle/>
+          <a:p>
+            <a:pPr algn="l" indent="0" marL="0">
+              <a:lnSpc>
+                <a:spcPts val="1680"/>
+              </a:lnSpc>
+              <a:buNone/>
+            </a:pPr>
+            <a:r>
+              <a:rPr lang="en-US" sz="1200" dirty="0">
+                <a:solidFill>
+                  <a:srgbClr val="8B9099"/>
+                </a:solidFill>
+                <a:latin typeface="Public Sans" pitchFamily="34" charset="0"/>
+                <a:ea typeface="Public Sans" pitchFamily="34" charset="-122"/>
+                <a:cs typeface="Public Sans" pitchFamily="34" charset="-120"/>
+              </a:rPr>
+              <a:t>Road Safety Predictive Analytics — Group 6</a:t>
+            </a:r>
+            <a:endParaRPr lang="en-US" sz="1200" dirty="0"/>
+          </a:p>
+        </p:txBody>
+      </p:sp>
+      <p:sp>
+        <p:nvSpPr>
+          <p:cNvPr id="6" name="Text 4"/>
+          <p:cNvSpPr/>
+          <p:nvPr/>
+        </p:nvSpPr>
+        <p:spPr>
+          <a:xfrm>
+            <a:off x="11221145" y="6238280"/>
+            <a:ext cx="208855" cy="238720"/>
+          </a:xfrm>
+          <a:prstGeom prst="rect">
+            <a:avLst/>
+          </a:prstGeom>
+          <a:noFill/>
+          <a:ln/>
+        </p:spPr>
+        <p:txBody>
+          <a:bodyPr wrap="square" lIns="0" tIns="0" rIns="0" bIns="0" rtlCol="0" anchor="t">
+            <a:normAutofit/>
+          </a:bodyPr>
+          <a:lstStyle/>
+          <a:p>
+            <a:pPr algn="l" indent="0" marL="0">
+              <a:lnSpc>
+                <a:spcPts val="1680"/>
+              </a:lnSpc>
+              <a:buNone/>
+            </a:pPr>
+            <a:r>
+              <a:rPr lang="en-US" sz="1200" dirty="0">
+                <a:solidFill>
+                  <a:srgbClr val="8B9099"/>
+                </a:solidFill>
+                <a:latin typeface="Public Sans" pitchFamily="34" charset="0"/>
+                <a:ea typeface="Public Sans" pitchFamily="34" charset="-122"/>
+                <a:cs typeface="Public Sans" pitchFamily="34" charset="-120"/>
+              </a:rPr>
+              <a:t>24</a:t>
+            </a:r>
+            <a:endParaRPr lang="en-US" sz="1200" dirty="0"/>
+          </a:p>
+        </p:txBody>
+      </p:sp>
+      <p:pic>
+        <p:nvPicPr>
+          <p:cNvPr id="7" name="Picture 6" descr="task3_hotspots.png"/>
+          <p:cNvPicPr>
+            <a:picLocks noChangeAspect="1"/>
+          </p:cNvPicPr>
+          <p:nvPr/>
+        </p:nvPicPr>
+        <p:blipFill>
+          <a:blip r:embed="rId2"/>
+          <a:stretch>
+            <a:fillRect/>
+          </a:stretch>
+        </p:blipFill>
+        <p:spPr>
+          <a:xfrm>
+            <a:off x="812800" y="1642070"/>
+            <a:ext cx="4416202" cy="4450000"/>
+          </a:xfrm>
+          <a:prstGeom prst="rect">
+            <a:avLst/>
+          </a:prstGeom>
+        </p:spPr>
+      </p:pic>
     </p:spTree>
   </p:cSld>
   <p:clrMapOvr>

--- a/reports/presentation/Road Safety Predictive Analytics — Group 6.pptx
+++ b/reports/presentation/Road Safety Predictive Analytics — Group 6.pptx
@@ -15131,135 +15131,6 @@
       </p:sp>
       <p:sp>
         <p:nvSpPr>
-          <p:cNvPr id="4" name="Text 2"/>
-          <p:cNvSpPr/>
-          <p:nvPr/>
-        </p:nvSpPr>
-        <p:spPr>
-          <a:xfrm>
-            <a:off x="910844" y="1642070"/>
-            <a:ext cx="10777728" cy="2006600"/>
-          </a:xfrm>
-          <a:prstGeom prst="rect">
-            <a:avLst/>
-          </a:prstGeom>
-          <a:noFill/>
-          <a:ln/>
-        </p:spPr>
-        <p:txBody>
-          <a:bodyPr wrap="square" lIns="0" tIns="0" rIns="0" bIns="0" rtlCol="0" anchor="t">
-            <a:normAutofit/>
-          </a:bodyPr>
-          <a:lstStyle/>
-          <a:p>
-            <a:pPr algn="l" marL="155956" indent="-155956">
-              <a:lnSpc>
-                <a:spcPts val="1950"/>
-              </a:lnSpc>
-              <a:buSzPct val="100000"/>
-              <a:buChar char="•"/>
-            </a:pPr>
-            <a:r>
-              <a:rPr lang="en-US" sz="1300" dirty="0">
-                <a:solidFill>
-                  <a:srgbClr val="46516B"/>
-                </a:solidFill>
-                <a:latin typeface="Public Sans" pitchFamily="34" charset="0"/>
-                <a:ea typeface="Public Sans" pitchFamily="34" charset="-122"/>
-                <a:cs typeface="Public Sans" pitchFamily="34" charset="-120"/>
-              </a:rPr>
-              <a:t>Histogram Gradient Boosting, compared with a Random Forest; class weights for the 5% fatal rate, no scaling needed.</a:t>
-            </a:r>
-            <a:endParaRPr lang="en-US" sz="1300" dirty="0"/>
-          </a:p>
-          <a:p>
-            <a:pPr algn="l" marL="155956" indent="-155956">
-              <a:lnSpc>
-                <a:spcPts val="1950"/>
-              </a:lnSpc>
-              <a:buSzPct val="100000"/>
-              <a:buChar char="•"/>
-            </a:pPr>
-            <a:r>
-              <a:rPr lang="en-US" sz="1300" dirty="0">
-                <a:solidFill>
-                  <a:srgbClr val="46516B"/>
-                </a:solidFill>
-                <a:latin typeface="Public Sans" pitchFamily="34" charset="0"/>
-                <a:ea typeface="Public Sans" pitchFamily="34" charset="-122"/>
-                <a:cs typeface="Public Sans" pitchFamily="34" charset="-120"/>
-              </a:rPr>
-              <a:t>Why: fatality risk comes from combinations (rural × night × downhill); trees learn these interactions without hand-crafting.</a:t>
-            </a:r>
-            <a:endParaRPr lang="en-US" sz="1300" dirty="0"/>
-          </a:p>
-          <a:p>
-            <a:pPr algn="l" marL="155956" indent="-155956">
-              <a:lnSpc>
-                <a:spcPts val="1950"/>
-              </a:lnSpc>
-              <a:buSzPct val="100000"/>
-              <a:buChar char="•"/>
-            </a:pPr>
-            <a:r>
-              <a:rPr lang="en-US" sz="1300" dirty="0">
-                <a:solidFill>
-                  <a:srgbClr val="46516B"/>
-                </a:solidFill>
-                <a:latin typeface="Public Sans" pitchFamily="34" charset="0"/>
-                <a:ea typeface="Public Sans" pitchFamily="34" charset="-122"/>
-                <a:cs typeface="Public Sans" pitchFamily="34" charset="-120"/>
-              </a:rPr>
-              <a:t>Tuning on validation 2022–23: 13 configs. Small, regularised trees won (lr 0.03, 15 leaves, 150 trees); training on 2015+ only gave no gain.</a:t>
-            </a:r>
-            <a:endParaRPr lang="en-US" sz="1300" dirty="0"/>
-          </a:p>
-          <a:p>
-            <a:pPr algn="l" marL="155956" indent="-155956">
-              <a:lnSpc>
-                <a:spcPts val="1950"/>
-              </a:lnSpc>
-              <a:buSzPct val="100000"/>
-              <a:buChar char="•"/>
-            </a:pPr>
-            <a:r>
-              <a:rPr lang="en-US" sz="1300" dirty="0">
-                <a:solidFill>
-                  <a:srgbClr val="46516B"/>
-                </a:solidFill>
-                <a:latin typeface="Public Sans" pitchFamily="34" charset="0"/>
-                <a:ea typeface="Public Sans" pitchFamily="34" charset="-122"/>
-                <a:cs typeface="Public Sans" pitchFamily="34" charset="-120"/>
-              </a:rPr>
-              <a:t>Validation: PR-AUC 0.134, lift 2.24×. Test 2024–25: PR-AUC 0.126, recall 31.5%, lift 2.10×, Brier 0.064 after sigmoid calibration.</a:t>
-            </a:r>
-            <a:endParaRPr lang="en-US" sz="1300" dirty="0"/>
-          </a:p>
-          <a:p>
-            <a:pPr algn="l" marL="155956" indent="-155956">
-              <a:lnSpc>
-                <a:spcPts val="1950"/>
-              </a:lnSpc>
-              <a:buSzPct val="100000"/>
-              <a:buChar char="•"/>
-            </a:pPr>
-            <a:r>
-              <a:rPr lang="en-US" sz="1300" dirty="0">
-                <a:solidFill>
-                  <a:srgbClr val="46516B"/>
-                </a:solidFill>
-                <a:latin typeface="Public Sans" pitchFamily="34" charset="0"/>
-                <a:ea typeface="Public Sans" pitchFamily="34" charset="-122"/>
-                <a:cs typeface="Public Sans" pitchFamily="34" charset="-120"/>
-              </a:rPr>
-              <a:t>Top drivers: time of day, roadway type, historical segment risk, then downhill, rural area and day of week (matches the EDA).</a:t>
-            </a:r>
-            <a:endParaRPr lang="en-US" sz="1300" dirty="0"/>
-          </a:p>
-        </p:txBody>
-      </p:sp>
-      <p:sp>
-        <p:nvSpPr>
           <p:cNvPr id="5" name="Text 3"/>
           <p:cNvSpPr/>
           <p:nvPr/>
@@ -15343,6 +15214,369 @@
               <a:t>20</a:t>
             </a:r>
             <a:endParaRPr lang="en-US" sz="1200" dirty="0"/>
+          </a:p>
+        </p:txBody>
+      </p:sp>
+      <p:sp>
+        <p:nvSpPr>
+          <p:cNvPr id="40" name="Stat card 1"/>
+          <p:cNvSpPr/>
+          <p:nvPr/>
+        </p:nvSpPr>
+        <p:spPr>
+          <a:xfrm>
+            <a:off x="812800" y="1680000"/>
+            <a:ext cx="2330000" cy="1330000"/>
+          </a:xfrm>
+          <a:prstGeom prst="roundRect">
+            <a:avLst>
+              <a:gd name="adj" fmla="val 7556"/>
+            </a:avLst>
+          </a:prstGeom>
+          <a:solidFill>
+            <a:srgbClr val="FDFDFB"/>
+          </a:solidFill>
+          <a:ln w="6350">
+            <a:solidFill>
+              <a:srgbClr val="E2DFD6"/>
+            </a:solidFill>
+            <a:prstDash val="solid"/>
+          </a:ln>
+        </p:spPr>
+        <p:txBody>
+          <a:bodyPr/>
+          <a:lstStyle/>
+          <a:p>
+            <a:endParaRPr lang="en-US" dirty="0"/>
+          </a:p>
+        </p:txBody>
+      </p:sp>
+      <p:sp>
+        <p:nvSpPr>
+          <p:cNvPr id="41" name="Stat 1"/>
+          <p:cNvSpPr txBox="1"/>
+          <p:nvPr/>
+        </p:nvSpPr>
+        <p:spPr>
+          <a:xfrm>
+            <a:off x="1002800" y="1830000"/>
+            <a:ext cx="1950000" cy="1070000"/>
+          </a:xfrm>
+          <a:prstGeom prst="rect">
+            <a:avLst/>
+          </a:prstGeom>
+          <a:noFill/>
+          <a:ln/>
+        </p:spPr>
+        <p:txBody>
+          <a:bodyPr wrap="square" lIns="0" tIns="0" rIns="0" bIns="0" rtlCol="0" anchor="t">
+            <a:noAutofit/>
+          </a:bodyPr>
+          <a:lstStyle/>
+          <a:p>
+            <a:pPr algn="l" marL="0" indent="0">
+              <a:lnSpc>
+                <a:spcPts val="3800"/>
+              </a:lnSpc>
+              <a:buNone/>
+            </a:pPr>
+            <a:r>
+              <a:rPr lang="en-US" sz="3000" b="1" dirty="0">
+                <a:solidFill>
+                  <a:srgbClr val="B05A26"/>
+                </a:solidFill>
+                <a:latin typeface="Public Sans" pitchFamily="34" charset="0"/>
+                <a:ea typeface="Public Sans" pitchFamily="34" charset="-122"/>
+                <a:cs typeface="Public Sans" pitchFamily="34" charset="-120"/>
+              </a:rPr>
+              <a:t>31.5%</a:t>
+            </a:r>
+            <a:endParaRPr lang="en-US" sz="3000" dirty="0"/>
+          </a:p>
+          <a:p>
+            <a:pPr algn="l" marL="0" indent="0">
+              <a:lnSpc>
+                <a:spcPts val="1560"/>
+              </a:lnSpc>
+              <a:spcBef>
+                <a:spcPts val="300"/>
+              </a:spcBef>
+              <a:buNone/>
+            </a:pPr>
+            <a:r>
+              <a:rPr lang="en-US" sz="1200" dirty="0">
+                <a:solidFill>
+                  <a:srgbClr val="46516B"/>
+                </a:solidFill>
+                <a:latin typeface="Public Sans" pitchFamily="34" charset="0"/>
+                <a:ea typeface="Public Sans" pitchFamily="34" charset="-122"/>
+                <a:cs typeface="Public Sans" pitchFamily="34" charset="-120"/>
+              </a:rPr>
+              <a:t>of fatal crashes reached with 15% of ALS capacity</a:t>
+            </a:r>
+            <a:endParaRPr lang="en-US" sz="1200" dirty="0"/>
+          </a:p>
+        </p:txBody>
+      </p:sp>
+      <p:sp>
+        <p:nvSpPr>
+          <p:cNvPr id="42" name="Stat card 2"/>
+          <p:cNvSpPr/>
+          <p:nvPr/>
+        </p:nvSpPr>
+        <p:spPr>
+          <a:xfrm>
+            <a:off x="3282800" y="1680000"/>
+            <a:ext cx="2330000" cy="1330000"/>
+          </a:xfrm>
+          <a:prstGeom prst="roundRect">
+            <a:avLst>
+              <a:gd name="adj" fmla="val 7556"/>
+            </a:avLst>
+          </a:prstGeom>
+          <a:solidFill>
+            <a:srgbClr val="FDFDFB"/>
+          </a:solidFill>
+          <a:ln w="6350">
+            <a:solidFill>
+              <a:srgbClr val="E2DFD6"/>
+            </a:solidFill>
+            <a:prstDash val="solid"/>
+          </a:ln>
+        </p:spPr>
+        <p:txBody>
+          <a:bodyPr/>
+          <a:lstStyle/>
+          <a:p>
+            <a:endParaRPr lang="en-US" dirty="0"/>
+          </a:p>
+        </p:txBody>
+      </p:sp>
+      <p:sp>
+        <p:nvSpPr>
+          <p:cNvPr id="43" name="Stat 2"/>
+          <p:cNvSpPr txBox="1"/>
+          <p:nvPr/>
+        </p:nvSpPr>
+        <p:spPr>
+          <a:xfrm>
+            <a:off x="3472800" y="1830000"/>
+            <a:ext cx="1950000" cy="1070000"/>
+          </a:xfrm>
+          <a:prstGeom prst="rect">
+            <a:avLst/>
+          </a:prstGeom>
+          <a:noFill/>
+          <a:ln/>
+        </p:spPr>
+        <p:txBody>
+          <a:bodyPr wrap="square" lIns="0" tIns="0" rIns="0" bIns="0" rtlCol="0" anchor="t">
+            <a:noAutofit/>
+          </a:bodyPr>
+          <a:lstStyle/>
+          <a:p>
+            <a:pPr algn="l" marL="0" indent="0">
+              <a:lnSpc>
+                <a:spcPts val="3800"/>
+              </a:lnSpc>
+              <a:buNone/>
+            </a:pPr>
+            <a:r>
+              <a:rPr lang="en-US" sz="3000" b="1" dirty="0">
+                <a:solidFill>
+                  <a:srgbClr val="B05A26"/>
+                </a:solidFill>
+                <a:latin typeface="Public Sans" pitchFamily="34" charset="0"/>
+                <a:ea typeface="Public Sans" pitchFamily="34" charset="-122"/>
+                <a:cs typeface="Public Sans" pitchFamily="34" charset="-120"/>
+              </a:rPr>
+              <a:t>2.1×</a:t>
+            </a:r>
+            <a:endParaRPr lang="en-US" sz="3000" dirty="0"/>
+          </a:p>
+          <a:p>
+            <a:pPr algn="l" marL="0" indent="0">
+              <a:lnSpc>
+                <a:spcPts val="1560"/>
+              </a:lnSpc>
+              <a:spcBef>
+                <a:spcPts val="300"/>
+              </a:spcBef>
+              <a:buNone/>
+            </a:pPr>
+            <a:r>
+              <a:rPr lang="en-US" sz="1200" dirty="0">
+                <a:solidFill>
+                  <a:srgbClr val="46516B"/>
+                </a:solidFill>
+                <a:latin typeface="Public Sans" pitchFamily="34" charset="0"/>
+                <a:ea typeface="Public Sans" pitchFamily="34" charset="-122"/>
+                <a:cs typeface="Public Sans" pitchFamily="34" charset="-120"/>
+              </a:rPr>
+              <a:t>better than random dispatch (test 2024–25)</a:t>
+            </a:r>
+            <a:endParaRPr lang="en-US" sz="1200" dirty="0"/>
+          </a:p>
+        </p:txBody>
+      </p:sp>
+      <p:sp>
+        <p:nvSpPr>
+          <p:cNvPr id="44" name="Bullets"/>
+          <p:cNvSpPr txBox="1"/>
+          <p:nvPr/>
+        </p:nvSpPr>
+        <p:spPr>
+          <a:xfrm>
+            <a:off x="812800" y="3310000"/>
+            <a:ext cx="4800000" cy="2740000"/>
+          </a:xfrm>
+          <a:prstGeom prst="rect">
+            <a:avLst/>
+          </a:prstGeom>
+          <a:noFill/>
+          <a:ln/>
+        </p:spPr>
+        <p:txBody>
+          <a:bodyPr wrap="square" lIns="0" tIns="0" rIns="0" bIns="0" rtlCol="0" anchor="t">
+            <a:noAutofit/>
+          </a:bodyPr>
+          <a:lstStyle/>
+          <a:p>
+            <a:pPr algn="l" marL="171450" indent="-171450">
+              <a:lnSpc>
+                <a:spcPts val="1950"/>
+              </a:lnSpc>
+              <a:buSzPct val="100000"/>
+              <a:buChar char="•"/>
+            </a:pPr>
+            <a:r>
+              <a:rPr lang="en-US" sz="1400" b="1" dirty="0">
+                <a:solidFill>
+                  <a:srgbClr val="15213B"/>
+                </a:solidFill>
+                <a:latin typeface="Public Sans" pitchFamily="34" charset="0"/>
+                <a:ea typeface="Public Sans" pitchFamily="34" charset="-122"/>
+                <a:cs typeface="Public Sans" pitchFamily="34" charset="-120"/>
+              </a:rPr>
+              <a:t>Why trees: </a:t>
+            </a:r>
+            <a:r>
+              <a:rPr lang="en-US" sz="1400" dirty="0">
+                <a:solidFill>
+                  <a:srgbClr val="46516B"/>
+                </a:solidFill>
+                <a:latin typeface="Public Sans" pitchFamily="34" charset="0"/>
+                <a:ea typeface="Public Sans" pitchFamily="34" charset="-122"/>
+                <a:cs typeface="Public Sans" pitchFamily="34" charset="-120"/>
+              </a:rPr>
+              <a:t>fatal risk comes from combinations (rural × night × downhill), which trees learn without hand-crafting.</a:t>
+            </a:r>
+            <a:endParaRPr lang="en-US" sz="1400" dirty="0"/>
+          </a:p>
+          <a:p>
+            <a:pPr algn="l" marL="171450" indent="-171450">
+              <a:lnSpc>
+                <a:spcPts val="1950"/>
+              </a:lnSpc>
+              <a:spcBef>
+                <a:spcPts val="700"/>
+              </a:spcBef>
+              <a:buSzPct val="100000"/>
+              <a:buChar char="•"/>
+            </a:pPr>
+            <a:r>
+              <a:rPr lang="en-US" sz="1400" b="1" dirty="0">
+                <a:solidFill>
+                  <a:srgbClr val="15213B"/>
+                </a:solidFill>
+                <a:latin typeface="Public Sans" pitchFamily="34" charset="0"/>
+                <a:ea typeface="Public Sans" pitchFamily="34" charset="-122"/>
+                <a:cs typeface="Public Sans" pitchFamily="34" charset="-120"/>
+              </a:rPr>
+              <a:t>Setup: </a:t>
+            </a:r>
+            <a:r>
+              <a:rPr lang="en-US" sz="1400" dirty="0">
+                <a:solidFill>
+                  <a:srgbClr val="46516B"/>
+                </a:solidFill>
+                <a:latin typeface="Public Sans" pitchFamily="34" charset="0"/>
+                <a:ea typeface="Public Sans" pitchFamily="34" charset="-122"/>
+                <a:cs typeface="Public Sans" pitchFamily="34" charset="-120"/>
+              </a:rPr>
+              <a:t>Histogram Gradient Boosting vs. Random Forest; class weights for the ~5% fatal rate; tuned on validation 2022–23.</a:t>
+            </a:r>
+            <a:endParaRPr lang="en-US" sz="1400" dirty="0"/>
+          </a:p>
+          <a:p>
+            <a:pPr algn="l" marL="171450" indent="-171450">
+              <a:lnSpc>
+                <a:spcPts val="1950"/>
+              </a:lnSpc>
+              <a:spcBef>
+                <a:spcPts val="700"/>
+              </a:spcBef>
+              <a:buSzPct val="100000"/>
+              <a:buChar char="•"/>
+            </a:pPr>
+            <a:r>
+              <a:rPr lang="en-US" sz="1400" b="1" dirty="0">
+                <a:solidFill>
+                  <a:srgbClr val="15213B"/>
+                </a:solidFill>
+                <a:latin typeface="Public Sans" pitchFamily="34" charset="0"/>
+                <a:ea typeface="Public Sans" pitchFamily="34" charset="-122"/>
+                <a:cs typeface="Public Sans" pitchFamily="34" charset="-120"/>
+              </a:rPr>
+              <a:t>Test 2024–25: </a:t>
+            </a:r>
+            <a:r>
+              <a:rPr lang="en-US" sz="1400" dirty="0">
+                <a:solidFill>
+                  <a:srgbClr val="46516B"/>
+                </a:solidFill>
+                <a:latin typeface="Public Sans" pitchFamily="34" charset="0"/>
+                <a:ea typeface="Public Sans" pitchFamily="34" charset="-122"/>
+                <a:cs typeface="Public Sans" pitchFamily="34" charset="-120"/>
+              </a:rPr>
+              <a:t>PR-AUC 0.126 vs. 0.118 for the baseline; Brier 0.064 after calibration.</a:t>
+            </a:r>
+            <a:endParaRPr lang="en-US" sz="1400" dirty="0"/>
+          </a:p>
+          <a:p>
+            <a:pPr algn="l" marL="171450" indent="-171450">
+              <a:lnSpc>
+                <a:spcPts val="1950"/>
+              </a:lnSpc>
+              <a:spcBef>
+                <a:spcPts val="700"/>
+              </a:spcBef>
+              <a:buSzPct val="100000"/>
+              <a:buChar char="•"/>
+            </a:pPr>
+            <a:r>
+              <a:rPr lang="en-US" sz="1400" b="1" dirty="0">
+                <a:solidFill>
+                  <a:srgbClr val="15213B"/>
+                </a:solidFill>
+                <a:latin typeface="Public Sans" pitchFamily="34" charset="0"/>
+                <a:ea typeface="Public Sans" pitchFamily="34" charset="-122"/>
+                <a:cs typeface="Public Sans" pitchFamily="34" charset="-120"/>
+              </a:rPr>
+              <a:t>Drivers: </a:t>
+            </a:r>
+            <a:r>
+              <a:rPr lang="en-US" sz="1400" dirty="0">
+                <a:solidFill>
+                  <a:srgbClr val="46516B"/>
+                </a:solidFill>
+                <a:latin typeface="Public Sans" pitchFamily="34" charset="0"/>
+                <a:ea typeface="Public Sans" pitchFamily="34" charset="-122"/>
+                <a:cs typeface="Public Sans" pitchFamily="34" charset="-120"/>
+              </a:rPr>
+              <a:t>time of day, roadway type and historical segment risk, as in the EDA.</a:t>
+            </a:r>
+            <a:endParaRPr lang="en-US" sz="1400" dirty="0"/>
           </a:p>
         </p:txBody>
       </p:sp>
@@ -15362,32 +15596,8 @@
         </p:blipFill>
         <p:spPr>
           <a:xfrm>
-            <a:off x="910844" y="3500000"/>
-            <a:ext cx="3290000" cy="2350000"/>
-          </a:xfrm>
-          <a:prstGeom prst="rect">
-            <a:avLst/>
-          </a:prstGeom>
-        </p:spPr>
-      </p:pic>
-      <p:pic>
-        <p:nvPicPr>
-          <p:cNvPr id="8" name="Picture 7" descr="task3_trees_pr_curve.png"/>
-          <p:cNvPicPr>
-            <a:picLocks noChangeAspect="1"/>
-          </p:cNvPicPr>
-          <p:nvPr/>
-        </p:nvPicPr>
-        <p:blipFill>
-          <a:blip r:embed="rId3"/>
-          <a:stretch>
-            <a:fillRect/>
-          </a:stretch>
-        </p:blipFill>
-        <p:spPr>
-          <a:xfrm>
-            <a:off x="4500844" y="3500000"/>
-            <a:ext cx="3290000" cy="2350000"/>
+            <a:off x="5880000" y="1680000"/>
+            <a:ext cx="5816192" cy="3958241"/>
           </a:xfrm>
           <a:prstGeom prst="rect">
             <a:avLst/>
@@ -15518,135 +15728,6 @@
       </p:sp>
       <p:sp>
         <p:nvSpPr>
-          <p:cNvPr id="4" name="Text 2"/>
-          <p:cNvSpPr/>
-          <p:nvPr/>
-        </p:nvSpPr>
-        <p:spPr>
-          <a:xfrm>
-            <a:off x="910844" y="1642070"/>
-            <a:ext cx="10777728" cy="2006600"/>
-          </a:xfrm>
-          <a:prstGeom prst="rect">
-            <a:avLst/>
-          </a:prstGeom>
-          <a:noFill/>
-          <a:ln/>
-        </p:spPr>
-        <p:txBody>
-          <a:bodyPr wrap="square" lIns="0" tIns="0" rIns="0" bIns="0" rtlCol="0" anchor="t">
-            <a:normAutofit/>
-          </a:bodyPr>
-          <a:lstStyle/>
-          <a:p>
-            <a:pPr algn="l" marL="155956" indent="-155956">
-              <a:lnSpc>
-                <a:spcPts val="1950"/>
-              </a:lnSpc>
-              <a:buSzPct val="100000"/>
-              <a:buChar char="•"/>
-            </a:pPr>
-            <a:r>
-              <a:rPr lang="en-US" sz="1300" dirty="0">
-                <a:solidFill>
-                  <a:srgbClr val="46516B"/>
-                </a:solidFill>
-                <a:latin typeface="Public Sans" pitchFamily="34" charset="0"/>
-                <a:ea typeface="Public Sans" pitchFamily="34" charset="-122"/>
-                <a:cs typeface="Public Sans" pitchFamily="34" charset="-120"/>
-              </a:rPr>
-              <a:t>Bag of 5 MLPs (32 → 16 neurons) on the one-hot encoded, scaled features; compared with LDA (linear discriminant analysis).</a:t>
-            </a:r>
-            <a:endParaRPr lang="en-US" sz="1300" dirty="0"/>
-          </a:p>
-          <a:p>
-            <a:pPr algn="l" marL="155956" indent="-155956">
-              <a:lnSpc>
-                <a:spcPts val="1950"/>
-              </a:lnSpc>
-              <a:buSzPct val="100000"/>
-              <a:buChar char="•"/>
-            </a:pPr>
-            <a:r>
-              <a:rPr lang="en-US" sz="1300" dirty="0">
-                <a:solidFill>
-                  <a:srgbClr val="46516B"/>
-                </a:solidFill>
-                <a:latin typeface="Public Sans" pitchFamily="34" charset="0"/>
-                <a:ea typeface="Public Sans" pitchFamily="34" charset="-122"/>
-                <a:cs typeface="Public Sans" pitchFamily="34" charset="-120"/>
-              </a:rPr>
-              <a:t>Why: a different bias from trees (smooth combinations of all features), so it tests whether the ceiling is the algorithm or the data.</a:t>
-            </a:r>
-            <a:endParaRPr lang="en-US" sz="1300" dirty="0"/>
-          </a:p>
-          <a:p>
-            <a:pPr algn="l" marL="155956" indent="-155956">
-              <a:lnSpc>
-                <a:spcPts val="1950"/>
-              </a:lnSpc>
-              <a:buSzPct val="100000"/>
-              <a:buChar char="•"/>
-            </a:pPr>
-            <a:r>
-              <a:rPr lang="en-US" sz="1300" dirty="0">
-                <a:solidFill>
-                  <a:srgbClr val="46516B"/>
-                </a:solidFill>
-                <a:latin typeface="Public Sans" pitchFamily="34" charset="0"/>
-                <a:ea typeface="Public Sans" pitchFamily="34" charset="-122"/>
-                <a:cs typeface="Public Sans" pitchFamily="34" charset="-120"/>
-              </a:rPr>
-              <a:t>Imbalance &amp; tuning on validation 2022–23: each network sees all fatal crashes + an equal random sample of non-fatal ones; 8 configs. One network varied 0.115–0.125 PR-AUC by seed alone; the average of 5 gave 0.130.</a:t>
-            </a:r>
-            <a:endParaRPr lang="en-US" sz="1300" dirty="0"/>
-          </a:p>
-          <a:p>
-            <a:pPr algn="l" marL="155956" indent="-155956">
-              <a:lnSpc>
-                <a:spcPts val="1950"/>
-              </a:lnSpc>
-              <a:buSzPct val="100000"/>
-              <a:buChar char="•"/>
-            </a:pPr>
-            <a:r>
-              <a:rPr lang="en-US" sz="1300" dirty="0">
-                <a:solidFill>
-                  <a:srgbClr val="46516B"/>
-                </a:solidFill>
-                <a:latin typeface="Public Sans" pitchFamily="34" charset="0"/>
-                <a:ea typeface="Public Sans" pitchFamily="34" charset="-122"/>
-                <a:cs typeface="Public Sans" pitchFamily="34" charset="-120"/>
-              </a:rPr>
-              <a:t>Validation: PR-AUC 0.130, lift 2.17×. Test 2024–25: PR-AUC 0.118, recall 31.2%, lift 2.08×, Brier 0.065 after sigmoid calibration. LDA: lift 1.88×.</a:t>
-            </a:r>
-            <a:endParaRPr lang="en-US" sz="1300" dirty="0"/>
-          </a:p>
-          <a:p>
-            <a:pPr algn="l" marL="155956" indent="-155956">
-              <a:lnSpc>
-                <a:spcPts val="1950"/>
-              </a:lnSpc>
-              <a:buSzPct val="100000"/>
-              <a:buChar char="•"/>
-            </a:pPr>
-            <a:r>
-              <a:rPr lang="en-US" sz="1300" dirty="0">
-                <a:solidFill>
-                  <a:srgbClr val="46516B"/>
-                </a:solidFill>
-                <a:latin typeface="Public Sans" pitchFamily="34" charset="0"/>
-                <a:ea typeface="Public Sans" pitchFamily="34" charset="-122"/>
-                <a:cs typeface="Public Sans" pitchFamily="34" charset="-120"/>
-              </a:rPr>
-              <a:t>Top drivers: time of day, roadway type, segment risk, downhill / uphill — the same as Gradient Boosting.</a:t>
-            </a:r>
-            <a:endParaRPr lang="en-US" sz="1300" dirty="0"/>
-          </a:p>
-        </p:txBody>
-      </p:sp>
-      <p:sp>
-        <p:nvSpPr>
           <p:cNvPr id="5" name="Text 3"/>
           <p:cNvSpPr/>
           <p:nvPr/>
@@ -15730,6 +15811,369 @@
               <a:t>21</a:t>
             </a:r>
             <a:endParaRPr lang="en-US" sz="1200" dirty="0"/>
+          </a:p>
+        </p:txBody>
+      </p:sp>
+      <p:sp>
+        <p:nvSpPr>
+          <p:cNvPr id="40" name="Stat card 1"/>
+          <p:cNvSpPr/>
+          <p:nvPr/>
+        </p:nvSpPr>
+        <p:spPr>
+          <a:xfrm>
+            <a:off x="812800" y="1680000"/>
+            <a:ext cx="2330000" cy="1330000"/>
+          </a:xfrm>
+          <a:prstGeom prst="roundRect">
+            <a:avLst>
+              <a:gd name="adj" fmla="val 7556"/>
+            </a:avLst>
+          </a:prstGeom>
+          <a:solidFill>
+            <a:srgbClr val="FDFDFB"/>
+          </a:solidFill>
+          <a:ln w="6350">
+            <a:solidFill>
+              <a:srgbClr val="E2DFD6"/>
+            </a:solidFill>
+            <a:prstDash val="solid"/>
+          </a:ln>
+        </p:spPr>
+        <p:txBody>
+          <a:bodyPr/>
+          <a:lstStyle/>
+          <a:p>
+            <a:endParaRPr lang="en-US" dirty="0"/>
+          </a:p>
+        </p:txBody>
+      </p:sp>
+      <p:sp>
+        <p:nvSpPr>
+          <p:cNvPr id="41" name="Stat 1"/>
+          <p:cNvSpPr txBox="1"/>
+          <p:nvPr/>
+        </p:nvSpPr>
+        <p:spPr>
+          <a:xfrm>
+            <a:off x="1002800" y="1830000"/>
+            <a:ext cx="1950000" cy="1070000"/>
+          </a:xfrm>
+          <a:prstGeom prst="rect">
+            <a:avLst/>
+          </a:prstGeom>
+          <a:noFill/>
+          <a:ln/>
+        </p:spPr>
+        <p:txBody>
+          <a:bodyPr wrap="square" lIns="0" tIns="0" rIns="0" bIns="0" rtlCol="0" anchor="t">
+            <a:noAutofit/>
+          </a:bodyPr>
+          <a:lstStyle/>
+          <a:p>
+            <a:pPr algn="l" marL="0" indent="0">
+              <a:lnSpc>
+                <a:spcPts val="3800"/>
+              </a:lnSpc>
+              <a:buNone/>
+            </a:pPr>
+            <a:r>
+              <a:rPr lang="en-US" sz="3000" b="1" dirty="0">
+                <a:solidFill>
+                  <a:srgbClr val="B05A26"/>
+                </a:solidFill>
+                <a:latin typeface="Public Sans" pitchFamily="34" charset="0"/>
+                <a:ea typeface="Public Sans" pitchFamily="34" charset="-122"/>
+                <a:cs typeface="Public Sans" pitchFamily="34" charset="-120"/>
+              </a:rPr>
+              <a:t>31.2%</a:t>
+            </a:r>
+            <a:endParaRPr lang="en-US" sz="3000" dirty="0"/>
+          </a:p>
+          <a:p>
+            <a:pPr algn="l" marL="0" indent="0">
+              <a:lnSpc>
+                <a:spcPts val="1560"/>
+              </a:lnSpc>
+              <a:spcBef>
+                <a:spcPts val="300"/>
+              </a:spcBef>
+              <a:buNone/>
+            </a:pPr>
+            <a:r>
+              <a:rPr lang="en-US" sz="1200" dirty="0">
+                <a:solidFill>
+                  <a:srgbClr val="46516B"/>
+                </a:solidFill>
+                <a:latin typeface="Public Sans" pitchFamily="34" charset="0"/>
+                <a:ea typeface="Public Sans" pitchFamily="34" charset="-122"/>
+                <a:cs typeface="Public Sans" pitchFamily="34" charset="-120"/>
+              </a:rPr>
+              <a:t>of fatal crashes reached with 15% of ALS capacity</a:t>
+            </a:r>
+            <a:endParaRPr lang="en-US" sz="1200" dirty="0"/>
+          </a:p>
+        </p:txBody>
+      </p:sp>
+      <p:sp>
+        <p:nvSpPr>
+          <p:cNvPr id="42" name="Stat card 2"/>
+          <p:cNvSpPr/>
+          <p:nvPr/>
+        </p:nvSpPr>
+        <p:spPr>
+          <a:xfrm>
+            <a:off x="3282800" y="1680000"/>
+            <a:ext cx="2330000" cy="1330000"/>
+          </a:xfrm>
+          <a:prstGeom prst="roundRect">
+            <a:avLst>
+              <a:gd name="adj" fmla="val 7556"/>
+            </a:avLst>
+          </a:prstGeom>
+          <a:solidFill>
+            <a:srgbClr val="FDFDFB"/>
+          </a:solidFill>
+          <a:ln w="6350">
+            <a:solidFill>
+              <a:srgbClr val="E2DFD6"/>
+            </a:solidFill>
+            <a:prstDash val="solid"/>
+          </a:ln>
+        </p:spPr>
+        <p:txBody>
+          <a:bodyPr/>
+          <a:lstStyle/>
+          <a:p>
+            <a:endParaRPr lang="en-US" dirty="0"/>
+          </a:p>
+        </p:txBody>
+      </p:sp>
+      <p:sp>
+        <p:nvSpPr>
+          <p:cNvPr id="43" name="Stat 2"/>
+          <p:cNvSpPr txBox="1"/>
+          <p:nvPr/>
+        </p:nvSpPr>
+        <p:spPr>
+          <a:xfrm>
+            <a:off x="3472800" y="1830000"/>
+            <a:ext cx="1950000" cy="1070000"/>
+          </a:xfrm>
+          <a:prstGeom prst="rect">
+            <a:avLst/>
+          </a:prstGeom>
+          <a:noFill/>
+          <a:ln/>
+        </p:spPr>
+        <p:txBody>
+          <a:bodyPr wrap="square" lIns="0" tIns="0" rIns="0" bIns="0" rtlCol="0" anchor="t">
+            <a:noAutofit/>
+          </a:bodyPr>
+          <a:lstStyle/>
+          <a:p>
+            <a:pPr algn="l" marL="0" indent="0">
+              <a:lnSpc>
+                <a:spcPts val="3800"/>
+              </a:lnSpc>
+              <a:buNone/>
+            </a:pPr>
+            <a:r>
+              <a:rPr lang="en-US" sz="3000" b="1" dirty="0">
+                <a:solidFill>
+                  <a:srgbClr val="B05A26"/>
+                </a:solidFill>
+                <a:latin typeface="Public Sans" pitchFamily="34" charset="0"/>
+                <a:ea typeface="Public Sans" pitchFamily="34" charset="-122"/>
+                <a:cs typeface="Public Sans" pitchFamily="34" charset="-120"/>
+              </a:rPr>
+              <a:t>2.08×</a:t>
+            </a:r>
+            <a:endParaRPr lang="en-US" sz="3000" dirty="0"/>
+          </a:p>
+          <a:p>
+            <a:pPr algn="l" marL="0" indent="0">
+              <a:lnSpc>
+                <a:spcPts val="1560"/>
+              </a:lnSpc>
+              <a:spcBef>
+                <a:spcPts val="300"/>
+              </a:spcBef>
+              <a:buNone/>
+            </a:pPr>
+            <a:r>
+              <a:rPr lang="en-US" sz="1200" dirty="0">
+                <a:solidFill>
+                  <a:srgbClr val="46516B"/>
+                </a:solidFill>
+                <a:latin typeface="Public Sans" pitchFamily="34" charset="0"/>
+                <a:ea typeface="Public Sans" pitchFamily="34" charset="-122"/>
+                <a:cs typeface="Public Sans" pitchFamily="34" charset="-120"/>
+              </a:rPr>
+              <a:t>better than random: the same ceiling as the trees</a:t>
+            </a:r>
+            <a:endParaRPr lang="en-US" sz="1200" dirty="0"/>
+          </a:p>
+        </p:txBody>
+      </p:sp>
+      <p:sp>
+        <p:nvSpPr>
+          <p:cNvPr id="44" name="Bullets"/>
+          <p:cNvSpPr txBox="1"/>
+          <p:nvPr/>
+        </p:nvSpPr>
+        <p:spPr>
+          <a:xfrm>
+            <a:off x="812800" y="3310000"/>
+            <a:ext cx="4800000" cy="2740000"/>
+          </a:xfrm>
+          <a:prstGeom prst="rect">
+            <a:avLst/>
+          </a:prstGeom>
+          <a:noFill/>
+          <a:ln/>
+        </p:spPr>
+        <p:txBody>
+          <a:bodyPr wrap="square" lIns="0" tIns="0" rIns="0" bIns="0" rtlCol="0" anchor="t">
+            <a:noAutofit/>
+          </a:bodyPr>
+          <a:lstStyle/>
+          <a:p>
+            <a:pPr algn="l" marL="171450" indent="-171450">
+              <a:lnSpc>
+                <a:spcPts val="1950"/>
+              </a:lnSpc>
+              <a:buSzPct val="100000"/>
+              <a:buChar char="•"/>
+            </a:pPr>
+            <a:r>
+              <a:rPr lang="en-US" sz="1400" b="1" dirty="0">
+                <a:solidFill>
+                  <a:srgbClr val="15213B"/>
+                </a:solidFill>
+                <a:latin typeface="Public Sans" pitchFamily="34" charset="0"/>
+                <a:ea typeface="Public Sans" pitchFamily="34" charset="-122"/>
+                <a:cs typeface="Public Sans" pitchFamily="34" charset="-120"/>
+              </a:rPr>
+              <a:t>Why a neural net: </a:t>
+            </a:r>
+            <a:r>
+              <a:rPr lang="en-US" sz="1400" dirty="0">
+                <a:solidFill>
+                  <a:srgbClr val="46516B"/>
+                </a:solidFill>
+                <a:latin typeface="Public Sans" pitchFamily="34" charset="0"/>
+                <a:ea typeface="Public Sans" pitchFamily="34" charset="-122"/>
+                <a:cs typeface="Public Sans" pitchFamily="34" charset="-120"/>
+              </a:rPr>
+              <a:t>a different bias from trees: is the limit the algorithm or the data?</a:t>
+            </a:r>
+            <a:endParaRPr lang="en-US" sz="1400" dirty="0"/>
+          </a:p>
+          <a:p>
+            <a:pPr algn="l" marL="171450" indent="-171450">
+              <a:lnSpc>
+                <a:spcPts val="1950"/>
+              </a:lnSpc>
+              <a:spcBef>
+                <a:spcPts val="700"/>
+              </a:spcBef>
+              <a:buSzPct val="100000"/>
+              <a:buChar char="•"/>
+            </a:pPr>
+            <a:r>
+              <a:rPr lang="en-US" sz="1400" b="1" dirty="0">
+                <a:solidFill>
+                  <a:srgbClr val="15213B"/>
+                </a:solidFill>
+                <a:latin typeface="Public Sans" pitchFamily="34" charset="0"/>
+                <a:ea typeface="Public Sans" pitchFamily="34" charset="-122"/>
+                <a:cs typeface="Public Sans" pitchFamily="34" charset="-120"/>
+              </a:rPr>
+              <a:t>Setup: </a:t>
+            </a:r>
+            <a:r>
+              <a:rPr lang="en-US" sz="1400" dirty="0">
+                <a:solidFill>
+                  <a:srgbClr val="46516B"/>
+                </a:solidFill>
+                <a:latin typeface="Public Sans" pitchFamily="34" charset="0"/>
+                <a:ea typeface="Public Sans" pitchFamily="34" charset="-122"/>
+                <a:cs typeface="Public Sans" pitchFamily="34" charset="-120"/>
+              </a:rPr>
+              <a:t>bag of 5 MLPs (32 → 16), each on all fatal crashes + an equal sample of non-fatal ones; LDA as a linear check.</a:t>
+            </a:r>
+            <a:endParaRPr lang="en-US" sz="1400" dirty="0"/>
+          </a:p>
+          <a:p>
+            <a:pPr algn="l" marL="171450" indent="-171450">
+              <a:lnSpc>
+                <a:spcPts val="1950"/>
+              </a:lnSpc>
+              <a:spcBef>
+                <a:spcPts val="700"/>
+              </a:spcBef>
+              <a:buSzPct val="100000"/>
+              <a:buChar char="•"/>
+            </a:pPr>
+            <a:r>
+              <a:rPr lang="en-US" sz="1400" b="1" dirty="0">
+                <a:solidFill>
+                  <a:srgbClr val="15213B"/>
+                </a:solidFill>
+                <a:latin typeface="Public Sans" pitchFamily="34" charset="0"/>
+                <a:ea typeface="Public Sans" pitchFamily="34" charset="-122"/>
+                <a:cs typeface="Public Sans" pitchFamily="34" charset="-120"/>
+              </a:rPr>
+              <a:t>Bagging pays: </a:t>
+            </a:r>
+            <a:r>
+              <a:rPr lang="en-US" sz="1400" dirty="0">
+                <a:solidFill>
+                  <a:srgbClr val="46516B"/>
+                </a:solidFill>
+                <a:latin typeface="Public Sans" pitchFamily="34" charset="0"/>
+                <a:ea typeface="Public Sans" pitchFamily="34" charset="-122"/>
+                <a:cs typeface="Public Sans" pitchFamily="34" charset="-120"/>
+              </a:rPr>
+              <a:t>single networks vary 0.115–0.125 PR-AUC by seed; the bag reaches 0.130 (validation).</a:t>
+            </a:r>
+            <a:endParaRPr lang="en-US" sz="1400" dirty="0"/>
+          </a:p>
+          <a:p>
+            <a:pPr algn="l" marL="171450" indent="-171450">
+              <a:lnSpc>
+                <a:spcPts val="1950"/>
+              </a:lnSpc>
+              <a:spcBef>
+                <a:spcPts val="700"/>
+              </a:spcBef>
+              <a:buSzPct val="100000"/>
+              <a:buChar char="•"/>
+            </a:pPr>
+            <a:r>
+              <a:rPr lang="en-US" sz="1400" b="1" dirty="0">
+                <a:solidFill>
+                  <a:srgbClr val="15213B"/>
+                </a:solidFill>
+                <a:latin typeface="Public Sans" pitchFamily="34" charset="0"/>
+                <a:ea typeface="Public Sans" pitchFamily="34" charset="-122"/>
+                <a:cs typeface="Public Sans" pitchFamily="34" charset="-120"/>
+              </a:rPr>
+              <a:t>Verdict: </a:t>
+            </a:r>
+            <a:r>
+              <a:rPr lang="en-US" sz="1400" dirty="0">
+                <a:solidFill>
+                  <a:srgbClr val="46516B"/>
+                </a:solidFill>
+                <a:latin typeface="Public Sans" pitchFamily="34" charset="0"/>
+                <a:ea typeface="Public Sans" pitchFamily="34" charset="-122"/>
+                <a:cs typeface="Public Sans" pitchFamily="34" charset="-120"/>
+              </a:rPr>
+              <a:t>three model families, near-identical curves: the data is the limit, not the algorithm.</a:t>
+            </a:r>
+            <a:endParaRPr lang="en-US" sz="1400" dirty="0"/>
           </a:p>
         </p:txBody>
       </p:sp>
@@ -15749,32 +16193,8 @@
         </p:blipFill>
         <p:spPr>
           <a:xfrm>
-            <a:off x="910844" y="3500000"/>
-            <a:ext cx="3309184" cy="2350000"/>
-          </a:xfrm>
-          <a:prstGeom prst="rect">
-            <a:avLst/>
-          </a:prstGeom>
-        </p:spPr>
-      </p:pic>
-      <p:pic>
-        <p:nvPicPr>
-          <p:cNvPr id="8" name="Picture 7" descr="task3_nontree_feature_importance.png"/>
-          <p:cNvPicPr>
-            <a:picLocks noChangeAspect="1"/>
-          </p:cNvPicPr>
-          <p:nvPr/>
-        </p:nvPicPr>
-        <p:blipFill>
-          <a:blip r:embed="rId3"/>
-          <a:stretch>
-            <a:fillRect/>
-          </a:stretch>
-        </p:blipFill>
-        <p:spPr>
-          <a:xfrm>
-            <a:off x="4500844" y="3500000"/>
-            <a:ext cx="5702347" cy="2350000"/>
+            <a:off x="5880000" y="1680000"/>
+            <a:ext cx="5816192" cy="4130339"/>
           </a:xfrm>
           <a:prstGeom prst="rect">
             <a:avLst/>
@@ -18150,195 +18570,15 @@
 </file>
 
 <file path=ppt/slides/slide23.xml><?xml version="1.0" encoding="utf-8"?>
-<p:sld xmlns:a="http://schemas.openxmlformats.org/drawingml/2006/main" xmlns:r="http://schemas.openxmlformats.org/officeDocument/2006/relationships" xmlns:p="http://schemas.openxmlformats.org/presentationml/2006/main">
-  <p:cSld name="Slide 17">
-    <p:bg>
-      <p:bgPr>
-        <a:solidFill>
-          <a:srgbClr val="15213B"/>
-        </a:solidFill>
-      </p:bgPr>
-    </p:bg>
+<p:sld xmlns:a="http://schemas.openxmlformats.org/drawingml/2006/main" xmlns:p="http://schemas.openxmlformats.org/presentationml/2006/main" xmlns:r="http://schemas.openxmlformats.org/officeDocument/2006/relationships">
+  <p:cSld>
     <p:spTree>
       <p:nvGrpSpPr>
         <p:cNvPr id="1" name=""/>
         <p:cNvGrpSpPr/>
         <p:nvPr/>
       </p:nvGrpSpPr>
-      <p:grpSpPr>
-        <a:xfrm>
-          <a:off x="0" y="0"/>
-          <a:ext cx="0" cy="0"/>
-          <a:chOff x="0" y="0"/>
-          <a:chExt cx="0" cy="0"/>
-        </a:xfrm>
-      </p:grpSpPr>
-      <p:sp>
-        <p:nvSpPr>
-          <p:cNvPr id="2" name="Text 0"/>
-          <p:cNvSpPr/>
-          <p:nvPr/>
-        </p:nvSpPr>
-        <p:spPr>
-          <a:xfrm>
-            <a:off x="812800" y="2673350"/>
-            <a:ext cx="10883392" cy="381000"/>
-          </a:xfrm>
-          <a:prstGeom prst="rect">
-            <a:avLst/>
-          </a:prstGeom>
-          <a:noFill/>
-          <a:ln/>
-        </p:spPr>
-        <p:txBody>
-          <a:bodyPr wrap="square" lIns="0" tIns="0" rIns="0" bIns="0" rtlCol="0" anchor="t">
-            <a:normAutofit/>
-          </a:bodyPr>
-          <a:lstStyle/>
-          <a:p>
-            <a:pPr algn="l" indent="0" marL="0">
-              <a:lnSpc>
-                <a:spcPts val="2800"/>
-              </a:lnSpc>
-              <a:buNone/>
-            </a:pPr>
-            <a:r>
-              <a:rPr lang="en-US" sz="2000" b="1" dirty="0">
-                <a:solidFill>
-                  <a:srgbClr val="C7CCDD"/>
-                </a:solidFill>
-                <a:latin typeface="Public Sans" pitchFamily="34" charset="0"/>
-                <a:ea typeface="Public Sans" pitchFamily="34" charset="-122"/>
-                <a:cs typeface="Public Sans" pitchFamily="34" charset="-120"/>
-              </a:rPr>
-              <a:t>05</a:t>
-            </a:r>
-            <a:endParaRPr lang="en-US" sz="2000" dirty="0"/>
-          </a:p>
-        </p:txBody>
-      </p:sp>
-      <p:sp>
-        <p:nvSpPr>
-          <p:cNvPr id="3" name="Text 1"/>
-          <p:cNvSpPr/>
-          <p:nvPr>
-            <p:ph type="title"/>
-          </p:nvPr>
-        </p:nvSpPr>
-        <p:spPr>
-          <a:xfrm>
-            <a:off x="812800" y="3181350"/>
-            <a:ext cx="10883392" cy="609600"/>
-          </a:xfrm>
-          <a:prstGeom prst="rect">
-            <a:avLst/>
-          </a:prstGeom>
-          <a:noFill/>
-          <a:ln/>
-        </p:spPr>
-        <p:txBody>
-          <a:bodyPr wrap="square" lIns="0" tIns="0" rIns="0" bIns="0" rtlCol="0" anchor="t">
-            <a:normAutofit/>
-          </a:bodyPr>
-          <a:lstStyle/>
-          <a:p>
-            <a:pPr algn="l" indent="0" marL="0">
-              <a:lnSpc>
-                <a:spcPts val="4600"/>
-              </a:lnSpc>
-              <a:buNone/>
-            </a:pPr>
-            <a:r>
-              <a:rPr lang="en-US" sz="4000" b="1" i="0" dirty="0">
-                <a:solidFill>
-                  <a:srgbClr val="F4F1E8"/>
-                </a:solidFill>
-                <a:latin typeface="Libre Baskerville" pitchFamily="18" charset="0"/>
-                <a:ea typeface="Libre Baskerville" pitchFamily="18" charset="-122"/>
-                <a:cs typeface="Libre Baskerville" pitchFamily="18" charset="-120"/>
-              </a:rPr>
-              <a:t>Conclusions</a:t>
-            </a:r>
-            <a:endParaRPr lang="en-US" sz="4000" dirty="0"/>
-          </a:p>
-        </p:txBody>
-      </p:sp>
-      <p:sp>
-        <p:nvSpPr>
-          <p:cNvPr id="4" name="Text 2"/>
-          <p:cNvSpPr/>
-          <p:nvPr/>
-        </p:nvSpPr>
-        <p:spPr>
-          <a:xfrm>
-            <a:off x="812800" y="3917950"/>
-            <a:ext cx="8502650" cy="292100"/>
-          </a:xfrm>
-          <a:prstGeom prst="rect">
-            <a:avLst/>
-          </a:prstGeom>
-          <a:noFill/>
-          <a:ln/>
-        </p:spPr>
-        <p:txBody>
-          <a:bodyPr wrap="square" lIns="0" tIns="0" rIns="0" bIns="0" rtlCol="0" anchor="t">
-            <a:normAutofit/>
-          </a:bodyPr>
-          <a:lstStyle/>
-          <a:p>
-            <a:pPr algn="l" indent="0" marL="0">
-              <a:lnSpc>
-                <a:spcPts val="2100"/>
-              </a:lnSpc>
-              <a:buNone/>
-            </a:pPr>
-            <a:r>
-              <a:rPr lang="en-US" sz="1500" dirty="0">
-                <a:solidFill>
-                  <a:srgbClr val="C7CCDD"/>
-                </a:solidFill>
-                <a:latin typeface="Public Sans" pitchFamily="34" charset="0"/>
-                <a:ea typeface="Public Sans" pitchFamily="34" charset="-122"/>
-                <a:cs typeface="Public Sans" pitchFamily="34" charset="-120"/>
-              </a:rPr>
-              <a:t>What we found, what we'd still need, and what comes next.</a:t>
-            </a:r>
-            <a:endParaRPr lang="en-US" sz="1500" dirty="0"/>
-          </a:p>
-        </p:txBody>
-      </p:sp>
-    </p:spTree>
-  </p:cSld>
-  <p:clrMapOvr>
-    <a:masterClrMapping/>
-  </p:clrMapOvr>
-</p:sld>
-</file>
-
-<file path=ppt/slides/slide24.xml><?xml version="1.0" encoding="utf-8"?>
-<p:sld xmlns:a="http://schemas.openxmlformats.org/drawingml/2006/main" xmlns:r="http://schemas.openxmlformats.org/officeDocument/2006/relationships" xmlns:p="http://schemas.openxmlformats.org/presentationml/2006/main">
-  <p:cSld name="Slide 18">
-    <p:bg>
-      <p:bgPr>
-        <a:solidFill>
-          <a:srgbClr val="FBFBF8"/>
-        </a:solidFill>
-      </p:bgPr>
-    </p:bg>
-    <p:spTree>
-      <p:nvGrpSpPr>
-        <p:cNvPr id="1" name=""/>
-        <p:cNvGrpSpPr/>
-        <p:nvPr/>
-      </p:nvGrpSpPr>
-      <p:grpSpPr>
-        <a:xfrm>
-          <a:off x="0" y="0"/>
-          <a:ext cx="0" cy="0"/>
-          <a:chOff x="0" y="0"/>
-          <a:chExt cx="0" cy="0"/>
-        </a:xfrm>
-      </p:grpSpPr>
+      <p:grpSpPr/>
       <p:sp>
         <p:nvSpPr>
           <p:cNvPr id="2" name="Text 0"/>
@@ -18377,7 +18617,7 @@
                 <a:ea typeface="Public Sans" pitchFamily="34" charset="-122"/>
                 <a:cs typeface="Public Sans" pitchFamily="34" charset="-120"/>
               </a:rPr>
-              <a:t>05 · CONCLUSIONS</a:t>
+              <a:t>04 · ORIGINALITY</a:t>
             </a:r>
             <a:endParaRPr lang="en-US" sz="1200" dirty="0"/>
           </a:p>
@@ -18394,7 +18634,7 @@
         <p:spPr>
           <a:xfrm>
             <a:off x="812800" y="1026120"/>
-            <a:ext cx="10883392" cy="434330"/>
+            <a:ext cx="10883392" cy="463550"/>
           </a:xfrm>
           <a:prstGeom prst="rect">
             <a:avLst/>
@@ -18410,12 +18650,12 @@
           <a:p>
             <a:pPr algn="l" indent="0" marL="0">
               <a:lnSpc>
-                <a:spcPts val="3220"/>
+                <a:spcPts val="3450"/>
               </a:lnSpc>
               <a:buNone/>
             </a:pPr>
             <a:r>
-              <a:rPr lang="en-US" sz="2800" b="1" i="0" dirty="0">
+              <a:rPr lang="en-US" sz="3000" b="1" i="0" dirty="0">
                 <a:solidFill>
                   <a:srgbClr val="15213B"/>
                 </a:solidFill>
@@ -18423,53 +18663,22 @@
                 <a:ea typeface="Libre Baskerville" pitchFamily="18" charset="-122"/>
                 <a:cs typeface="Libre Baskerville" pitchFamily="18" charset="-120"/>
               </a:rPr>
-              <a:t>Findings, limitations &amp; future work</a:t>
-            </a:r>
-            <a:endParaRPr lang="en-US" sz="2800" dirty="0"/>
-          </a:p>
-        </p:txBody>
-      </p:sp>
-      <p:sp>
-        <p:nvSpPr>
-          <p:cNvPr id="4" name="Shape 2"/>
+              <a:t>What is the model worth? Cost-benefit of ALS capacity</a:t>
+            </a:r>
+            <a:endParaRPr lang="en-US" sz="3000" dirty="0"/>
+          </a:p>
+        </p:txBody>
+      </p:sp>
+      <p:sp>
+        <p:nvSpPr>
+          <p:cNvPr id="4" name="Text 2"/>
           <p:cNvSpPr/>
           <p:nvPr/>
         </p:nvSpPr>
         <p:spPr>
           <a:xfrm>
-            <a:off x="815975" y="1552525"/>
-            <a:ext cx="10560050" cy="516880"/>
-          </a:xfrm>
-          <a:prstGeom prst="roundRect">
-            <a:avLst>
-              <a:gd name="adj" fmla="val 14128"/>
-            </a:avLst>
-          </a:prstGeom>
-          <a:solidFill>
-            <a:srgbClr val="FDFDFB"/>
-          </a:solidFill>
-          <a:ln w="6350">
-            <a:solidFill>
-              <a:srgbClr val="E2DFD6"/>
-            </a:solidFill>
-            <a:prstDash val="solid"/>
-          </a:ln>
-        </p:spPr>
-        <p:txBody>
-          <a:bodyPr/>
-          <a:p/>
-        </p:txBody>
-      </p:sp>
-      <p:sp>
-        <p:nvSpPr>
-          <p:cNvPr id="5" name="Text 3"/>
-          <p:cNvSpPr/>
-          <p:nvPr/>
-        </p:nvSpPr>
-        <p:spPr>
-          <a:xfrm>
-            <a:off x="1022350" y="1695400"/>
-            <a:ext cx="2223770" cy="256530"/>
+            <a:off x="6400000" y="1642070"/>
+            <a:ext cx="5288572" cy="4300000"/>
           </a:xfrm>
           <a:prstGeom prst="rect">
             <a:avLst/>
@@ -18483,55 +18692,12 @@
           </a:bodyPr>
           <a:lstStyle/>
           <a:p>
-            <a:pPr algn="l" indent="0" marL="0">
+            <a:pPr algn="l" marL="155956" indent="-155956">
               <a:lnSpc>
-                <a:spcPts val="1820"/>
+                <a:spcPts val="1950"/>
               </a:lnSpc>
-              <a:buNone/>
-            </a:pPr>
-            <a:r>
-              <a:rPr lang="en-US" sz="1300" b="1" dirty="0">
-                <a:solidFill>
-                  <a:srgbClr val="B05A26"/>
-                </a:solidFill>
-                <a:latin typeface="Public Sans" pitchFamily="34" charset="0"/>
-                <a:ea typeface="Public Sans" pitchFamily="34" charset="-122"/>
-                <a:cs typeface="Public Sans" pitchFamily="34" charset="-120"/>
-              </a:rPr>
-              <a:t>Key finding</a:t>
-            </a:r>
-            <a:endParaRPr lang="en-US" sz="1300" dirty="0"/>
-          </a:p>
-        </p:txBody>
-      </p:sp>
-      <p:sp>
-        <p:nvSpPr>
-          <p:cNvPr id="6" name="Text 4"/>
-          <p:cNvSpPr/>
-          <p:nvPr/>
-        </p:nvSpPr>
-        <p:spPr>
-          <a:xfrm>
-            <a:off x="3333750" y="1695400"/>
-            <a:ext cx="8070977" cy="256530"/>
-          </a:xfrm>
-          <a:prstGeom prst="rect">
-            <a:avLst/>
-          </a:prstGeom>
-          <a:noFill/>
-          <a:ln/>
-        </p:spPr>
-        <p:txBody>
-          <a:bodyPr wrap="square" lIns="0" tIns="0" rIns="0" bIns="0" rtlCol="0" anchor="t">
-            <a:normAutofit/>
-          </a:bodyPr>
-          <a:lstStyle/>
-          <a:p>
-            <a:pPr algn="l" indent="0" marL="0">
-              <a:lnSpc>
-                <a:spcPts val="1820"/>
-              </a:lnSpc>
-              <a:buNone/>
+              <a:buSzPct val="100000"/>
+              <a:buChar char="•"/>
             </a:pPr>
             <a:r>
               <a:rPr lang="en-US" sz="1300" dirty="0">
@@ -18542,115 +18708,17 @@
                 <a:ea typeface="Public Sans" pitchFamily="34" charset="-122"/>
                 <a:cs typeface="Public Sans" pitchFamily="34" charset="-120"/>
               </a:rPr>
-              <a:t>Gradient Boosting: 31.5% of fatal crashes with 15% of ALS capacity (2.1× random); MLP &amp; LR within 3 crashes</a:t>
+              <a:t>At 15% capacity, an ALS unit sent by the model reaches a fatal crash 14.9% of the time — vs. 7.1% when sent at random.</a:t>
             </a:r>
             <a:endParaRPr lang="en-US" sz="1300" dirty="0"/>
           </a:p>
-        </p:txBody>
-      </p:sp>
-      <p:sp>
-        <p:nvSpPr>
-          <p:cNvPr id="7" name="Shape 5"/>
-          <p:cNvSpPr/>
-          <p:nvPr/>
-        </p:nvSpPr>
-        <p:spPr>
-          <a:xfrm>
-            <a:off x="815975" y="2151955"/>
-            <a:ext cx="10560050" cy="516880"/>
-          </a:xfrm>
-          <a:prstGeom prst="roundRect">
-            <a:avLst>
-              <a:gd name="adj" fmla="val 14128"/>
-            </a:avLst>
-          </a:prstGeom>
-          <a:solidFill>
-            <a:srgbClr val="FDFDFB"/>
-          </a:solidFill>
-          <a:ln w="6350">
-            <a:solidFill>
-              <a:srgbClr val="E2DFD6"/>
-            </a:solidFill>
-            <a:prstDash val="solid"/>
-          </a:ln>
-        </p:spPr>
-        <p:txBody>
-          <a:bodyPr/>
-          <a:p/>
-        </p:txBody>
-      </p:sp>
-      <p:sp>
-        <p:nvSpPr>
-          <p:cNvPr id="8" name="Text 6"/>
-          <p:cNvSpPr/>
-          <p:nvPr/>
-        </p:nvSpPr>
-        <p:spPr>
-          <a:xfrm>
-            <a:off x="1022350" y="2294830"/>
-            <a:ext cx="2223770" cy="256530"/>
-          </a:xfrm>
-          <a:prstGeom prst="rect">
-            <a:avLst/>
-          </a:prstGeom>
-          <a:noFill/>
-          <a:ln/>
-        </p:spPr>
-        <p:txBody>
-          <a:bodyPr wrap="square" lIns="0" tIns="0" rIns="0" bIns="0" rtlCol="0" anchor="t">
-            <a:normAutofit/>
-          </a:bodyPr>
-          <a:lstStyle/>
-          <a:p>
-            <a:pPr algn="l" indent="0" marL="0">
+          <a:p>
+            <a:pPr algn="l" marL="155956" indent="-155956">
               <a:lnSpc>
-                <a:spcPts val="1820"/>
+                <a:spcPts val="1950"/>
               </a:lnSpc>
-              <a:buNone/>
-            </a:pPr>
-            <a:r>
-              <a:rPr lang="en-US" sz="1300" b="1" dirty="0">
-                <a:solidFill>
-                  <a:srgbClr val="B05A26"/>
-                </a:solidFill>
-                <a:latin typeface="Public Sans" pitchFamily="34" charset="0"/>
-                <a:ea typeface="Public Sans" pitchFamily="34" charset="-122"/>
-                <a:cs typeface="Public Sans" pitchFamily="34" charset="-120"/>
-              </a:rPr>
-              <a:t>Actionable insight</a:t>
-            </a:r>
-            <a:endParaRPr lang="en-US" sz="1300" dirty="0"/>
-          </a:p>
-        </p:txBody>
-      </p:sp>
-      <p:sp>
-        <p:nvSpPr>
-          <p:cNvPr id="9" name="Text 7"/>
-          <p:cNvSpPr/>
-          <p:nvPr/>
-        </p:nvSpPr>
-        <p:spPr>
-          <a:xfrm>
-            <a:off x="3333750" y="2294830"/>
-            <a:ext cx="8070977" cy="256530"/>
-          </a:xfrm>
-          <a:prstGeom prst="rect">
-            <a:avLst/>
-          </a:prstGeom>
-          <a:noFill/>
-          <a:ln/>
-        </p:spPr>
-        <p:txBody>
-          <a:bodyPr wrap="square" lIns="0" tIns="0" rIns="0" bIns="0" rtlCol="0" anchor="t">
-            <a:normAutofit/>
-          </a:bodyPr>
-          <a:lstStyle/>
-          <a:p>
-            <a:pPr algn="l" indent="0" marL="0">
-              <a:lnSpc>
-                <a:spcPts val="1820"/>
-              </a:lnSpc>
-              <a:buNone/>
+              <a:buSzPct val="100000"/>
+              <a:buChar char="•"/>
             </a:pPr>
             <a:r>
               <a:rPr lang="en-US" sz="1300" dirty="0">
@@ -18661,115 +18729,17 @@
                 <a:ea typeface="Public Sans" pitchFamily="34" charset="-122"/>
                 <a:cs typeface="Public Sans" pitchFamily="34" charset="-120"/>
               </a:rPr>
-              <a:t>Send ALS to the top-15% risk calls (≈ €585k per 1,000 calls vs. random) · base ALS near North-East hotspots</a:t>
+              <a:t>≈ €585k of value added per 1,000 calls vs. random dispatch (€2,500 per ALS, €50,000 per fatal crash reached).</a:t>
             </a:r>
             <a:endParaRPr lang="en-US" sz="1300" dirty="0"/>
           </a:p>
-        </p:txBody>
-      </p:sp>
-      <p:sp>
-        <p:nvSpPr>
-          <p:cNvPr id="10" name="Shape 8"/>
-          <p:cNvSpPr/>
-          <p:nvPr/>
-        </p:nvSpPr>
-        <p:spPr>
-          <a:xfrm>
-            <a:off x="815975" y="2751386"/>
-            <a:ext cx="10560050" cy="748010"/>
-          </a:xfrm>
-          <a:prstGeom prst="roundRect">
-            <a:avLst>
-              <a:gd name="adj" fmla="val 9763"/>
-            </a:avLst>
-          </a:prstGeom>
-          <a:solidFill>
-            <a:srgbClr val="FDFDFB"/>
-          </a:solidFill>
-          <a:ln w="6350">
-            <a:solidFill>
-              <a:srgbClr val="E2DFD6"/>
-            </a:solidFill>
-            <a:prstDash val="solid"/>
-          </a:ln>
-        </p:spPr>
-        <p:txBody>
-          <a:bodyPr/>
-          <a:p/>
-        </p:txBody>
-      </p:sp>
-      <p:sp>
-        <p:nvSpPr>
-          <p:cNvPr id="11" name="Text 9"/>
-          <p:cNvSpPr/>
-          <p:nvPr/>
-        </p:nvSpPr>
-        <p:spPr>
-          <a:xfrm>
-            <a:off x="1022350" y="2894261"/>
-            <a:ext cx="2223770" cy="487660"/>
-          </a:xfrm>
-          <a:prstGeom prst="rect">
-            <a:avLst/>
-          </a:prstGeom>
-          <a:noFill/>
-          <a:ln/>
-        </p:spPr>
-        <p:txBody>
-          <a:bodyPr wrap="square" lIns="0" tIns="0" rIns="0" bIns="0" rtlCol="0" anchor="t">
-            <a:normAutofit/>
-          </a:bodyPr>
-          <a:lstStyle/>
-          <a:p>
-            <a:pPr algn="l" indent="0" marL="0">
+          <a:p>
+            <a:pPr algn="l" marL="155956" indent="-155956">
               <a:lnSpc>
-                <a:spcPts val="1820"/>
+                <a:spcPts val="1950"/>
               </a:lnSpc>
-              <a:buNone/>
-            </a:pPr>
-            <a:r>
-              <a:rPr lang="en-US" sz="1300" b="1" dirty="0">
-                <a:solidFill>
-                  <a:srgbClr val="B05A26"/>
-                </a:solidFill>
-                <a:latin typeface="Public Sans" pitchFamily="34" charset="0"/>
-                <a:ea typeface="Public Sans" pitchFamily="34" charset="-122"/>
-                <a:cs typeface="Public Sans" pitchFamily="34" charset="-120"/>
-              </a:rPr>
-              <a:t>Limitations</a:t>
-            </a:r>
-            <a:endParaRPr lang="en-US" sz="1300" dirty="0"/>
-          </a:p>
-        </p:txBody>
-      </p:sp>
-      <p:sp>
-        <p:nvSpPr>
-          <p:cNvPr id="12" name="Text 10"/>
-          <p:cNvSpPr/>
-          <p:nvPr/>
-        </p:nvSpPr>
-        <p:spPr>
-          <a:xfrm>
-            <a:off x="3333750" y="2894261"/>
-            <a:ext cx="8070977" cy="487660"/>
-          </a:xfrm>
-          <a:prstGeom prst="rect">
-            <a:avLst/>
-          </a:prstGeom>
-          <a:noFill/>
-          <a:ln/>
-        </p:spPr>
-        <p:txBody>
-          <a:bodyPr wrap="square" lIns="0" tIns="0" rIns="0" bIns="0" rtlCol="0" anchor="t">
-            <a:normAutofit/>
-          </a:bodyPr>
-          <a:lstStyle/>
-          <a:p>
-            <a:pPr algn="l" indent="0" marL="0">
-              <a:lnSpc>
-                <a:spcPts val="1820"/>
-              </a:lnSpc>
-              <a:buNone/>
+              <a:buSzPct val="100000"/>
+              <a:buChar char="•"/>
             </a:pPr>
             <a:r>
               <a:rPr lang="en-US" sz="1300" dirty="0">
@@ -18780,115 +18750,17 @@
                 <a:ea typeface="Public Sans" pitchFamily="34" charset="-122"/>
                 <a:cs typeface="Public Sans" pitchFamily="34" charset="-120"/>
               </a:rPr>
-              <a:t>Reporting change in 2015 (e-DAT) limits older data · GPS only from 2017 and no highway ID, so location is approximate · no traffic, weather or caller information · 150,000-row sample</a:t>
+              <a:t>Robust to the €50k assumption: dispatch pays off once reaching a fatal crash is worth &gt; €16.8k with the model, vs. &gt; €35.2k at random.</a:t>
             </a:r>
             <a:endParaRPr lang="en-US" sz="1300" dirty="0"/>
           </a:p>
-        </p:txBody>
-      </p:sp>
-      <p:sp>
-        <p:nvSpPr>
-          <p:cNvPr id="13" name="Shape 11"/>
-          <p:cNvSpPr/>
-          <p:nvPr/>
-        </p:nvSpPr>
-        <p:spPr>
-          <a:xfrm>
-            <a:off x="815975" y="3581946"/>
-            <a:ext cx="10560050" cy="516880"/>
-          </a:xfrm>
-          <a:prstGeom prst="roundRect">
-            <a:avLst>
-              <a:gd name="adj" fmla="val 14128"/>
-            </a:avLst>
-          </a:prstGeom>
-          <a:solidFill>
-            <a:srgbClr val="FDFDFB"/>
-          </a:solidFill>
-          <a:ln w="6350">
-            <a:solidFill>
-              <a:srgbClr val="E2DFD6"/>
-            </a:solidFill>
-            <a:prstDash val="solid"/>
-          </a:ln>
-        </p:spPr>
-        <p:txBody>
-          <a:bodyPr/>
-          <a:p/>
-        </p:txBody>
-      </p:sp>
-      <p:sp>
-        <p:nvSpPr>
-          <p:cNvPr id="14" name="Text 12"/>
-          <p:cNvSpPr/>
-          <p:nvPr/>
-        </p:nvSpPr>
-        <p:spPr>
-          <a:xfrm>
-            <a:off x="1022350" y="3724821"/>
-            <a:ext cx="2223770" cy="256530"/>
-          </a:xfrm>
-          <a:prstGeom prst="rect">
-            <a:avLst/>
-          </a:prstGeom>
-          <a:noFill/>
-          <a:ln/>
-        </p:spPr>
-        <p:txBody>
-          <a:bodyPr wrap="square" lIns="0" tIns="0" rIns="0" bIns="0" rtlCol="0" anchor="t">
-            <a:normAutofit/>
-          </a:bodyPr>
-          <a:lstStyle/>
-          <a:p>
-            <a:pPr algn="l" indent="0" marL="0">
+          <a:p>
+            <a:pPr algn="l" marL="155956" indent="-155956">
               <a:lnSpc>
-                <a:spcPts val="1820"/>
+                <a:spcPts val="1950"/>
               </a:lnSpc>
-              <a:buNone/>
-            </a:pPr>
-            <a:r>
-              <a:rPr lang="en-US" sz="1300" b="1" dirty="0">
-                <a:solidFill>
-                  <a:srgbClr val="B05A26"/>
-                </a:solidFill>
-                <a:latin typeface="Public Sans" pitchFamily="34" charset="0"/>
-                <a:ea typeface="Public Sans" pitchFamily="34" charset="-122"/>
-                <a:cs typeface="Public Sans" pitchFamily="34" charset="-120"/>
-              </a:rPr>
-              <a:t>Future work</a:t>
-            </a:r>
-            <a:endParaRPr lang="en-US" sz="1300" dirty="0"/>
-          </a:p>
-        </p:txBody>
-      </p:sp>
-      <p:sp>
-        <p:nvSpPr>
-          <p:cNvPr id="15" name="Text 13"/>
-          <p:cNvSpPr/>
-          <p:nvPr/>
-        </p:nvSpPr>
-        <p:spPr>
-          <a:xfrm>
-            <a:off x="3333750" y="3724821"/>
-            <a:ext cx="8070977" cy="256530"/>
-          </a:xfrm>
-          <a:prstGeom prst="rect">
-            <a:avLst/>
-          </a:prstGeom>
-          <a:noFill/>
-          <a:ln/>
-        </p:spPr>
-        <p:txBody>
-          <a:bodyPr wrap="square" lIns="0" tIns="0" rIns="0" bIns="0" rtlCol="0" anchor="t">
-            <a:normAutofit/>
-          </a:bodyPr>
-          <a:lstStyle/>
-          <a:p>
-            <a:pPr algn="l" indent="0" marL="0">
-              <a:lnSpc>
-                <a:spcPts val="1820"/>
-              </a:lnSpc>
-              <a:buNone/>
+              <a:buSzPct val="100000"/>
+              <a:buChar char="•"/>
             </a:pPr>
             <a:r>
               <a:rPr lang="en-US" sz="1300" dirty="0">
@@ -18899,7 +18771,7 @@
                 <a:ea typeface="Public Sans" pitchFamily="34" charset="-122"/>
                 <a:cs typeface="Public Sans" pitchFamily="34" charset="-120"/>
               </a:rPr>
-              <a:t>Collect GPS at every call and retrain with location risk (test PR-AUC 0.131 → 0.141) · add weather, traffic &amp; caller details</a:t>
+              <a:t>Net benefit peaks at ~64% capacity: ALS is undersized, with diminishing returns — the first 15% is worth €743k per 1,000 calls, the next 10% only €278k more.</a:t>
             </a:r>
             <a:endParaRPr lang="en-US" sz="1300" dirty="0"/>
           </a:p>
@@ -18907,7 +18779,7 @@
       </p:sp>
       <p:sp>
         <p:nvSpPr>
-          <p:cNvPr id="16" name="Text 14"/>
+          <p:cNvPr id="5" name="Text 3"/>
           <p:cNvSpPr/>
           <p:nvPr/>
         </p:nvSpPr>
@@ -18951,14 +18823,14 @@
       </p:sp>
       <p:sp>
         <p:nvSpPr>
-          <p:cNvPr id="17" name="Text 15"/>
+          <p:cNvPr id="6" name="Text 4"/>
           <p:cNvSpPr/>
           <p:nvPr/>
         </p:nvSpPr>
         <p:spPr>
           <a:xfrm>
-            <a:off x="11218466" y="6238280"/>
-            <a:ext cx="211534" cy="238720"/>
+            <a:off x="11221145" y="6238280"/>
+            <a:ext cx="208855" cy="238720"/>
           </a:xfrm>
           <a:prstGeom prst="rect">
             <a:avLst/>
@@ -18987,12 +18859,385 @@
                 <a:ea typeface="Public Sans" pitchFamily="34" charset="-122"/>
                 <a:cs typeface="Public Sans" pitchFamily="34" charset="-120"/>
               </a:rPr>
-              <a:t>26</a:t>
+              <a:t>23</a:t>
             </a:r>
             <a:endParaRPr lang="en-US" sz="1200" dirty="0"/>
           </a:p>
         </p:txBody>
       </p:sp>
+      <p:pic>
+        <p:nvPicPr>
+          <p:cNvPr id="7" name="Picture 6" descr="task3_value_vs_capacity.png"/>
+          <p:cNvPicPr>
+            <a:picLocks noChangeAspect="1"/>
+          </p:cNvPicPr>
+          <p:nvPr/>
+        </p:nvPicPr>
+        <p:blipFill>
+          <a:blip r:embed="rId2"/>
+          <a:stretch>
+            <a:fillRect/>
+          </a:stretch>
+        </p:blipFill>
+        <p:spPr>
+          <a:xfrm>
+            <a:off x="812800" y="1642070"/>
+            <a:ext cx="5400000" cy="3349367"/>
+          </a:xfrm>
+          <a:prstGeom prst="rect">
+            <a:avLst/>
+          </a:prstGeom>
+        </p:spPr>
+      </p:pic>
+    </p:spTree>
+  </p:cSld>
+  <p:clrMapOvr>
+    <a:masterClrMapping/>
+  </p:clrMapOvr>
+</p:sld>
+</file>
+
+<file path=ppt/slides/slide24.xml><?xml version="1.0" encoding="utf-8"?>
+<p:sld xmlns:a="http://schemas.openxmlformats.org/drawingml/2006/main" xmlns:p="http://schemas.openxmlformats.org/presentationml/2006/main" xmlns:r="http://schemas.openxmlformats.org/officeDocument/2006/relationships">
+  <p:cSld>
+    <p:spTree>
+      <p:nvGrpSpPr>
+        <p:cNvPr id="1" name=""/>
+        <p:cNvGrpSpPr/>
+        <p:nvPr/>
+      </p:nvGrpSpPr>
+      <p:grpSpPr/>
+      <p:sp>
+        <p:nvSpPr>
+          <p:cNvPr id="2" name="Text 0"/>
+          <p:cNvSpPr/>
+          <p:nvPr/>
+        </p:nvSpPr>
+        <p:spPr>
+          <a:xfrm>
+            <a:off x="812800" y="812800"/>
+            <a:ext cx="10883392" cy="238720"/>
+          </a:xfrm>
+          <a:prstGeom prst="rect">
+            <a:avLst/>
+          </a:prstGeom>
+          <a:noFill/>
+          <a:ln/>
+        </p:spPr>
+        <p:txBody>
+          <a:bodyPr wrap="square" lIns="0" tIns="0" rIns="0" bIns="0" rtlCol="0" anchor="t">
+            <a:normAutofit/>
+          </a:bodyPr>
+          <a:lstStyle/>
+          <a:p>
+            <a:pPr algn="l" indent="0" marL="0">
+              <a:lnSpc>
+                <a:spcPts val="1680"/>
+              </a:lnSpc>
+              <a:buNone/>
+            </a:pPr>
+            <a:r>
+              <a:rPr lang="en-US" sz="1200" b="1" spc="150" kern="0" dirty="0">
+                <a:solidFill>
+                  <a:srgbClr val="15213B"/>
+                </a:solidFill>
+                <a:latin typeface="Public Sans" pitchFamily="34" charset="0"/>
+                <a:ea typeface="Public Sans" pitchFamily="34" charset="-122"/>
+                <a:cs typeface="Public Sans" pitchFamily="34" charset="-120"/>
+              </a:rPr>
+              <a:t>04 · ORIGINALITY</a:t>
+            </a:r>
+            <a:endParaRPr lang="en-US" sz="1200" dirty="0"/>
+          </a:p>
+        </p:txBody>
+      </p:sp>
+      <p:sp>
+        <p:nvSpPr>
+          <p:cNvPr id="3" name="Text 1"/>
+          <p:cNvSpPr/>
+          <p:nvPr>
+            <p:ph type="title"/>
+          </p:nvPr>
+        </p:nvSpPr>
+        <p:spPr>
+          <a:xfrm>
+            <a:off x="812800" y="1026120"/>
+            <a:ext cx="10883392" cy="463550"/>
+          </a:xfrm>
+          <a:prstGeom prst="rect">
+            <a:avLst/>
+          </a:prstGeom>
+          <a:noFill/>
+          <a:ln/>
+        </p:spPr>
+        <p:txBody>
+          <a:bodyPr wrap="square" lIns="0" tIns="0" rIns="0" bIns="0" rtlCol="0" anchor="t">
+            <a:normAutofit/>
+          </a:bodyPr>
+          <a:lstStyle/>
+          <a:p>
+            <a:pPr algn="l" indent="0" marL="0">
+              <a:lnSpc>
+                <a:spcPts val="3450"/>
+              </a:lnSpc>
+              <a:buNone/>
+            </a:pPr>
+            <a:r>
+              <a:rPr lang="en-US" sz="3000" b="1" i="0" dirty="0">
+                <a:solidFill>
+                  <a:srgbClr val="15213B"/>
+                </a:solidFill>
+                <a:latin typeface="Libre Baskerville" pitchFamily="18" charset="0"/>
+                <a:ea typeface="Libre Baskerville" pitchFamily="18" charset="-122"/>
+                <a:cs typeface="Libre Baskerville" pitchFamily="18" charset="-120"/>
+              </a:rPr>
+              <a:t>Fatal hotspots persist — and GPS is the missing signal</a:t>
+            </a:r>
+            <a:endParaRPr lang="en-US" sz="3000" dirty="0"/>
+          </a:p>
+        </p:txBody>
+      </p:sp>
+      <p:sp>
+        <p:nvSpPr>
+          <p:cNvPr id="4" name="Text 2"/>
+          <p:cNvSpPr/>
+          <p:nvPr/>
+        </p:nvSpPr>
+        <p:spPr>
+          <a:xfrm>
+            <a:off x="6400000" y="1642070"/>
+            <a:ext cx="5288572" cy="4300000"/>
+          </a:xfrm>
+          <a:prstGeom prst="rect">
+            <a:avLst/>
+          </a:prstGeom>
+          <a:noFill/>
+          <a:ln/>
+        </p:spPr>
+        <p:txBody>
+          <a:bodyPr wrap="square" lIns="0" tIns="0" rIns="0" bIns="0" rtlCol="0" anchor="t">
+            <a:normAutofit/>
+          </a:bodyPr>
+          <a:lstStyle/>
+          <a:p>
+            <a:pPr algn="l" marL="155956" indent="-155956">
+              <a:lnSpc>
+                <a:spcPts val="1950"/>
+              </a:lnSpc>
+              <a:buSzPct val="100000"/>
+              <a:buChar char="•"/>
+            </a:pPr>
+            <a:r>
+              <a:rPr lang="en-US" sz="1300" dirty="0">
+                <a:solidFill>
+                  <a:srgbClr val="46516B"/>
+                </a:solidFill>
+                <a:latin typeface="Public Sans" pitchFamily="34" charset="0"/>
+                <a:ea typeface="Public Sans" pitchFamily="34" charset="-122"/>
+                <a:cs typeface="Public Sans" pitchFamily="34" charset="-120"/>
+              </a:rPr>
+              <a:t>1° grid (≈ 110 km) on the GPS years 2017–2023; hotspots = riskiest cells holding 15% of crashes (109 cells).</a:t>
+            </a:r>
+            <a:endParaRPr lang="en-US" sz="1300" dirty="0"/>
+          </a:p>
+          <a:p>
+            <a:pPr algn="l" marL="155956" indent="-155956">
+              <a:lnSpc>
+                <a:spcPts val="1950"/>
+              </a:lnSpc>
+              <a:buSzPct val="100000"/>
+              <a:buChar char="•"/>
+            </a:pPr>
+            <a:r>
+              <a:rPr lang="en-US" sz="1300" dirty="0">
+                <a:solidFill>
+                  <a:srgbClr val="46516B"/>
+                </a:solidFill>
+                <a:latin typeface="Public Sans" pitchFamily="34" charset="0"/>
+                <a:ea typeface="Public Sans" pitchFamily="34" charset="-122"/>
+                <a:cs typeface="Public Sans" pitchFamily="34" charset="-120"/>
+              </a:rPr>
+              <a:t>Checked on 2024–25, never seen: 14% of crashes but 25.5% of deaths; fatal rate 12.6% vs. 6.2% elsewhere.</a:t>
+            </a:r>
+            <a:endParaRPr lang="en-US" sz="1300" dirty="0"/>
+          </a:p>
+          <a:p>
+            <a:pPr algn="l" marL="155956" indent="-155956">
+              <a:lnSpc>
+                <a:spcPts val="1950"/>
+              </a:lnSpc>
+              <a:buSzPct val="100000"/>
+              <a:buChar char="•"/>
+            </a:pPr>
+            <a:r>
+              <a:rPr lang="en-US" sz="1300" dirty="0">
+                <a:solidFill>
+                  <a:srgbClr val="46516B"/>
+                </a:solidFill>
+                <a:latin typeface="Public Sans" pitchFamily="34" charset="0"/>
+                <a:ea typeface="Public Sans" pitchFamily="34" charset="-122"/>
+                <a:cs typeface="Public Sans" pitchFamily="34" charset="-120"/>
+              </a:rPr>
+              <a:t>Highest risk in the North-East (Pernambuco, Bahia): candidate ALS / helicopter bases and inspections.</a:t>
+            </a:r>
+            <a:endParaRPr lang="en-US" sz="1300" dirty="0"/>
+          </a:p>
+          <a:p>
+            <a:pPr algn="l" marL="155956" indent="-155956">
+              <a:lnSpc>
+                <a:spcPts val="1950"/>
+              </a:lnSpc>
+              <a:buSzPct val="100000"/>
+              <a:buChar char="•"/>
+            </a:pPr>
+            <a:r>
+              <a:rPr lang="en-US" sz="1300" dirty="0">
+                <a:solidFill>
+                  <a:srgbClr val="46516B"/>
+                </a:solidFill>
+                <a:latin typeface="Public Sans" pitchFamily="34" charset="0"/>
+                <a:ea typeface="Public Sans" pitchFamily="34" charset="-122"/>
+                <a:cs typeface="Public Sans" pitchFamily="34" charset="-120"/>
+              </a:rPr>
+              <a:t>Adding GPS cell risk to Gradient Boosting (train 2017–21): test PR-AUC 0.131 → 0.141, validation 0.132 → 0.153 — more than any change of algorithm.</a:t>
+            </a:r>
+            <a:endParaRPr lang="en-US" sz="1300" dirty="0"/>
+          </a:p>
+          <a:p>
+            <a:pPr algn="l" marL="155956" indent="-155956">
+              <a:lnSpc>
+                <a:spcPts val="1950"/>
+              </a:lnSpc>
+              <a:buSzPct val="100000"/>
+              <a:buChar char="•"/>
+            </a:pPr>
+            <a:r>
+              <a:rPr lang="en-US" sz="1300" dirty="0">
+                <a:solidFill>
+                  <a:srgbClr val="46516B"/>
+                </a:solidFill>
+                <a:latin typeface="Public Sans" pitchFamily="34" charset="0"/>
+                <a:ea typeface="Public Sans" pitchFamily="34" charset="-122"/>
+                <a:cs typeface="Public Sans" pitchFamily="34" charset="-120"/>
+              </a:rPr>
+              <a:t>Interactive Folium map: reports/figures/task3_hotspot_map.html</a:t>
+            </a:r>
+            <a:endParaRPr lang="en-US" sz="1300" dirty="0"/>
+          </a:p>
+        </p:txBody>
+      </p:sp>
+      <p:sp>
+        <p:nvSpPr>
+          <p:cNvPr id="5" name="Text 3"/>
+          <p:cNvSpPr/>
+          <p:nvPr/>
+        </p:nvSpPr>
+        <p:spPr>
+          <a:xfrm>
+            <a:off x="812800" y="6238280"/>
+            <a:ext cx="4057174" cy="238720"/>
+          </a:xfrm>
+          <a:prstGeom prst="rect">
+            <a:avLst/>
+          </a:prstGeom>
+          <a:noFill/>
+          <a:ln/>
+        </p:spPr>
+        <p:txBody>
+          <a:bodyPr wrap="square" lIns="0" tIns="0" rIns="0" bIns="0" rtlCol="0" anchor="t">
+            <a:normAutofit/>
+          </a:bodyPr>
+          <a:lstStyle/>
+          <a:p>
+            <a:pPr algn="l" indent="0" marL="0">
+              <a:lnSpc>
+                <a:spcPts val="1680"/>
+              </a:lnSpc>
+              <a:buNone/>
+            </a:pPr>
+            <a:r>
+              <a:rPr lang="en-US" sz="1200" dirty="0">
+                <a:solidFill>
+                  <a:srgbClr val="8B9099"/>
+                </a:solidFill>
+                <a:latin typeface="Public Sans" pitchFamily="34" charset="0"/>
+                <a:ea typeface="Public Sans" pitchFamily="34" charset="-122"/>
+                <a:cs typeface="Public Sans" pitchFamily="34" charset="-120"/>
+              </a:rPr>
+              <a:t>Road Safety Predictive Analytics — Group 6</a:t>
+            </a:r>
+            <a:endParaRPr lang="en-US" sz="1200" dirty="0"/>
+          </a:p>
+        </p:txBody>
+      </p:sp>
+      <p:sp>
+        <p:nvSpPr>
+          <p:cNvPr id="6" name="Text 4"/>
+          <p:cNvSpPr/>
+          <p:nvPr/>
+        </p:nvSpPr>
+        <p:spPr>
+          <a:xfrm>
+            <a:off x="11221145" y="6238280"/>
+            <a:ext cx="208855" cy="238720"/>
+          </a:xfrm>
+          <a:prstGeom prst="rect">
+            <a:avLst/>
+          </a:prstGeom>
+          <a:noFill/>
+          <a:ln/>
+        </p:spPr>
+        <p:txBody>
+          <a:bodyPr wrap="square" lIns="0" tIns="0" rIns="0" bIns="0" rtlCol="0" anchor="t">
+            <a:normAutofit/>
+          </a:bodyPr>
+          <a:lstStyle/>
+          <a:p>
+            <a:pPr algn="l" indent="0" marL="0">
+              <a:lnSpc>
+                <a:spcPts val="1680"/>
+              </a:lnSpc>
+              <a:buNone/>
+            </a:pPr>
+            <a:r>
+              <a:rPr lang="en-US" sz="1200" dirty="0">
+                <a:solidFill>
+                  <a:srgbClr val="8B9099"/>
+                </a:solidFill>
+                <a:latin typeface="Public Sans" pitchFamily="34" charset="0"/>
+                <a:ea typeface="Public Sans" pitchFamily="34" charset="-122"/>
+                <a:cs typeface="Public Sans" pitchFamily="34" charset="-120"/>
+              </a:rPr>
+              <a:t>24</a:t>
+            </a:r>
+            <a:endParaRPr lang="en-US" sz="1200" dirty="0"/>
+          </a:p>
+        </p:txBody>
+      </p:sp>
+      <p:pic>
+        <p:nvPicPr>
+          <p:cNvPr id="7" name="Picture 6" descr="task3_hotspots.png"/>
+          <p:cNvPicPr>
+            <a:picLocks noChangeAspect="1"/>
+          </p:cNvPicPr>
+          <p:nvPr/>
+        </p:nvPicPr>
+        <p:blipFill>
+          <a:blip r:embed="rId2"/>
+          <a:stretch>
+            <a:fillRect/>
+          </a:stretch>
+        </p:blipFill>
+        <p:spPr>
+          <a:xfrm>
+            <a:off x="812800" y="1642070"/>
+            <a:ext cx="4416202" cy="4450000"/>
+          </a:xfrm>
+          <a:prstGeom prst="rect">
+            <a:avLst/>
+          </a:prstGeom>
+        </p:spPr>
+      </p:pic>
     </p:spTree>
   </p:cSld>
   <p:clrMapOvr>
@@ -19063,7 +19308,7 @@
                 <a:ea typeface="Public Sans" pitchFamily="34" charset="-122"/>
                 <a:cs typeface="Public Sans" pitchFamily="34" charset="-120"/>
               </a:rPr>
-              <a:t>06</a:t>
+              <a:t>05</a:t>
             </a:r>
             <a:endParaRPr lang="en-US" sz="2000" dirty="0"/>
           </a:p>
@@ -19109,7 +19354,7 @@
                 <a:ea typeface="Libre Baskerville" pitchFamily="18" charset="-122"/>
                 <a:cs typeface="Libre Baskerville" pitchFamily="18" charset="-120"/>
               </a:rPr>
-              <a:t>Annexes</a:t>
+              <a:t>Conclusions</a:t>
             </a:r>
             <a:endParaRPr lang="en-US" sz="4000" dirty="0"/>
           </a:p>
@@ -19153,7 +19398,7 @@
                 <a:ea typeface="Public Sans" pitchFamily="34" charset="-122"/>
                 <a:cs typeface="Public Sans" pitchFamily="34" charset="-120"/>
               </a:rPr>
-              <a:t>Details for questions, not presented in the 10 minutes.</a:t>
+              <a:t>What we found, what we'd still need, and what comes next.</a:t>
             </a:r>
             <a:endParaRPr lang="en-US" sz="1500" dirty="0"/>
           </a:p>
@@ -19168,6 +19413,858 @@
 </file>
 
 <file path=ppt/slides/slide26.xml><?xml version="1.0" encoding="utf-8"?>
+<p:sld xmlns:a="http://schemas.openxmlformats.org/drawingml/2006/main" xmlns:r="http://schemas.openxmlformats.org/officeDocument/2006/relationships" xmlns:p="http://schemas.openxmlformats.org/presentationml/2006/main">
+  <p:cSld name="Slide 18">
+    <p:bg>
+      <p:bgPr>
+        <a:solidFill>
+          <a:srgbClr val="FBFBF8"/>
+        </a:solidFill>
+      </p:bgPr>
+    </p:bg>
+    <p:spTree>
+      <p:nvGrpSpPr>
+        <p:cNvPr id="1" name=""/>
+        <p:cNvGrpSpPr/>
+        <p:nvPr/>
+      </p:nvGrpSpPr>
+      <p:grpSpPr>
+        <a:xfrm>
+          <a:off x="0" y="0"/>
+          <a:ext cx="0" cy="0"/>
+          <a:chOff x="0" y="0"/>
+          <a:chExt cx="0" cy="0"/>
+        </a:xfrm>
+      </p:grpSpPr>
+      <p:sp>
+        <p:nvSpPr>
+          <p:cNvPr id="2" name="Text 0"/>
+          <p:cNvSpPr/>
+          <p:nvPr/>
+        </p:nvSpPr>
+        <p:spPr>
+          <a:xfrm>
+            <a:off x="812800" y="812800"/>
+            <a:ext cx="10883392" cy="238720"/>
+          </a:xfrm>
+          <a:prstGeom prst="rect">
+            <a:avLst/>
+          </a:prstGeom>
+          <a:noFill/>
+          <a:ln/>
+        </p:spPr>
+        <p:txBody>
+          <a:bodyPr wrap="square" lIns="0" tIns="0" rIns="0" bIns="0" rtlCol="0" anchor="t">
+            <a:normAutofit/>
+          </a:bodyPr>
+          <a:lstStyle/>
+          <a:p>
+            <a:pPr algn="l" indent="0" marL="0">
+              <a:lnSpc>
+                <a:spcPts val="1680"/>
+              </a:lnSpc>
+              <a:buNone/>
+            </a:pPr>
+            <a:r>
+              <a:rPr lang="en-US" sz="1200" b="1" spc="150" kern="0" dirty="0">
+                <a:solidFill>
+                  <a:srgbClr val="15213B"/>
+                </a:solidFill>
+                <a:latin typeface="Public Sans" pitchFamily="34" charset="0"/>
+                <a:ea typeface="Public Sans" pitchFamily="34" charset="-122"/>
+                <a:cs typeface="Public Sans" pitchFamily="34" charset="-120"/>
+              </a:rPr>
+              <a:t>05 · CONCLUSIONS</a:t>
+            </a:r>
+            <a:endParaRPr lang="en-US" sz="1200" dirty="0"/>
+          </a:p>
+        </p:txBody>
+      </p:sp>
+      <p:sp>
+        <p:nvSpPr>
+          <p:cNvPr id="3" name="Text 1"/>
+          <p:cNvSpPr/>
+          <p:nvPr>
+            <p:ph type="title"/>
+          </p:nvPr>
+        </p:nvSpPr>
+        <p:spPr>
+          <a:xfrm>
+            <a:off x="812800" y="1026120"/>
+            <a:ext cx="10883392" cy="434330"/>
+          </a:xfrm>
+          <a:prstGeom prst="rect">
+            <a:avLst/>
+          </a:prstGeom>
+          <a:noFill/>
+          <a:ln/>
+        </p:spPr>
+        <p:txBody>
+          <a:bodyPr wrap="square" lIns="0" tIns="0" rIns="0" bIns="0" rtlCol="0" anchor="t">
+            <a:normAutofit/>
+          </a:bodyPr>
+          <a:lstStyle/>
+          <a:p>
+            <a:pPr algn="l" indent="0" marL="0">
+              <a:lnSpc>
+                <a:spcPts val="3220"/>
+              </a:lnSpc>
+              <a:buNone/>
+            </a:pPr>
+            <a:r>
+              <a:rPr lang="en-US" sz="2800" b="1" i="0" dirty="0">
+                <a:solidFill>
+                  <a:srgbClr val="15213B"/>
+                </a:solidFill>
+                <a:latin typeface="Libre Baskerville" pitchFamily="18" charset="0"/>
+                <a:ea typeface="Libre Baskerville" pitchFamily="18" charset="-122"/>
+                <a:cs typeface="Libre Baskerville" pitchFamily="18" charset="-120"/>
+              </a:rPr>
+              <a:t>Findings, limitations &amp; future work</a:t>
+            </a:r>
+            <a:endParaRPr lang="en-US" sz="2800" dirty="0"/>
+          </a:p>
+        </p:txBody>
+      </p:sp>
+      <p:sp>
+        <p:nvSpPr>
+          <p:cNvPr id="4" name="Shape 2"/>
+          <p:cNvSpPr/>
+          <p:nvPr/>
+        </p:nvSpPr>
+        <p:spPr>
+          <a:xfrm>
+            <a:off x="815975" y="1552525"/>
+            <a:ext cx="10560050" cy="516880"/>
+          </a:xfrm>
+          <a:prstGeom prst="roundRect">
+            <a:avLst>
+              <a:gd name="adj" fmla="val 14128"/>
+            </a:avLst>
+          </a:prstGeom>
+          <a:solidFill>
+            <a:srgbClr val="FDFDFB"/>
+          </a:solidFill>
+          <a:ln w="6350">
+            <a:solidFill>
+              <a:srgbClr val="E2DFD6"/>
+            </a:solidFill>
+            <a:prstDash val="solid"/>
+          </a:ln>
+        </p:spPr>
+        <p:txBody>
+          <a:bodyPr/>
+          <a:p/>
+        </p:txBody>
+      </p:sp>
+      <p:sp>
+        <p:nvSpPr>
+          <p:cNvPr id="5" name="Text 3"/>
+          <p:cNvSpPr/>
+          <p:nvPr/>
+        </p:nvSpPr>
+        <p:spPr>
+          <a:xfrm>
+            <a:off x="1022350" y="1695400"/>
+            <a:ext cx="2223770" cy="256530"/>
+          </a:xfrm>
+          <a:prstGeom prst="rect">
+            <a:avLst/>
+          </a:prstGeom>
+          <a:noFill/>
+          <a:ln/>
+        </p:spPr>
+        <p:txBody>
+          <a:bodyPr wrap="square" lIns="0" tIns="0" rIns="0" bIns="0" rtlCol="0" anchor="t">
+            <a:normAutofit/>
+          </a:bodyPr>
+          <a:lstStyle/>
+          <a:p>
+            <a:pPr algn="l" indent="0" marL="0">
+              <a:lnSpc>
+                <a:spcPts val="1820"/>
+              </a:lnSpc>
+              <a:buNone/>
+            </a:pPr>
+            <a:r>
+              <a:rPr lang="en-US" sz="1300" b="1" dirty="0">
+                <a:solidFill>
+                  <a:srgbClr val="B05A26"/>
+                </a:solidFill>
+                <a:latin typeface="Public Sans" pitchFamily="34" charset="0"/>
+                <a:ea typeface="Public Sans" pitchFamily="34" charset="-122"/>
+                <a:cs typeface="Public Sans" pitchFamily="34" charset="-120"/>
+              </a:rPr>
+              <a:t>Key finding</a:t>
+            </a:r>
+            <a:endParaRPr lang="en-US" sz="1300" dirty="0"/>
+          </a:p>
+        </p:txBody>
+      </p:sp>
+      <p:sp>
+        <p:nvSpPr>
+          <p:cNvPr id="6" name="Text 4"/>
+          <p:cNvSpPr/>
+          <p:nvPr/>
+        </p:nvSpPr>
+        <p:spPr>
+          <a:xfrm>
+            <a:off x="3333750" y="1695400"/>
+            <a:ext cx="8070977" cy="256530"/>
+          </a:xfrm>
+          <a:prstGeom prst="rect">
+            <a:avLst/>
+          </a:prstGeom>
+          <a:noFill/>
+          <a:ln/>
+        </p:spPr>
+        <p:txBody>
+          <a:bodyPr wrap="square" lIns="0" tIns="0" rIns="0" bIns="0" rtlCol="0" anchor="t">
+            <a:normAutofit/>
+          </a:bodyPr>
+          <a:lstStyle/>
+          <a:p>
+            <a:pPr algn="l" indent="0" marL="0">
+              <a:lnSpc>
+                <a:spcPts val="1820"/>
+              </a:lnSpc>
+              <a:buNone/>
+            </a:pPr>
+            <a:r>
+              <a:rPr lang="en-US" sz="1300" dirty="0">
+                <a:solidFill>
+                  <a:srgbClr val="46516B"/>
+                </a:solidFill>
+                <a:latin typeface="Public Sans" pitchFamily="34" charset="0"/>
+                <a:ea typeface="Public Sans" pitchFamily="34" charset="-122"/>
+                <a:cs typeface="Public Sans" pitchFamily="34" charset="-120"/>
+              </a:rPr>
+              <a:t>Gradient Boosting: 31.5% of fatal crashes with 15% of ALS capacity (2.1× random); MLP &amp; LR within 3 crashes</a:t>
+            </a:r>
+            <a:endParaRPr lang="en-US" sz="1300" dirty="0"/>
+          </a:p>
+        </p:txBody>
+      </p:sp>
+      <p:sp>
+        <p:nvSpPr>
+          <p:cNvPr id="7" name="Shape 5"/>
+          <p:cNvSpPr/>
+          <p:nvPr/>
+        </p:nvSpPr>
+        <p:spPr>
+          <a:xfrm>
+            <a:off x="815975" y="2151955"/>
+            <a:ext cx="10560050" cy="516880"/>
+          </a:xfrm>
+          <a:prstGeom prst="roundRect">
+            <a:avLst>
+              <a:gd name="adj" fmla="val 14128"/>
+            </a:avLst>
+          </a:prstGeom>
+          <a:solidFill>
+            <a:srgbClr val="FDFDFB"/>
+          </a:solidFill>
+          <a:ln w="6350">
+            <a:solidFill>
+              <a:srgbClr val="E2DFD6"/>
+            </a:solidFill>
+            <a:prstDash val="solid"/>
+          </a:ln>
+        </p:spPr>
+        <p:txBody>
+          <a:bodyPr/>
+          <a:p/>
+        </p:txBody>
+      </p:sp>
+      <p:sp>
+        <p:nvSpPr>
+          <p:cNvPr id="8" name="Text 6"/>
+          <p:cNvSpPr/>
+          <p:nvPr/>
+        </p:nvSpPr>
+        <p:spPr>
+          <a:xfrm>
+            <a:off x="1022350" y="2294830"/>
+            <a:ext cx="2223770" cy="256530"/>
+          </a:xfrm>
+          <a:prstGeom prst="rect">
+            <a:avLst/>
+          </a:prstGeom>
+          <a:noFill/>
+          <a:ln/>
+        </p:spPr>
+        <p:txBody>
+          <a:bodyPr wrap="square" lIns="0" tIns="0" rIns="0" bIns="0" rtlCol="0" anchor="t">
+            <a:normAutofit/>
+          </a:bodyPr>
+          <a:lstStyle/>
+          <a:p>
+            <a:pPr algn="l" indent="0" marL="0">
+              <a:lnSpc>
+                <a:spcPts val="1820"/>
+              </a:lnSpc>
+              <a:buNone/>
+            </a:pPr>
+            <a:r>
+              <a:rPr lang="en-US" sz="1300" b="1" dirty="0">
+                <a:solidFill>
+                  <a:srgbClr val="B05A26"/>
+                </a:solidFill>
+                <a:latin typeface="Public Sans" pitchFamily="34" charset="0"/>
+                <a:ea typeface="Public Sans" pitchFamily="34" charset="-122"/>
+                <a:cs typeface="Public Sans" pitchFamily="34" charset="-120"/>
+              </a:rPr>
+              <a:t>Actionable insight</a:t>
+            </a:r>
+            <a:endParaRPr lang="en-US" sz="1300" dirty="0"/>
+          </a:p>
+        </p:txBody>
+      </p:sp>
+      <p:sp>
+        <p:nvSpPr>
+          <p:cNvPr id="9" name="Text 7"/>
+          <p:cNvSpPr/>
+          <p:nvPr/>
+        </p:nvSpPr>
+        <p:spPr>
+          <a:xfrm>
+            <a:off x="3333750" y="2294830"/>
+            <a:ext cx="8070977" cy="256530"/>
+          </a:xfrm>
+          <a:prstGeom prst="rect">
+            <a:avLst/>
+          </a:prstGeom>
+          <a:noFill/>
+          <a:ln/>
+        </p:spPr>
+        <p:txBody>
+          <a:bodyPr wrap="square" lIns="0" tIns="0" rIns="0" bIns="0" rtlCol="0" anchor="t">
+            <a:normAutofit/>
+          </a:bodyPr>
+          <a:lstStyle/>
+          <a:p>
+            <a:pPr algn="l" indent="0" marL="0">
+              <a:lnSpc>
+                <a:spcPts val="1820"/>
+              </a:lnSpc>
+              <a:buNone/>
+            </a:pPr>
+            <a:r>
+              <a:rPr lang="en-US" sz="1300" dirty="0">
+                <a:solidFill>
+                  <a:srgbClr val="46516B"/>
+                </a:solidFill>
+                <a:latin typeface="Public Sans" pitchFamily="34" charset="0"/>
+                <a:ea typeface="Public Sans" pitchFamily="34" charset="-122"/>
+                <a:cs typeface="Public Sans" pitchFamily="34" charset="-120"/>
+              </a:rPr>
+              <a:t>Send ALS to the top-15% risk calls (≈ €585k per 1,000 calls vs. random) · base ALS near North-East hotspots</a:t>
+            </a:r>
+            <a:endParaRPr lang="en-US" sz="1300" dirty="0"/>
+          </a:p>
+        </p:txBody>
+      </p:sp>
+      <p:sp>
+        <p:nvSpPr>
+          <p:cNvPr id="10" name="Shape 8"/>
+          <p:cNvSpPr/>
+          <p:nvPr/>
+        </p:nvSpPr>
+        <p:spPr>
+          <a:xfrm>
+            <a:off x="815975" y="2751386"/>
+            <a:ext cx="10560050" cy="748010"/>
+          </a:xfrm>
+          <a:prstGeom prst="roundRect">
+            <a:avLst>
+              <a:gd name="adj" fmla="val 9763"/>
+            </a:avLst>
+          </a:prstGeom>
+          <a:solidFill>
+            <a:srgbClr val="FDFDFB"/>
+          </a:solidFill>
+          <a:ln w="6350">
+            <a:solidFill>
+              <a:srgbClr val="E2DFD6"/>
+            </a:solidFill>
+            <a:prstDash val="solid"/>
+          </a:ln>
+        </p:spPr>
+        <p:txBody>
+          <a:bodyPr/>
+          <a:p/>
+        </p:txBody>
+      </p:sp>
+      <p:sp>
+        <p:nvSpPr>
+          <p:cNvPr id="11" name="Text 9"/>
+          <p:cNvSpPr/>
+          <p:nvPr/>
+        </p:nvSpPr>
+        <p:spPr>
+          <a:xfrm>
+            <a:off x="1022350" y="2894261"/>
+            <a:ext cx="2223770" cy="487660"/>
+          </a:xfrm>
+          <a:prstGeom prst="rect">
+            <a:avLst/>
+          </a:prstGeom>
+          <a:noFill/>
+          <a:ln/>
+        </p:spPr>
+        <p:txBody>
+          <a:bodyPr wrap="square" lIns="0" tIns="0" rIns="0" bIns="0" rtlCol="0" anchor="t">
+            <a:normAutofit/>
+          </a:bodyPr>
+          <a:lstStyle/>
+          <a:p>
+            <a:pPr algn="l" indent="0" marL="0">
+              <a:lnSpc>
+                <a:spcPts val="1820"/>
+              </a:lnSpc>
+              <a:buNone/>
+            </a:pPr>
+            <a:r>
+              <a:rPr lang="en-US" sz="1300" b="1" dirty="0">
+                <a:solidFill>
+                  <a:srgbClr val="B05A26"/>
+                </a:solidFill>
+                <a:latin typeface="Public Sans" pitchFamily="34" charset="0"/>
+                <a:ea typeface="Public Sans" pitchFamily="34" charset="-122"/>
+                <a:cs typeface="Public Sans" pitchFamily="34" charset="-120"/>
+              </a:rPr>
+              <a:t>Limitations</a:t>
+            </a:r>
+            <a:endParaRPr lang="en-US" sz="1300" dirty="0"/>
+          </a:p>
+        </p:txBody>
+      </p:sp>
+      <p:sp>
+        <p:nvSpPr>
+          <p:cNvPr id="12" name="Text 10"/>
+          <p:cNvSpPr/>
+          <p:nvPr/>
+        </p:nvSpPr>
+        <p:spPr>
+          <a:xfrm>
+            <a:off x="3333750" y="2894261"/>
+            <a:ext cx="8070977" cy="487660"/>
+          </a:xfrm>
+          <a:prstGeom prst="rect">
+            <a:avLst/>
+          </a:prstGeom>
+          <a:noFill/>
+          <a:ln/>
+        </p:spPr>
+        <p:txBody>
+          <a:bodyPr wrap="square" lIns="0" tIns="0" rIns="0" bIns="0" rtlCol="0" anchor="t">
+            <a:normAutofit/>
+          </a:bodyPr>
+          <a:lstStyle/>
+          <a:p>
+            <a:pPr algn="l" indent="0" marL="0">
+              <a:lnSpc>
+                <a:spcPts val="1820"/>
+              </a:lnSpc>
+              <a:buNone/>
+            </a:pPr>
+            <a:r>
+              <a:rPr lang="en-US" sz="1300" dirty="0">
+                <a:solidFill>
+                  <a:srgbClr val="46516B"/>
+                </a:solidFill>
+                <a:latin typeface="Public Sans" pitchFamily="34" charset="0"/>
+                <a:ea typeface="Public Sans" pitchFamily="34" charset="-122"/>
+                <a:cs typeface="Public Sans" pitchFamily="34" charset="-120"/>
+              </a:rPr>
+              <a:t>Reporting change in 2015 (e-DAT) limits older data · GPS only from 2017 and no highway ID, so location is approximate · no traffic, weather or caller information · 150,000-row sample</a:t>
+            </a:r>
+            <a:endParaRPr lang="en-US" sz="1300" dirty="0"/>
+          </a:p>
+        </p:txBody>
+      </p:sp>
+      <p:sp>
+        <p:nvSpPr>
+          <p:cNvPr id="13" name="Shape 11"/>
+          <p:cNvSpPr/>
+          <p:nvPr/>
+        </p:nvSpPr>
+        <p:spPr>
+          <a:xfrm>
+            <a:off x="815975" y="3581946"/>
+            <a:ext cx="10560050" cy="516880"/>
+          </a:xfrm>
+          <a:prstGeom prst="roundRect">
+            <a:avLst>
+              <a:gd name="adj" fmla="val 14128"/>
+            </a:avLst>
+          </a:prstGeom>
+          <a:solidFill>
+            <a:srgbClr val="FDFDFB"/>
+          </a:solidFill>
+          <a:ln w="6350">
+            <a:solidFill>
+              <a:srgbClr val="E2DFD6"/>
+            </a:solidFill>
+            <a:prstDash val="solid"/>
+          </a:ln>
+        </p:spPr>
+        <p:txBody>
+          <a:bodyPr/>
+          <a:p/>
+        </p:txBody>
+      </p:sp>
+      <p:sp>
+        <p:nvSpPr>
+          <p:cNvPr id="14" name="Text 12"/>
+          <p:cNvSpPr/>
+          <p:nvPr/>
+        </p:nvSpPr>
+        <p:spPr>
+          <a:xfrm>
+            <a:off x="1022350" y="3724821"/>
+            <a:ext cx="2223770" cy="256530"/>
+          </a:xfrm>
+          <a:prstGeom prst="rect">
+            <a:avLst/>
+          </a:prstGeom>
+          <a:noFill/>
+          <a:ln/>
+        </p:spPr>
+        <p:txBody>
+          <a:bodyPr wrap="square" lIns="0" tIns="0" rIns="0" bIns="0" rtlCol="0" anchor="t">
+            <a:normAutofit/>
+          </a:bodyPr>
+          <a:lstStyle/>
+          <a:p>
+            <a:pPr algn="l" indent="0" marL="0">
+              <a:lnSpc>
+                <a:spcPts val="1820"/>
+              </a:lnSpc>
+              <a:buNone/>
+            </a:pPr>
+            <a:r>
+              <a:rPr lang="en-US" sz="1300" b="1" dirty="0">
+                <a:solidFill>
+                  <a:srgbClr val="B05A26"/>
+                </a:solidFill>
+                <a:latin typeface="Public Sans" pitchFamily="34" charset="0"/>
+                <a:ea typeface="Public Sans" pitchFamily="34" charset="-122"/>
+                <a:cs typeface="Public Sans" pitchFamily="34" charset="-120"/>
+              </a:rPr>
+              <a:t>Future work</a:t>
+            </a:r>
+            <a:endParaRPr lang="en-US" sz="1300" dirty="0"/>
+          </a:p>
+        </p:txBody>
+      </p:sp>
+      <p:sp>
+        <p:nvSpPr>
+          <p:cNvPr id="15" name="Text 13"/>
+          <p:cNvSpPr/>
+          <p:nvPr/>
+        </p:nvSpPr>
+        <p:spPr>
+          <a:xfrm>
+            <a:off x="3333750" y="3724821"/>
+            <a:ext cx="8070977" cy="256530"/>
+          </a:xfrm>
+          <a:prstGeom prst="rect">
+            <a:avLst/>
+          </a:prstGeom>
+          <a:noFill/>
+          <a:ln/>
+        </p:spPr>
+        <p:txBody>
+          <a:bodyPr wrap="square" lIns="0" tIns="0" rIns="0" bIns="0" rtlCol="0" anchor="t">
+            <a:normAutofit/>
+          </a:bodyPr>
+          <a:lstStyle/>
+          <a:p>
+            <a:pPr algn="l" indent="0" marL="0">
+              <a:lnSpc>
+                <a:spcPts val="1820"/>
+              </a:lnSpc>
+              <a:buNone/>
+            </a:pPr>
+            <a:r>
+              <a:rPr lang="en-US" sz="1300" dirty="0">
+                <a:solidFill>
+                  <a:srgbClr val="46516B"/>
+                </a:solidFill>
+                <a:latin typeface="Public Sans" pitchFamily="34" charset="0"/>
+                <a:ea typeface="Public Sans" pitchFamily="34" charset="-122"/>
+                <a:cs typeface="Public Sans" pitchFamily="34" charset="-120"/>
+              </a:rPr>
+              <a:t>Collect GPS at every call and retrain with location risk (test PR-AUC 0.131 → 0.141) · add weather, traffic &amp; caller details</a:t>
+            </a:r>
+            <a:endParaRPr lang="en-US" sz="1300" dirty="0"/>
+          </a:p>
+        </p:txBody>
+      </p:sp>
+      <p:sp>
+        <p:nvSpPr>
+          <p:cNvPr id="16" name="Text 14"/>
+          <p:cNvSpPr/>
+          <p:nvPr/>
+        </p:nvSpPr>
+        <p:spPr>
+          <a:xfrm>
+            <a:off x="812800" y="6238280"/>
+            <a:ext cx="4057174" cy="238720"/>
+          </a:xfrm>
+          <a:prstGeom prst="rect">
+            <a:avLst/>
+          </a:prstGeom>
+          <a:noFill/>
+          <a:ln/>
+        </p:spPr>
+        <p:txBody>
+          <a:bodyPr wrap="square" lIns="0" tIns="0" rIns="0" bIns="0" rtlCol="0" anchor="t">
+            <a:normAutofit/>
+          </a:bodyPr>
+          <a:lstStyle/>
+          <a:p>
+            <a:pPr algn="l" indent="0" marL="0">
+              <a:lnSpc>
+                <a:spcPts val="1680"/>
+              </a:lnSpc>
+              <a:buNone/>
+            </a:pPr>
+            <a:r>
+              <a:rPr lang="en-US" sz="1200" dirty="0">
+                <a:solidFill>
+                  <a:srgbClr val="8B9099"/>
+                </a:solidFill>
+                <a:latin typeface="Public Sans" pitchFamily="34" charset="0"/>
+                <a:ea typeface="Public Sans" pitchFamily="34" charset="-122"/>
+                <a:cs typeface="Public Sans" pitchFamily="34" charset="-120"/>
+              </a:rPr>
+              <a:t>Road Safety Predictive Analytics — Group 6</a:t>
+            </a:r>
+            <a:endParaRPr lang="en-US" sz="1200" dirty="0"/>
+          </a:p>
+        </p:txBody>
+      </p:sp>
+      <p:sp>
+        <p:nvSpPr>
+          <p:cNvPr id="17" name="Text 15"/>
+          <p:cNvSpPr/>
+          <p:nvPr/>
+        </p:nvSpPr>
+        <p:spPr>
+          <a:xfrm>
+            <a:off x="11218466" y="6238280"/>
+            <a:ext cx="211534" cy="238720"/>
+          </a:xfrm>
+          <a:prstGeom prst="rect">
+            <a:avLst/>
+          </a:prstGeom>
+          <a:noFill/>
+          <a:ln/>
+        </p:spPr>
+        <p:txBody>
+          <a:bodyPr wrap="square" lIns="0" tIns="0" rIns="0" bIns="0" rtlCol="0" anchor="t">
+            <a:normAutofit/>
+          </a:bodyPr>
+          <a:lstStyle/>
+          <a:p>
+            <a:pPr algn="l" indent="0" marL="0">
+              <a:lnSpc>
+                <a:spcPts val="1680"/>
+              </a:lnSpc>
+              <a:buNone/>
+            </a:pPr>
+            <a:r>
+              <a:rPr lang="en-US" sz="1200" dirty="0">
+                <a:solidFill>
+                  <a:srgbClr val="8B9099"/>
+                </a:solidFill>
+                <a:latin typeface="Public Sans" pitchFamily="34" charset="0"/>
+                <a:ea typeface="Public Sans" pitchFamily="34" charset="-122"/>
+                <a:cs typeface="Public Sans" pitchFamily="34" charset="-120"/>
+              </a:rPr>
+              <a:t>26</a:t>
+            </a:r>
+            <a:endParaRPr lang="en-US" sz="1200" dirty="0"/>
+          </a:p>
+        </p:txBody>
+      </p:sp>
+    </p:spTree>
+  </p:cSld>
+  <p:clrMapOvr>
+    <a:masterClrMapping/>
+  </p:clrMapOvr>
+</p:sld>
+</file>
+
+<file path=ppt/slides/slide27.xml><?xml version="1.0" encoding="utf-8"?>
+<p:sld xmlns:a="http://schemas.openxmlformats.org/drawingml/2006/main" xmlns:r="http://schemas.openxmlformats.org/officeDocument/2006/relationships" xmlns:p="http://schemas.openxmlformats.org/presentationml/2006/main">
+  <p:cSld name="Slide 17">
+    <p:bg>
+      <p:bgPr>
+        <a:solidFill>
+          <a:srgbClr val="15213B"/>
+        </a:solidFill>
+      </p:bgPr>
+    </p:bg>
+    <p:spTree>
+      <p:nvGrpSpPr>
+        <p:cNvPr id="1" name=""/>
+        <p:cNvGrpSpPr/>
+        <p:nvPr/>
+      </p:nvGrpSpPr>
+      <p:grpSpPr>
+        <a:xfrm>
+          <a:off x="0" y="0"/>
+          <a:ext cx="0" cy="0"/>
+          <a:chOff x="0" y="0"/>
+          <a:chExt cx="0" cy="0"/>
+        </a:xfrm>
+      </p:grpSpPr>
+      <p:sp>
+        <p:nvSpPr>
+          <p:cNvPr id="2" name="Text 0"/>
+          <p:cNvSpPr/>
+          <p:nvPr/>
+        </p:nvSpPr>
+        <p:spPr>
+          <a:xfrm>
+            <a:off x="812800" y="2673350"/>
+            <a:ext cx="10883392" cy="381000"/>
+          </a:xfrm>
+          <a:prstGeom prst="rect">
+            <a:avLst/>
+          </a:prstGeom>
+          <a:noFill/>
+          <a:ln/>
+        </p:spPr>
+        <p:txBody>
+          <a:bodyPr wrap="square" lIns="0" tIns="0" rIns="0" bIns="0" rtlCol="0" anchor="t">
+            <a:normAutofit/>
+          </a:bodyPr>
+          <a:lstStyle/>
+          <a:p>
+            <a:pPr algn="l" indent="0" marL="0">
+              <a:lnSpc>
+                <a:spcPts val="2800"/>
+              </a:lnSpc>
+              <a:buNone/>
+            </a:pPr>
+            <a:r>
+              <a:rPr lang="en-US" sz="2000" b="1" dirty="0">
+                <a:solidFill>
+                  <a:srgbClr val="C7CCDD"/>
+                </a:solidFill>
+                <a:latin typeface="Public Sans" pitchFamily="34" charset="0"/>
+                <a:ea typeface="Public Sans" pitchFamily="34" charset="-122"/>
+                <a:cs typeface="Public Sans" pitchFamily="34" charset="-120"/>
+              </a:rPr>
+              <a:t>06</a:t>
+            </a:r>
+            <a:endParaRPr lang="en-US" sz="2000" dirty="0"/>
+          </a:p>
+        </p:txBody>
+      </p:sp>
+      <p:sp>
+        <p:nvSpPr>
+          <p:cNvPr id="3" name="Text 1"/>
+          <p:cNvSpPr/>
+          <p:nvPr>
+            <p:ph type="title"/>
+          </p:nvPr>
+        </p:nvSpPr>
+        <p:spPr>
+          <a:xfrm>
+            <a:off x="812800" y="3181350"/>
+            <a:ext cx="10883392" cy="609600"/>
+          </a:xfrm>
+          <a:prstGeom prst="rect">
+            <a:avLst/>
+          </a:prstGeom>
+          <a:noFill/>
+          <a:ln/>
+        </p:spPr>
+        <p:txBody>
+          <a:bodyPr wrap="square" lIns="0" tIns="0" rIns="0" bIns="0" rtlCol="0" anchor="t">
+            <a:normAutofit/>
+          </a:bodyPr>
+          <a:lstStyle/>
+          <a:p>
+            <a:pPr algn="l" indent="0" marL="0">
+              <a:lnSpc>
+                <a:spcPts val="4600"/>
+              </a:lnSpc>
+              <a:buNone/>
+            </a:pPr>
+            <a:r>
+              <a:rPr lang="en-US" sz="4000" b="1" i="0" dirty="0">
+                <a:solidFill>
+                  <a:srgbClr val="F4F1E8"/>
+                </a:solidFill>
+                <a:latin typeface="Libre Baskerville" pitchFamily="18" charset="0"/>
+                <a:ea typeface="Libre Baskerville" pitchFamily="18" charset="-122"/>
+                <a:cs typeface="Libre Baskerville" pitchFamily="18" charset="-120"/>
+              </a:rPr>
+              <a:t>Annexes</a:t>
+            </a:r>
+            <a:endParaRPr lang="en-US" sz="4000" dirty="0"/>
+          </a:p>
+        </p:txBody>
+      </p:sp>
+      <p:sp>
+        <p:nvSpPr>
+          <p:cNvPr id="4" name="Text 2"/>
+          <p:cNvSpPr/>
+          <p:nvPr/>
+        </p:nvSpPr>
+        <p:spPr>
+          <a:xfrm>
+            <a:off x="812800" y="3917950"/>
+            <a:ext cx="8502650" cy="292100"/>
+          </a:xfrm>
+          <a:prstGeom prst="rect">
+            <a:avLst/>
+          </a:prstGeom>
+          <a:noFill/>
+          <a:ln/>
+        </p:spPr>
+        <p:txBody>
+          <a:bodyPr wrap="square" lIns="0" tIns="0" rIns="0" bIns="0" rtlCol="0" anchor="t">
+            <a:normAutofit/>
+          </a:bodyPr>
+          <a:lstStyle/>
+          <a:p>
+            <a:pPr algn="l" indent="0" marL="0">
+              <a:lnSpc>
+                <a:spcPts val="2100"/>
+              </a:lnSpc>
+              <a:buNone/>
+            </a:pPr>
+            <a:r>
+              <a:rPr lang="en-US" sz="1500" dirty="0">
+                <a:solidFill>
+                  <a:srgbClr val="C7CCDD"/>
+                </a:solidFill>
+                <a:latin typeface="Public Sans" pitchFamily="34" charset="0"/>
+                <a:ea typeface="Public Sans" pitchFamily="34" charset="-122"/>
+                <a:cs typeface="Public Sans" pitchFamily="34" charset="-120"/>
+              </a:rPr>
+              <a:t>Details for questions, not presented in the 10 minutes.</a:t>
+            </a:r>
+            <a:endParaRPr lang="en-US" sz="1500" dirty="0"/>
+          </a:p>
+        </p:txBody>
+      </p:sp>
+    </p:spTree>
+  </p:cSld>
+  <p:clrMapOvr>
+    <a:masterClrMapping/>
+  </p:clrMapOvr>
+</p:sld>
+</file>
+
+<file path=ppt/slides/slide28.xml><?xml version="1.0" encoding="utf-8"?>
 <p:sld xmlns:a="http://schemas.openxmlformats.org/drawingml/2006/main" xmlns:r="http://schemas.openxmlformats.org/officeDocument/2006/relationships" xmlns:p="http://schemas.openxmlformats.org/presentationml/2006/main">
   <p:cSld name="Slide 19">
     <p:bg>
@@ -19962,7 +21059,7 @@
 </p:sld>
 </file>
 
-<file path=ppt/slides/slide27.xml><?xml version="1.0" encoding="utf-8"?>
+<file path=ppt/slides/slide29.xml><?xml version="1.0" encoding="utf-8"?>
 <p:sld xmlns:a="http://schemas.openxmlformats.org/drawingml/2006/main" xmlns:r="http://schemas.openxmlformats.org/officeDocument/2006/relationships" xmlns:p="http://schemas.openxmlformats.org/presentationml/2006/main">
   <p:cSld name="Slide 20">
     <p:bg>
@@ -20808,500 +21905,6 @@
 </p:sld>
 </file>
 
-<file path=ppt/slides/slide28.xml><?xml version="1.0" encoding="utf-8"?>
-<p:sld xmlns:a="http://schemas.openxmlformats.org/drawingml/2006/main" xmlns:r="http://schemas.openxmlformats.org/officeDocument/2006/relationships" xmlns:p="http://schemas.openxmlformats.org/presentationml/2006/main">
-  <p:cSld name="Slide 21">
-    <p:bg>
-      <p:bgPr>
-        <a:solidFill>
-          <a:srgbClr val="15213B"/>
-        </a:solidFill>
-      </p:bgPr>
-    </p:bg>
-    <p:spTree>
-      <p:nvGrpSpPr>
-        <p:cNvPr id="1" name=""/>
-        <p:cNvGrpSpPr/>
-        <p:nvPr/>
-      </p:nvGrpSpPr>
-      <p:grpSpPr>
-        <a:xfrm>
-          <a:off x="0" y="0"/>
-          <a:ext cx="0" cy="0"/>
-          <a:chOff x="0" y="0"/>
-          <a:chExt cx="0" cy="0"/>
-        </a:xfrm>
-      </p:grpSpPr>
-      <p:sp>
-        <p:nvSpPr>
-          <p:cNvPr id="2" name="Text 0"/>
-          <p:cNvSpPr/>
-          <p:nvPr>
-            <p:ph type="title"/>
-          </p:nvPr>
-        </p:nvSpPr>
-        <p:spPr>
-          <a:xfrm>
-            <a:off x="3915494" y="2644180"/>
-            <a:ext cx="4360962" cy="723900"/>
-          </a:xfrm>
-          <a:prstGeom prst="rect">
-            <a:avLst/>
-          </a:prstGeom>
-          <a:noFill/>
-          <a:ln/>
-        </p:spPr>
-        <p:txBody>
-          <a:bodyPr wrap="square" lIns="0" tIns="0" rIns="0" bIns="0" rtlCol="0" anchor="t">
-            <a:normAutofit/>
-          </a:bodyPr>
-          <a:lstStyle/>
-          <a:p>
-            <a:pPr algn="ctr" indent="0" marL="0">
-              <a:lnSpc>
-                <a:spcPts val="5500"/>
-              </a:lnSpc>
-              <a:buNone/>
-            </a:pPr>
-            <a:r>
-              <a:rPr lang="en-US" sz="5000" b="1" i="0" dirty="0">
-                <a:solidFill>
-                  <a:srgbClr val="F4F1E8"/>
-                </a:solidFill>
-                <a:latin typeface="Libre Baskerville" pitchFamily="18" charset="0"/>
-                <a:ea typeface="Libre Baskerville" pitchFamily="18" charset="-122"/>
-                <a:cs typeface="Libre Baskerville" pitchFamily="18" charset="-120"/>
-              </a:rPr>
-              <a:t>Thank you</a:t>
-            </a:r>
-            <a:endParaRPr lang="en-US" sz="5000" dirty="0"/>
-          </a:p>
-        </p:txBody>
-      </p:sp>
-      <p:sp>
-        <p:nvSpPr>
-          <p:cNvPr id="3" name="Text 1"/>
-          <p:cNvSpPr/>
-          <p:nvPr/>
-        </p:nvSpPr>
-        <p:spPr>
-          <a:xfrm>
-            <a:off x="4707081" y="3520480"/>
-            <a:ext cx="2777788" cy="327620"/>
-          </a:xfrm>
-          <a:prstGeom prst="rect">
-            <a:avLst/>
-          </a:prstGeom>
-          <a:noFill/>
-          <a:ln/>
-        </p:spPr>
-        <p:txBody>
-          <a:bodyPr wrap="square" lIns="0" tIns="0" rIns="0" bIns="0" rtlCol="0" anchor="t">
-            <a:normAutofit/>
-          </a:bodyPr>
-          <a:lstStyle/>
-          <a:p>
-            <a:pPr algn="ctr" indent="0" marL="0">
-              <a:lnSpc>
-                <a:spcPts val="2380"/>
-              </a:lnSpc>
-              <a:buNone/>
-            </a:pPr>
-            <a:r>
-              <a:rPr lang="en-US" sz="1700" dirty="0">
-                <a:solidFill>
-                  <a:srgbClr val="C7CCDD"/>
-                </a:solidFill>
-                <a:latin typeface="Public Sans" pitchFamily="34" charset="0"/>
-                <a:ea typeface="Public Sans" pitchFamily="34" charset="-122"/>
-                <a:cs typeface="Public Sans" pitchFamily="34" charset="-120"/>
-              </a:rPr>
-              <a:t>Questions &amp; discussion</a:t>
-            </a:r>
-            <a:endParaRPr lang="en-US" sz="1700" dirty="0"/>
-          </a:p>
-        </p:txBody>
-      </p:sp>
-      <p:sp>
-        <p:nvSpPr>
-          <p:cNvPr id="4" name="Text 2"/>
-          <p:cNvSpPr/>
-          <p:nvPr/>
-        </p:nvSpPr>
-        <p:spPr>
-          <a:xfrm>
-            <a:off x="1527048" y="4000500"/>
-            <a:ext cx="9144000" cy="238720"/>
-          </a:xfrm>
-          <a:prstGeom prst="rect">
-            <a:avLst/>
-          </a:prstGeom>
-          <a:noFill/>
-          <a:ln/>
-        </p:spPr>
-        <p:txBody>
-          <a:bodyPr wrap="square" lIns="0" tIns="0" rIns="0" bIns="0" rtlCol="0" anchor="t">
-            <a:normAutofit/>
-          </a:bodyPr>
-          <a:lstStyle/>
-          <a:p>
-            <a:pPr algn="ctr" indent="0" marL="0">
-              <a:lnSpc>
-                <a:spcPts val="1680"/>
-              </a:lnSpc>
-              <a:buNone/>
-            </a:pPr>
-            <a:r>
-              <a:rPr lang="en-US" sz="1200" dirty="0">
-                <a:solidFill>
-                  <a:srgbClr val="8B93AC"/>
-                </a:solidFill>
-                <a:latin typeface="Public Sans" pitchFamily="34" charset="0"/>
-                <a:ea typeface="Public Sans" pitchFamily="34" charset="-122"/>
-                <a:cs typeface="Public Sans" pitchFamily="34" charset="-120"/>
-              </a:rPr>
-              <a:t>Group 6 · Joao · Olena · Samuel · Nuno · Pedro · Predictive Analytics &amp; Forecasting · EMBAAI</a:t>
-            </a:r>
-            <a:endParaRPr lang="en-US" sz="1200" dirty="0"/>
-          </a:p>
-        </p:txBody>
-      </p:sp>
-    </p:spTree>
-  </p:cSld>
-  <p:clrMapOvr>
-    <a:masterClrMapping/>
-  </p:clrMapOvr>
-</p:sld>
-</file>
-
-<file path=ppt/slides/slide29.xml><?xml version="1.0" encoding="utf-8"?>
-<p:sld xmlns:a="http://schemas.openxmlformats.org/drawingml/2006/main" xmlns:p="http://schemas.openxmlformats.org/presentationml/2006/main" xmlns:r="http://schemas.openxmlformats.org/officeDocument/2006/relationships">
-  <p:cSld>
-    <p:spTree>
-      <p:nvGrpSpPr>
-        <p:cNvPr id="1" name=""/>
-        <p:cNvGrpSpPr/>
-        <p:nvPr/>
-      </p:nvGrpSpPr>
-      <p:grpSpPr/>
-      <p:sp>
-        <p:nvSpPr>
-          <p:cNvPr id="2" name="Text 0"/>
-          <p:cNvSpPr/>
-          <p:nvPr/>
-        </p:nvSpPr>
-        <p:spPr>
-          <a:xfrm>
-            <a:off x="812800" y="812800"/>
-            <a:ext cx="10883392" cy="238720"/>
-          </a:xfrm>
-          <a:prstGeom prst="rect">
-            <a:avLst/>
-          </a:prstGeom>
-          <a:noFill/>
-          <a:ln/>
-        </p:spPr>
-        <p:txBody>
-          <a:bodyPr wrap="square" lIns="0" tIns="0" rIns="0" bIns="0" rtlCol="0" anchor="t">
-            <a:normAutofit/>
-          </a:bodyPr>
-          <a:lstStyle/>
-          <a:p>
-            <a:pPr algn="l" indent="0" marL="0">
-              <a:lnSpc>
-                <a:spcPts val="1680"/>
-              </a:lnSpc>
-              <a:buNone/>
-            </a:pPr>
-            <a:r>
-              <a:rPr lang="en-US" sz="1200" b="1" spc="150" kern="0" dirty="0">
-                <a:solidFill>
-                  <a:srgbClr val="15213B"/>
-                </a:solidFill>
-                <a:latin typeface="Public Sans" pitchFamily="34" charset="0"/>
-                <a:ea typeface="Public Sans" pitchFamily="34" charset="-122"/>
-                <a:cs typeface="Public Sans" pitchFamily="34" charset="-120"/>
-              </a:rPr>
-              <a:t>04 · ORIGINALITY</a:t>
-            </a:r>
-            <a:endParaRPr lang="en-US" sz="1200" dirty="0"/>
-          </a:p>
-        </p:txBody>
-      </p:sp>
-      <p:sp>
-        <p:nvSpPr>
-          <p:cNvPr id="3" name="Text 1"/>
-          <p:cNvSpPr/>
-          <p:nvPr>
-            <p:ph type="title"/>
-          </p:nvPr>
-        </p:nvSpPr>
-        <p:spPr>
-          <a:xfrm>
-            <a:off x="812800" y="1026120"/>
-            <a:ext cx="10883392" cy="463550"/>
-          </a:xfrm>
-          <a:prstGeom prst="rect">
-            <a:avLst/>
-          </a:prstGeom>
-          <a:noFill/>
-          <a:ln/>
-        </p:spPr>
-        <p:txBody>
-          <a:bodyPr wrap="square" lIns="0" tIns="0" rIns="0" bIns="0" rtlCol="0" anchor="t">
-            <a:normAutofit/>
-          </a:bodyPr>
-          <a:lstStyle/>
-          <a:p>
-            <a:pPr algn="l" indent="0" marL="0">
-              <a:lnSpc>
-                <a:spcPts val="3450"/>
-              </a:lnSpc>
-              <a:buNone/>
-            </a:pPr>
-            <a:r>
-              <a:rPr lang="en-US" sz="3000" b="1" i="0" dirty="0">
-                <a:solidFill>
-                  <a:srgbClr val="15213B"/>
-                </a:solidFill>
-                <a:latin typeface="Libre Baskerville" pitchFamily="18" charset="0"/>
-                <a:ea typeface="Libre Baskerville" pitchFamily="18" charset="-122"/>
-                <a:cs typeface="Libre Baskerville" pitchFamily="18" charset="-120"/>
-              </a:rPr>
-              <a:t>What is the model worth? Cost-benefit of ALS capacity</a:t>
-            </a:r>
-            <a:endParaRPr lang="en-US" sz="3000" dirty="0"/>
-          </a:p>
-        </p:txBody>
-      </p:sp>
-      <p:sp>
-        <p:nvSpPr>
-          <p:cNvPr id="4" name="Text 2"/>
-          <p:cNvSpPr/>
-          <p:nvPr/>
-        </p:nvSpPr>
-        <p:spPr>
-          <a:xfrm>
-            <a:off x="6400000" y="1642070"/>
-            <a:ext cx="5288572" cy="4300000"/>
-          </a:xfrm>
-          <a:prstGeom prst="rect">
-            <a:avLst/>
-          </a:prstGeom>
-          <a:noFill/>
-          <a:ln/>
-        </p:spPr>
-        <p:txBody>
-          <a:bodyPr wrap="square" lIns="0" tIns="0" rIns="0" bIns="0" rtlCol="0" anchor="t">
-            <a:normAutofit/>
-          </a:bodyPr>
-          <a:lstStyle/>
-          <a:p>
-            <a:pPr algn="l" marL="155956" indent="-155956">
-              <a:lnSpc>
-                <a:spcPts val="1950"/>
-              </a:lnSpc>
-              <a:buSzPct val="100000"/>
-              <a:buChar char="•"/>
-            </a:pPr>
-            <a:r>
-              <a:rPr lang="en-US" sz="1300" dirty="0">
-                <a:solidFill>
-                  <a:srgbClr val="46516B"/>
-                </a:solidFill>
-                <a:latin typeface="Public Sans" pitchFamily="34" charset="0"/>
-                <a:ea typeface="Public Sans" pitchFamily="34" charset="-122"/>
-                <a:cs typeface="Public Sans" pitchFamily="34" charset="-120"/>
-              </a:rPr>
-              <a:t>At 15% capacity, an ALS unit sent by the model reaches a fatal crash 14.9% of the time — vs. 7.1% when sent at random.</a:t>
-            </a:r>
-            <a:endParaRPr lang="en-US" sz="1300" dirty="0"/>
-          </a:p>
-          <a:p>
-            <a:pPr algn="l" marL="155956" indent="-155956">
-              <a:lnSpc>
-                <a:spcPts val="1950"/>
-              </a:lnSpc>
-              <a:buSzPct val="100000"/>
-              <a:buChar char="•"/>
-            </a:pPr>
-            <a:r>
-              <a:rPr lang="en-US" sz="1300" dirty="0">
-                <a:solidFill>
-                  <a:srgbClr val="46516B"/>
-                </a:solidFill>
-                <a:latin typeface="Public Sans" pitchFamily="34" charset="0"/>
-                <a:ea typeface="Public Sans" pitchFamily="34" charset="-122"/>
-                <a:cs typeface="Public Sans" pitchFamily="34" charset="-120"/>
-              </a:rPr>
-              <a:t>≈ €585k of value added per 1,000 calls vs. random dispatch (€2,500 per ALS, €50,000 per fatal crash reached).</a:t>
-            </a:r>
-            <a:endParaRPr lang="en-US" sz="1300" dirty="0"/>
-          </a:p>
-          <a:p>
-            <a:pPr algn="l" marL="155956" indent="-155956">
-              <a:lnSpc>
-                <a:spcPts val="1950"/>
-              </a:lnSpc>
-              <a:buSzPct val="100000"/>
-              <a:buChar char="•"/>
-            </a:pPr>
-            <a:r>
-              <a:rPr lang="en-US" sz="1300" dirty="0">
-                <a:solidFill>
-                  <a:srgbClr val="46516B"/>
-                </a:solidFill>
-                <a:latin typeface="Public Sans" pitchFamily="34" charset="0"/>
-                <a:ea typeface="Public Sans" pitchFamily="34" charset="-122"/>
-                <a:cs typeface="Public Sans" pitchFamily="34" charset="-120"/>
-              </a:rPr>
-              <a:t>Robust to the €50k assumption: dispatch pays off once reaching a fatal crash is worth &gt; €16.8k with the model, vs. &gt; €35.2k at random.</a:t>
-            </a:r>
-            <a:endParaRPr lang="en-US" sz="1300" dirty="0"/>
-          </a:p>
-          <a:p>
-            <a:pPr algn="l" marL="155956" indent="-155956">
-              <a:lnSpc>
-                <a:spcPts val="1950"/>
-              </a:lnSpc>
-              <a:buSzPct val="100000"/>
-              <a:buChar char="•"/>
-            </a:pPr>
-            <a:r>
-              <a:rPr lang="en-US" sz="1300" dirty="0">
-                <a:solidFill>
-                  <a:srgbClr val="46516B"/>
-                </a:solidFill>
-                <a:latin typeface="Public Sans" pitchFamily="34" charset="0"/>
-                <a:ea typeface="Public Sans" pitchFamily="34" charset="-122"/>
-                <a:cs typeface="Public Sans" pitchFamily="34" charset="-120"/>
-              </a:rPr>
-              <a:t>Net benefit peaks at ~64% capacity: ALS is undersized, with diminishing returns — the first 15% is worth €743k per 1,000 calls, the next 10% only €278k more.</a:t>
-            </a:r>
-            <a:endParaRPr lang="en-US" sz="1300" dirty="0"/>
-          </a:p>
-        </p:txBody>
-      </p:sp>
-      <p:sp>
-        <p:nvSpPr>
-          <p:cNvPr id="5" name="Text 3"/>
-          <p:cNvSpPr/>
-          <p:nvPr/>
-        </p:nvSpPr>
-        <p:spPr>
-          <a:xfrm>
-            <a:off x="812800" y="6238280"/>
-            <a:ext cx="4057174" cy="238720"/>
-          </a:xfrm>
-          <a:prstGeom prst="rect">
-            <a:avLst/>
-          </a:prstGeom>
-          <a:noFill/>
-          <a:ln/>
-        </p:spPr>
-        <p:txBody>
-          <a:bodyPr wrap="square" lIns="0" tIns="0" rIns="0" bIns="0" rtlCol="0" anchor="t">
-            <a:normAutofit/>
-          </a:bodyPr>
-          <a:lstStyle/>
-          <a:p>
-            <a:pPr algn="l" indent="0" marL="0">
-              <a:lnSpc>
-                <a:spcPts val="1680"/>
-              </a:lnSpc>
-              <a:buNone/>
-            </a:pPr>
-            <a:r>
-              <a:rPr lang="en-US" sz="1200" dirty="0">
-                <a:solidFill>
-                  <a:srgbClr val="8B9099"/>
-                </a:solidFill>
-                <a:latin typeface="Public Sans" pitchFamily="34" charset="0"/>
-                <a:ea typeface="Public Sans" pitchFamily="34" charset="-122"/>
-                <a:cs typeface="Public Sans" pitchFamily="34" charset="-120"/>
-              </a:rPr>
-              <a:t>Road Safety Predictive Analytics — Group 6</a:t>
-            </a:r>
-            <a:endParaRPr lang="en-US" sz="1200" dirty="0"/>
-          </a:p>
-        </p:txBody>
-      </p:sp>
-      <p:sp>
-        <p:nvSpPr>
-          <p:cNvPr id="6" name="Text 4"/>
-          <p:cNvSpPr/>
-          <p:nvPr/>
-        </p:nvSpPr>
-        <p:spPr>
-          <a:xfrm>
-            <a:off x="11221145" y="6238280"/>
-            <a:ext cx="208855" cy="238720"/>
-          </a:xfrm>
-          <a:prstGeom prst="rect">
-            <a:avLst/>
-          </a:prstGeom>
-          <a:noFill/>
-          <a:ln/>
-        </p:spPr>
-        <p:txBody>
-          <a:bodyPr wrap="square" lIns="0" tIns="0" rIns="0" bIns="0" rtlCol="0" anchor="t">
-            <a:normAutofit/>
-          </a:bodyPr>
-          <a:lstStyle/>
-          <a:p>
-            <a:pPr algn="l" indent="0" marL="0">
-              <a:lnSpc>
-                <a:spcPts val="1680"/>
-              </a:lnSpc>
-              <a:buNone/>
-            </a:pPr>
-            <a:r>
-              <a:rPr lang="en-US" sz="1200" dirty="0">
-                <a:solidFill>
-                  <a:srgbClr val="8B9099"/>
-                </a:solidFill>
-                <a:latin typeface="Public Sans" pitchFamily="34" charset="0"/>
-                <a:ea typeface="Public Sans" pitchFamily="34" charset="-122"/>
-                <a:cs typeface="Public Sans" pitchFamily="34" charset="-120"/>
-              </a:rPr>
-              <a:t>23</a:t>
-            </a:r>
-            <a:endParaRPr lang="en-US" sz="1200" dirty="0"/>
-          </a:p>
-        </p:txBody>
-      </p:sp>
-      <p:pic>
-        <p:nvPicPr>
-          <p:cNvPr id="7" name="Picture 6" descr="task3_value_vs_capacity.png"/>
-          <p:cNvPicPr>
-            <a:picLocks noChangeAspect="1"/>
-          </p:cNvPicPr>
-          <p:nvPr/>
-        </p:nvPicPr>
-        <p:blipFill>
-          <a:blip r:embed="rId2"/>
-          <a:stretch>
-            <a:fillRect/>
-          </a:stretch>
-        </p:blipFill>
-        <p:spPr>
-          <a:xfrm>
-            <a:off x="812800" y="1642070"/>
-            <a:ext cx="5400000" cy="3349367"/>
-          </a:xfrm>
-          <a:prstGeom prst="rect">
-            <a:avLst/>
-          </a:prstGeom>
-        </p:spPr>
-      </p:pic>
-    </p:spTree>
-  </p:cSld>
-  <p:clrMapOvr>
-    <a:masterClrMapping/>
-  </p:clrMapOvr>
-</p:sld>
-</file>
-
 <file path=ppt/slides/slide3.xml><?xml version="1.0" encoding="utf-8"?>
 <p:sld xmlns:a="http://schemas.openxmlformats.org/drawingml/2006/main" xmlns:r="http://schemas.openxmlformats.org/officeDocument/2006/relationships" xmlns:p="http://schemas.openxmlformats.org/presentationml/2006/main">
   <p:cSld name="Slide 3">
@@ -21838,25 +22441,41 @@
 </file>
 
 <file path=ppt/slides/slide30.xml><?xml version="1.0" encoding="utf-8"?>
-<p:sld xmlns:a="http://schemas.openxmlformats.org/drawingml/2006/main" xmlns:p="http://schemas.openxmlformats.org/presentationml/2006/main" xmlns:r="http://schemas.openxmlformats.org/officeDocument/2006/relationships">
-  <p:cSld>
+<p:sld xmlns:a="http://schemas.openxmlformats.org/drawingml/2006/main" xmlns:r="http://schemas.openxmlformats.org/officeDocument/2006/relationships" xmlns:p="http://schemas.openxmlformats.org/presentationml/2006/main">
+  <p:cSld name="Slide 21">
+    <p:bg>
+      <p:bgPr>
+        <a:solidFill>
+          <a:srgbClr val="15213B"/>
+        </a:solidFill>
+      </p:bgPr>
+    </p:bg>
     <p:spTree>
       <p:nvGrpSpPr>
         <p:cNvPr id="1" name=""/>
         <p:cNvGrpSpPr/>
         <p:nvPr/>
       </p:nvGrpSpPr>
-      <p:grpSpPr/>
+      <p:grpSpPr>
+        <a:xfrm>
+          <a:off x="0" y="0"/>
+          <a:ext cx="0" cy="0"/>
+          <a:chOff x="0" y="0"/>
+          <a:chExt cx="0" cy="0"/>
+        </a:xfrm>
+      </p:grpSpPr>
       <p:sp>
         <p:nvSpPr>
           <p:cNvPr id="2" name="Text 0"/>
           <p:cNvSpPr/>
-          <p:nvPr/>
+          <p:nvPr>
+            <p:ph type="title"/>
+          </p:nvPr>
         </p:nvSpPr>
         <p:spPr>
           <a:xfrm>
-            <a:off x="812800" y="812800"/>
-            <a:ext cx="10883392" cy="238720"/>
+            <a:off x="3915494" y="2644180"/>
+            <a:ext cx="4360962" cy="723900"/>
           </a:xfrm>
           <a:prstGeom prst="rect">
             <a:avLst/>
@@ -21870,24 +22489,24 @@
           </a:bodyPr>
           <a:lstStyle/>
           <a:p>
-            <a:pPr algn="l" indent="0" marL="0">
+            <a:pPr algn="ctr" indent="0" marL="0">
               <a:lnSpc>
-                <a:spcPts val="1680"/>
+                <a:spcPts val="5500"/>
               </a:lnSpc>
               <a:buNone/>
             </a:pPr>
             <a:r>
-              <a:rPr lang="en-US" sz="1200" b="1" spc="150" kern="0" dirty="0">
+              <a:rPr lang="en-US" sz="5000" b="1" i="0" dirty="0">
                 <a:solidFill>
-                  <a:srgbClr val="15213B"/>
+                  <a:srgbClr val="F4F1E8"/>
                 </a:solidFill>
-                <a:latin typeface="Public Sans" pitchFamily="34" charset="0"/>
-                <a:ea typeface="Public Sans" pitchFamily="34" charset="-122"/>
-                <a:cs typeface="Public Sans" pitchFamily="34" charset="-120"/>
+                <a:latin typeface="Libre Baskerville" pitchFamily="18" charset="0"/>
+                <a:ea typeface="Libre Baskerville" pitchFamily="18" charset="-122"/>
+                <a:cs typeface="Libre Baskerville" pitchFamily="18" charset="-120"/>
               </a:rPr>
-              <a:t>04 · ORIGINALITY</a:t>
-            </a:r>
-            <a:endParaRPr lang="en-US" sz="1200" dirty="0"/>
+              <a:t>Thank you</a:t>
+            </a:r>
+            <a:endParaRPr lang="en-US" sz="5000" dirty="0"/>
           </a:p>
         </p:txBody>
       </p:sp>
@@ -21895,14 +22514,12 @@
         <p:nvSpPr>
           <p:cNvPr id="3" name="Text 1"/>
           <p:cNvSpPr/>
-          <p:nvPr>
-            <p:ph type="title"/>
-          </p:nvPr>
+          <p:nvPr/>
         </p:nvSpPr>
         <p:spPr>
           <a:xfrm>
-            <a:off x="812800" y="1026120"/>
-            <a:ext cx="10883392" cy="463550"/>
+            <a:off x="4707081" y="3520480"/>
+            <a:ext cx="2777788" cy="327620"/>
           </a:xfrm>
           <a:prstGeom prst="rect">
             <a:avLst/>
@@ -21916,24 +22533,24 @@
           </a:bodyPr>
           <a:lstStyle/>
           <a:p>
-            <a:pPr algn="l" indent="0" marL="0">
+            <a:pPr algn="ctr" indent="0" marL="0">
               <a:lnSpc>
-                <a:spcPts val="3450"/>
+                <a:spcPts val="2380"/>
               </a:lnSpc>
               <a:buNone/>
             </a:pPr>
             <a:r>
-              <a:rPr lang="en-US" sz="3000" b="1" i="0" dirty="0">
+              <a:rPr lang="en-US" sz="1700" dirty="0">
                 <a:solidFill>
-                  <a:srgbClr val="15213B"/>
+                  <a:srgbClr val="C7CCDD"/>
                 </a:solidFill>
-                <a:latin typeface="Libre Baskerville" pitchFamily="18" charset="0"/>
-                <a:ea typeface="Libre Baskerville" pitchFamily="18" charset="-122"/>
-                <a:cs typeface="Libre Baskerville" pitchFamily="18" charset="-120"/>
+                <a:latin typeface="Public Sans" pitchFamily="34" charset="0"/>
+                <a:ea typeface="Public Sans" pitchFamily="34" charset="-122"/>
+                <a:cs typeface="Public Sans" pitchFamily="34" charset="-120"/>
               </a:rPr>
-              <a:t>Fatal hotspots persist — and GPS is the missing signal</a:t>
-            </a:r>
-            <a:endParaRPr lang="en-US" sz="3000" dirty="0"/>
+              <a:t>Questions &amp; discussion</a:t>
+            </a:r>
+            <a:endParaRPr lang="en-US" sz="1700" dirty="0"/>
           </a:p>
         </p:txBody>
       </p:sp>
@@ -21945,8 +22562,8 @@
         </p:nvSpPr>
         <p:spPr>
           <a:xfrm>
-            <a:off x="6400000" y="1642070"/>
-            <a:ext cx="5288572" cy="4300000"/>
+            <a:off x="1527048" y="4000500"/>
+            <a:ext cx="9144000" cy="238720"/>
           </a:xfrm>
           <a:prstGeom prst="rect">
             <a:avLst/>
@@ -21960,224 +22577,27 @@
           </a:bodyPr>
           <a:lstStyle/>
           <a:p>
-            <a:pPr algn="l" marL="155956" indent="-155956">
+            <a:pPr algn="ctr" indent="0" marL="0">
               <a:lnSpc>
-                <a:spcPts val="1950"/>
+                <a:spcPts val="1680"/>
               </a:lnSpc>
-              <a:buSzPct val="100000"/>
-              <a:buChar char="•"/>
+              <a:buNone/>
             </a:pPr>
             <a:r>
-              <a:rPr lang="en-US" sz="1300" dirty="0">
+              <a:rPr lang="en-US" sz="1200" dirty="0">
                 <a:solidFill>
-                  <a:srgbClr val="46516B"/>
+                  <a:srgbClr val="8B93AC"/>
                 </a:solidFill>
                 <a:latin typeface="Public Sans" pitchFamily="34" charset="0"/>
                 <a:ea typeface="Public Sans" pitchFamily="34" charset="-122"/>
                 <a:cs typeface="Public Sans" pitchFamily="34" charset="-120"/>
               </a:rPr>
-              <a:t>1° grid (≈ 110 km) on the GPS years 2017–2023; hotspots = riskiest cells holding 15% of crashes (109 cells).</a:t>
-            </a:r>
-            <a:endParaRPr lang="en-US" sz="1300" dirty="0"/>
-          </a:p>
-          <a:p>
-            <a:pPr algn="l" marL="155956" indent="-155956">
-              <a:lnSpc>
-                <a:spcPts val="1950"/>
-              </a:lnSpc>
-              <a:buSzPct val="100000"/>
-              <a:buChar char="•"/>
-            </a:pPr>
-            <a:r>
-              <a:rPr lang="en-US" sz="1300" dirty="0">
-                <a:solidFill>
-                  <a:srgbClr val="46516B"/>
-                </a:solidFill>
-                <a:latin typeface="Public Sans" pitchFamily="34" charset="0"/>
-                <a:ea typeface="Public Sans" pitchFamily="34" charset="-122"/>
-                <a:cs typeface="Public Sans" pitchFamily="34" charset="-120"/>
-              </a:rPr>
-              <a:t>Checked on 2024–25, never seen: 14% of crashes but 25.5% of deaths; fatal rate 12.6% vs. 6.2% elsewhere.</a:t>
-            </a:r>
-            <a:endParaRPr lang="en-US" sz="1300" dirty="0"/>
-          </a:p>
-          <a:p>
-            <a:pPr algn="l" marL="155956" indent="-155956">
-              <a:lnSpc>
-                <a:spcPts val="1950"/>
-              </a:lnSpc>
-              <a:buSzPct val="100000"/>
-              <a:buChar char="•"/>
-            </a:pPr>
-            <a:r>
-              <a:rPr lang="en-US" sz="1300" dirty="0">
-                <a:solidFill>
-                  <a:srgbClr val="46516B"/>
-                </a:solidFill>
-                <a:latin typeface="Public Sans" pitchFamily="34" charset="0"/>
-                <a:ea typeface="Public Sans" pitchFamily="34" charset="-122"/>
-                <a:cs typeface="Public Sans" pitchFamily="34" charset="-120"/>
-              </a:rPr>
-              <a:t>Highest risk in the North-East (Pernambuco, Bahia): candidate ALS / helicopter bases and inspections.</a:t>
-            </a:r>
-            <a:endParaRPr lang="en-US" sz="1300" dirty="0"/>
-          </a:p>
-          <a:p>
-            <a:pPr algn="l" marL="155956" indent="-155956">
-              <a:lnSpc>
-                <a:spcPts val="1950"/>
-              </a:lnSpc>
-              <a:buSzPct val="100000"/>
-              <a:buChar char="•"/>
-            </a:pPr>
-            <a:r>
-              <a:rPr lang="en-US" sz="1300" dirty="0">
-                <a:solidFill>
-                  <a:srgbClr val="46516B"/>
-                </a:solidFill>
-                <a:latin typeface="Public Sans" pitchFamily="34" charset="0"/>
-                <a:ea typeface="Public Sans" pitchFamily="34" charset="-122"/>
-                <a:cs typeface="Public Sans" pitchFamily="34" charset="-120"/>
-              </a:rPr>
-              <a:t>Adding GPS cell risk to Gradient Boosting (train 2017–21): test PR-AUC 0.131 → 0.141, validation 0.132 → 0.153 — more than any change of algorithm.</a:t>
-            </a:r>
-            <a:endParaRPr lang="en-US" sz="1300" dirty="0"/>
-          </a:p>
-          <a:p>
-            <a:pPr algn="l" marL="155956" indent="-155956">
-              <a:lnSpc>
-                <a:spcPts val="1950"/>
-              </a:lnSpc>
-              <a:buSzPct val="100000"/>
-              <a:buChar char="•"/>
-            </a:pPr>
-            <a:r>
-              <a:rPr lang="en-US" sz="1300" dirty="0">
-                <a:solidFill>
-                  <a:srgbClr val="46516B"/>
-                </a:solidFill>
-                <a:latin typeface="Public Sans" pitchFamily="34" charset="0"/>
-                <a:ea typeface="Public Sans" pitchFamily="34" charset="-122"/>
-                <a:cs typeface="Public Sans" pitchFamily="34" charset="-120"/>
-              </a:rPr>
-              <a:t>Interactive Folium map: reports/figures/task3_hotspot_map.html</a:t>
-            </a:r>
-            <a:endParaRPr lang="en-US" sz="1300" dirty="0"/>
-          </a:p>
-        </p:txBody>
-      </p:sp>
-      <p:sp>
-        <p:nvSpPr>
-          <p:cNvPr id="5" name="Text 3"/>
-          <p:cNvSpPr/>
-          <p:nvPr/>
-        </p:nvSpPr>
-        <p:spPr>
-          <a:xfrm>
-            <a:off x="812800" y="6238280"/>
-            <a:ext cx="4057174" cy="238720"/>
-          </a:xfrm>
-          <a:prstGeom prst="rect">
-            <a:avLst/>
-          </a:prstGeom>
-          <a:noFill/>
-          <a:ln/>
-        </p:spPr>
-        <p:txBody>
-          <a:bodyPr wrap="square" lIns="0" tIns="0" rIns="0" bIns="0" rtlCol="0" anchor="t">
-            <a:normAutofit/>
-          </a:bodyPr>
-          <a:lstStyle/>
-          <a:p>
-            <a:pPr algn="l" indent="0" marL="0">
-              <a:lnSpc>
-                <a:spcPts val="1680"/>
-              </a:lnSpc>
-              <a:buNone/>
-            </a:pPr>
-            <a:r>
-              <a:rPr lang="en-US" sz="1200" dirty="0">
-                <a:solidFill>
-                  <a:srgbClr val="8B9099"/>
-                </a:solidFill>
-                <a:latin typeface="Public Sans" pitchFamily="34" charset="0"/>
-                <a:ea typeface="Public Sans" pitchFamily="34" charset="-122"/>
-                <a:cs typeface="Public Sans" pitchFamily="34" charset="-120"/>
-              </a:rPr>
-              <a:t>Road Safety Predictive Analytics — Group 6</a:t>
+              <a:t>Group 6 · Joao · Olena · Samuel · Nuno · Pedro · Predictive Analytics &amp; Forecasting · EMBAAI</a:t>
             </a:r>
             <a:endParaRPr lang="en-US" sz="1200" dirty="0"/>
           </a:p>
         </p:txBody>
       </p:sp>
-      <p:sp>
-        <p:nvSpPr>
-          <p:cNvPr id="6" name="Text 4"/>
-          <p:cNvSpPr/>
-          <p:nvPr/>
-        </p:nvSpPr>
-        <p:spPr>
-          <a:xfrm>
-            <a:off x="11221145" y="6238280"/>
-            <a:ext cx="208855" cy="238720"/>
-          </a:xfrm>
-          <a:prstGeom prst="rect">
-            <a:avLst/>
-          </a:prstGeom>
-          <a:noFill/>
-          <a:ln/>
-        </p:spPr>
-        <p:txBody>
-          <a:bodyPr wrap="square" lIns="0" tIns="0" rIns="0" bIns="0" rtlCol="0" anchor="t">
-            <a:normAutofit/>
-          </a:bodyPr>
-          <a:lstStyle/>
-          <a:p>
-            <a:pPr algn="l" indent="0" marL="0">
-              <a:lnSpc>
-                <a:spcPts val="1680"/>
-              </a:lnSpc>
-              <a:buNone/>
-            </a:pPr>
-            <a:r>
-              <a:rPr lang="en-US" sz="1200" dirty="0">
-                <a:solidFill>
-                  <a:srgbClr val="8B9099"/>
-                </a:solidFill>
-                <a:latin typeface="Public Sans" pitchFamily="34" charset="0"/>
-                <a:ea typeface="Public Sans" pitchFamily="34" charset="-122"/>
-                <a:cs typeface="Public Sans" pitchFamily="34" charset="-120"/>
-              </a:rPr>
-              <a:t>24</a:t>
-            </a:r>
-            <a:endParaRPr lang="en-US" sz="1200" dirty="0"/>
-          </a:p>
-        </p:txBody>
-      </p:sp>
-      <p:pic>
-        <p:nvPicPr>
-          <p:cNvPr id="7" name="Picture 6" descr="task3_hotspots.png"/>
-          <p:cNvPicPr>
-            <a:picLocks noChangeAspect="1"/>
-          </p:cNvPicPr>
-          <p:nvPr/>
-        </p:nvPicPr>
-        <p:blipFill>
-          <a:blip r:embed="rId2"/>
-          <a:stretch>
-            <a:fillRect/>
-          </a:stretch>
-        </p:blipFill>
-        <p:spPr>
-          <a:xfrm>
-            <a:off x="812800" y="1642070"/>
-            <a:ext cx="4416202" cy="4450000"/>
-          </a:xfrm>
-          <a:prstGeom prst="rect">
-            <a:avLst/>
-          </a:prstGeom>
-        </p:spPr>
-      </p:pic>
     </p:spTree>
   </p:cSld>
   <p:clrMapOvr>

--- a/reports/presentation/Road Safety Predictive Analytics — Group 6.pptx
+++ b/reports/presentation/Road Safety Predictive Analytics — Group 6.pptx
@@ -16346,12 +16346,12 @@
             <a:tbl>
               <a:tblPr/>
               <a:tblGrid>
-                <a:gridCol w="1899666"/>
-                <a:gridCol w="2110740"/>
-                <a:gridCol w="1688592"/>
-                <a:gridCol w="1688592"/>
-                <a:gridCol w="1477518"/>
-                <a:gridCol w="1688592"/>
+                <a:gridCol w="4069080"/>
+                <a:gridCol w="1097280"/>
+                <a:gridCol w="1097280"/>
+                <a:gridCol w="1600200"/>
+                <a:gridCol w="1463040"/>
+                <a:gridCol w="1226820"/>
               </a:tblGrid>
               <a:tr h="359321">
                 <a:tc>
@@ -18433,8 +18433,8 @@
         </p:nvSpPr>
         <p:spPr>
           <a:xfrm>
-            <a:off x="812800" y="4114800"/>
-            <a:ext cx="10566400" cy="1150000"/>
+            <a:off x="812800" y="3977639"/>
+            <a:ext cx="10566400" cy="1371600"/>
           </a:xfrm>
           <a:prstGeom prst="roundRect">
             <a:avLst>
@@ -18663,7 +18663,7 @@
                 <a:ea typeface="Libre Baskerville" pitchFamily="18" charset="-122"/>
                 <a:cs typeface="Libre Baskerville" pitchFamily="18" charset="-120"/>
               </a:rPr>
-              <a:t>What is the model worth? Cost-benefit of ALS capacity</a:t>
+              <a:t>What is the model worth? ALS cost-benefit</a:t>
             </a:r>
             <a:endParaRPr lang="en-US" sz="3000" dirty="0"/>
           </a:p>
@@ -18677,7 +18677,7 @@
         </p:nvSpPr>
         <p:spPr>
           <a:xfrm>
-            <a:off x="6400000" y="1642070"/>
+            <a:off x="6400000" y="1682496"/>
             <a:ext cx="5288572" cy="4300000"/>
           </a:xfrm>
           <a:prstGeom prst="rect">
@@ -18692,7 +18692,7 @@
           </a:bodyPr>
           <a:lstStyle/>
           <a:p>
-            <a:pPr algn="l" marL="155956" indent="-155956">
+            <a:pPr algn="l" marL="171450" indent="-171450">
               <a:lnSpc>
                 <a:spcPts val="1950"/>
               </a:lnSpc>
@@ -18700,7 +18700,7 @@
               <a:buChar char="•"/>
             </a:pPr>
             <a:r>
-              <a:rPr lang="en-US" sz="1300" dirty="0">
+              <a:rPr lang="en-US" sz="1400" dirty="0">
                 <a:solidFill>
                   <a:srgbClr val="46516B"/>
                 </a:solidFill>
@@ -18713,7 +18713,7 @@
             <a:endParaRPr lang="en-US" sz="1300" dirty="0"/>
           </a:p>
           <a:p>
-            <a:pPr algn="l" marL="155956" indent="-155956">
+            <a:pPr algn="l" marL="171450" indent="-171450">
               <a:lnSpc>
                 <a:spcPts val="1950"/>
               </a:lnSpc>
@@ -18721,7 +18721,7 @@
               <a:buChar char="•"/>
             </a:pPr>
             <a:r>
-              <a:rPr lang="en-US" sz="1300" dirty="0">
+              <a:rPr lang="en-US" sz="1400" dirty="0">
                 <a:solidFill>
                   <a:srgbClr val="46516B"/>
                 </a:solidFill>
@@ -18734,7 +18734,7 @@
             <a:endParaRPr lang="en-US" sz="1300" dirty="0"/>
           </a:p>
           <a:p>
-            <a:pPr algn="l" marL="155956" indent="-155956">
+            <a:pPr algn="l" marL="171450" indent="-171450">
               <a:lnSpc>
                 <a:spcPts val="1950"/>
               </a:lnSpc>
@@ -18742,7 +18742,7 @@
               <a:buChar char="•"/>
             </a:pPr>
             <a:r>
-              <a:rPr lang="en-US" sz="1300" dirty="0">
+              <a:rPr lang="en-US" sz="1400" dirty="0">
                 <a:solidFill>
                   <a:srgbClr val="46516B"/>
                 </a:solidFill>
@@ -18755,7 +18755,7 @@
             <a:endParaRPr lang="en-US" sz="1300" dirty="0"/>
           </a:p>
           <a:p>
-            <a:pPr algn="l" marL="155956" indent="-155956">
+            <a:pPr algn="l" marL="171450" indent="-171450">
               <a:lnSpc>
                 <a:spcPts val="1950"/>
               </a:lnSpc>
@@ -18763,7 +18763,7 @@
               <a:buChar char="•"/>
             </a:pPr>
             <a:r>
-              <a:rPr lang="en-US" sz="1300" dirty="0">
+              <a:rPr lang="en-US" sz="1400" dirty="0">
                 <a:solidFill>
                   <a:srgbClr val="46516B"/>
                 </a:solidFill>
@@ -18881,7 +18881,7 @@
         </p:blipFill>
         <p:spPr>
           <a:xfrm>
-            <a:off x="812800" y="1642070"/>
+            <a:off x="812800" y="1682496"/>
             <a:ext cx="5400000" cy="3349367"/>
           </a:xfrm>
           <a:prstGeom prst="rect">
@@ -19005,7 +19005,7 @@
         </p:nvSpPr>
         <p:spPr>
           <a:xfrm>
-            <a:off x="6400000" y="1642070"/>
+            <a:off x="6400000" y="1682496"/>
             <a:ext cx="5288572" cy="4300000"/>
           </a:xfrm>
           <a:prstGeom prst="rect">
@@ -19020,7 +19020,7 @@
           </a:bodyPr>
           <a:lstStyle/>
           <a:p>
-            <a:pPr algn="l" marL="155956" indent="-155956">
+            <a:pPr algn="l" marL="171450" indent="-171450">
               <a:lnSpc>
                 <a:spcPts val="1950"/>
               </a:lnSpc>
@@ -19028,7 +19028,7 @@
               <a:buChar char="•"/>
             </a:pPr>
             <a:r>
-              <a:rPr lang="en-US" sz="1300" dirty="0">
+              <a:rPr lang="en-US" sz="1400" dirty="0">
                 <a:solidFill>
                   <a:srgbClr val="46516B"/>
                 </a:solidFill>
@@ -19041,7 +19041,7 @@
             <a:endParaRPr lang="en-US" sz="1300" dirty="0"/>
           </a:p>
           <a:p>
-            <a:pPr algn="l" marL="155956" indent="-155956">
+            <a:pPr algn="l" marL="171450" indent="-171450">
               <a:lnSpc>
                 <a:spcPts val="1950"/>
               </a:lnSpc>
@@ -19049,7 +19049,7 @@
               <a:buChar char="•"/>
             </a:pPr>
             <a:r>
-              <a:rPr lang="en-US" sz="1300" dirty="0">
+              <a:rPr lang="en-US" sz="1400" dirty="0">
                 <a:solidFill>
                   <a:srgbClr val="46516B"/>
                 </a:solidFill>
@@ -19062,7 +19062,7 @@
             <a:endParaRPr lang="en-US" sz="1300" dirty="0"/>
           </a:p>
           <a:p>
-            <a:pPr algn="l" marL="155956" indent="-155956">
+            <a:pPr algn="l" marL="171450" indent="-171450">
               <a:lnSpc>
                 <a:spcPts val="1950"/>
               </a:lnSpc>
@@ -19070,7 +19070,7 @@
               <a:buChar char="•"/>
             </a:pPr>
             <a:r>
-              <a:rPr lang="en-US" sz="1300" dirty="0">
+              <a:rPr lang="en-US" sz="1400" dirty="0">
                 <a:solidFill>
                   <a:srgbClr val="46516B"/>
                 </a:solidFill>
@@ -19083,7 +19083,7 @@
             <a:endParaRPr lang="en-US" sz="1300" dirty="0"/>
           </a:p>
           <a:p>
-            <a:pPr algn="l" marL="155956" indent="-155956">
+            <a:pPr algn="l" marL="171450" indent="-171450">
               <a:lnSpc>
                 <a:spcPts val="1950"/>
               </a:lnSpc>
@@ -19091,7 +19091,7 @@
               <a:buChar char="•"/>
             </a:pPr>
             <a:r>
-              <a:rPr lang="en-US" sz="1300" dirty="0">
+              <a:rPr lang="en-US" sz="1400" dirty="0">
                 <a:solidFill>
                   <a:srgbClr val="46516B"/>
                 </a:solidFill>
@@ -19104,7 +19104,7 @@
             <a:endParaRPr lang="en-US" sz="1300" dirty="0"/>
           </a:p>
           <a:p>
-            <a:pPr algn="l" marL="155956" indent="-155956">
+            <a:pPr algn="l" marL="171450" indent="-171450">
               <a:lnSpc>
                 <a:spcPts val="1950"/>
               </a:lnSpc>
@@ -19112,7 +19112,7 @@
               <a:buChar char="•"/>
             </a:pPr>
             <a:r>
-              <a:rPr lang="en-US" sz="1300" dirty="0">
+              <a:rPr lang="en-US" sz="1400" dirty="0">
                 <a:solidFill>
                   <a:srgbClr val="46516B"/>
                 </a:solidFill>
@@ -19230,8 +19230,8 @@
         </p:blipFill>
         <p:spPr>
           <a:xfrm>
-            <a:off x="812800" y="1642070"/>
-            <a:ext cx="4416202" cy="4450000"/>
+            <a:off x="812800" y="1682496"/>
+            <a:ext cx="4310411" cy="4343400"/>
           </a:xfrm>
           <a:prstGeom prst="rect">
             <a:avLst/>
@@ -19491,7 +19491,7 @@
         <p:spPr>
           <a:xfrm>
             <a:off x="812800" y="1026120"/>
-            <a:ext cx="10883392" cy="434330"/>
+            <a:ext cx="10883392" cy="463550"/>
           </a:xfrm>
           <a:prstGeom prst="rect">
             <a:avLst/>
@@ -19507,12 +19507,12 @@
           <a:p>
             <a:pPr algn="l" indent="0" marL="0">
               <a:lnSpc>
-                <a:spcPts val="3220"/>
+                <a:spcPts val="3450"/>
               </a:lnSpc>
               <a:buNone/>
             </a:pPr>
             <a:r>
-              <a:rPr lang="en-US" sz="2800" b="1" i="0" dirty="0">
+              <a:rPr lang="en-US" sz="3000" b="1" i="0" dirty="0">
                 <a:solidFill>
                   <a:srgbClr val="15213B"/>
                 </a:solidFill>
@@ -19534,8 +19534,8 @@
         </p:nvSpPr>
         <p:spPr>
           <a:xfrm>
-            <a:off x="815975" y="1552525"/>
-            <a:ext cx="10560050" cy="516880"/>
+            <a:off x="813816" y="1682496"/>
+            <a:ext cx="10561320" cy="777240"/>
           </a:xfrm>
           <a:prstGeom prst="roundRect">
             <a:avLst>
@@ -19565,8 +19565,8 @@
         </p:nvSpPr>
         <p:spPr>
           <a:xfrm>
-            <a:off x="1022350" y="1695400"/>
-            <a:ext cx="2223770" cy="256530"/>
+            <a:off x="1024128" y="1819656"/>
+            <a:ext cx="1828800" cy="274320"/>
           </a:xfrm>
           <a:prstGeom prst="rect">
             <a:avLst/>
@@ -19587,7 +19587,7 @@
               <a:buNone/>
             </a:pPr>
             <a:r>
-              <a:rPr lang="en-US" sz="1300" b="1" dirty="0">
+              <a:rPr lang="en-US" sz="1400" b="1" dirty="0">
                 <a:solidFill>
                   <a:srgbClr val="B05A26"/>
                 </a:solidFill>
@@ -19609,8 +19609,8 @@
         </p:nvSpPr>
         <p:spPr>
           <a:xfrm>
-            <a:off x="3333750" y="1695400"/>
-            <a:ext cx="8070977" cy="256530"/>
+            <a:off x="2980944" y="1819656"/>
+            <a:ext cx="8211312" cy="548640"/>
           </a:xfrm>
           <a:prstGeom prst="rect">
             <a:avLst/>
@@ -19631,7 +19631,7 @@
               <a:buNone/>
             </a:pPr>
             <a:r>
-              <a:rPr lang="en-US" sz="1300" dirty="0">
+              <a:rPr lang="en-US" sz="1400" dirty="0">
                 <a:solidFill>
                   <a:srgbClr val="46516B"/>
                 </a:solidFill>
@@ -19653,8 +19653,8 @@
         </p:nvSpPr>
         <p:spPr>
           <a:xfrm>
-            <a:off x="815975" y="2151955"/>
-            <a:ext cx="10560050" cy="516880"/>
+            <a:off x="813816" y="2551176"/>
+            <a:ext cx="10561320" cy="777240"/>
           </a:xfrm>
           <a:prstGeom prst="roundRect">
             <a:avLst>
@@ -19684,8 +19684,8 @@
         </p:nvSpPr>
         <p:spPr>
           <a:xfrm>
-            <a:off x="1022350" y="2294830"/>
-            <a:ext cx="2223770" cy="256530"/>
+            <a:off x="1024128" y="2688336"/>
+            <a:ext cx="1828800" cy="274320"/>
           </a:xfrm>
           <a:prstGeom prst="rect">
             <a:avLst/>
@@ -19706,7 +19706,7 @@
               <a:buNone/>
             </a:pPr>
             <a:r>
-              <a:rPr lang="en-US" sz="1300" b="1" dirty="0">
+              <a:rPr lang="en-US" sz="1400" b="1" dirty="0">
                 <a:solidFill>
                   <a:srgbClr val="B05A26"/>
                 </a:solidFill>
@@ -19728,8 +19728,8 @@
         </p:nvSpPr>
         <p:spPr>
           <a:xfrm>
-            <a:off x="3333750" y="2294830"/>
-            <a:ext cx="8070977" cy="256530"/>
+            <a:off x="2980944" y="2688336"/>
+            <a:ext cx="8211312" cy="548640"/>
           </a:xfrm>
           <a:prstGeom prst="rect">
             <a:avLst/>
@@ -19750,7 +19750,7 @@
               <a:buNone/>
             </a:pPr>
             <a:r>
-              <a:rPr lang="en-US" sz="1300" dirty="0">
+              <a:rPr lang="en-US" sz="1400" dirty="0">
                 <a:solidFill>
                   <a:srgbClr val="46516B"/>
                 </a:solidFill>
@@ -19772,8 +19772,8 @@
         </p:nvSpPr>
         <p:spPr>
           <a:xfrm>
-            <a:off x="815975" y="2751386"/>
-            <a:ext cx="10560050" cy="748010"/>
+            <a:off x="813816" y="3419856"/>
+            <a:ext cx="10561320" cy="777240"/>
           </a:xfrm>
           <a:prstGeom prst="roundRect">
             <a:avLst>
@@ -19803,8 +19803,8 @@
         </p:nvSpPr>
         <p:spPr>
           <a:xfrm>
-            <a:off x="1022350" y="2894261"/>
-            <a:ext cx="2223770" cy="487660"/>
+            <a:off x="1024128" y="3557016"/>
+            <a:ext cx="1828800" cy="274320"/>
           </a:xfrm>
           <a:prstGeom prst="rect">
             <a:avLst/>
@@ -19825,7 +19825,7 @@
               <a:buNone/>
             </a:pPr>
             <a:r>
-              <a:rPr lang="en-US" sz="1300" b="1" dirty="0">
+              <a:rPr lang="en-US" sz="1400" b="1" dirty="0">
                 <a:solidFill>
                   <a:srgbClr val="B05A26"/>
                 </a:solidFill>
@@ -19847,8 +19847,8 @@
         </p:nvSpPr>
         <p:spPr>
           <a:xfrm>
-            <a:off x="3333750" y="2894261"/>
-            <a:ext cx="8070977" cy="487660"/>
+            <a:off x="2980944" y="3557016"/>
+            <a:ext cx="8211312" cy="548640"/>
           </a:xfrm>
           <a:prstGeom prst="rect">
             <a:avLst/>
@@ -19869,7 +19869,7 @@
               <a:buNone/>
             </a:pPr>
             <a:r>
-              <a:rPr lang="en-US" sz="1300" dirty="0">
+              <a:rPr lang="en-US" sz="1400" dirty="0">
                 <a:solidFill>
                   <a:srgbClr val="46516B"/>
                 </a:solidFill>
@@ -19891,8 +19891,8 @@
         </p:nvSpPr>
         <p:spPr>
           <a:xfrm>
-            <a:off x="815975" y="3581946"/>
-            <a:ext cx="10560050" cy="516880"/>
+            <a:off x="813816" y="4288536"/>
+            <a:ext cx="10561320" cy="777240"/>
           </a:xfrm>
           <a:prstGeom prst="roundRect">
             <a:avLst>
@@ -19922,8 +19922,8 @@
         </p:nvSpPr>
         <p:spPr>
           <a:xfrm>
-            <a:off x="1022350" y="3724821"/>
-            <a:ext cx="2223770" cy="256530"/>
+            <a:off x="1024128" y="4425696"/>
+            <a:ext cx="1828800" cy="274320"/>
           </a:xfrm>
           <a:prstGeom prst="rect">
             <a:avLst/>
@@ -19944,7 +19944,7 @@
               <a:buNone/>
             </a:pPr>
             <a:r>
-              <a:rPr lang="en-US" sz="1300" b="1" dirty="0">
+              <a:rPr lang="en-US" sz="1400" b="1" dirty="0">
                 <a:solidFill>
                   <a:srgbClr val="B05A26"/>
                 </a:solidFill>
@@ -19966,8 +19966,8 @@
         </p:nvSpPr>
         <p:spPr>
           <a:xfrm>
-            <a:off x="3333750" y="3724821"/>
-            <a:ext cx="8070977" cy="256530"/>
+            <a:off x="2980944" y="4425696"/>
+            <a:ext cx="8211312" cy="548640"/>
           </a:xfrm>
           <a:prstGeom prst="rect">
             <a:avLst/>
@@ -19988,7 +19988,7 @@
               <a:buNone/>
             </a:pPr>
             <a:r>
-              <a:rPr lang="en-US" sz="1300" dirty="0">
+              <a:rPr lang="en-US" sz="1400" dirty="0">
                 <a:solidFill>
                   <a:srgbClr val="46516B"/>
                 </a:solidFill>
@@ -20743,8 +20743,8 @@
         </p:nvSpPr>
         <p:spPr>
           <a:xfrm>
-            <a:off x="812800" y="3519041"/>
-            <a:ext cx="10566400" cy="528290"/>
+            <a:off x="815975" y="3519041"/>
+            <a:ext cx="10560050" cy="528290"/>
           </a:xfrm>
           <a:prstGeom prst="roundRect">
             <a:avLst>
@@ -20752,9 +20752,14 @@
             </a:avLst>
           </a:prstGeom>
           <a:solidFill>
-            <a:srgbClr val="15213B"/>
+            <a:srgbClr val="FDFDFB"/>
           </a:solidFill>
-          <a:ln/>
+          <a:ln w="6350">
+            <a:solidFill>
+              <a:srgbClr val="E2DFD6"/>
+            </a:solidFill>
+            <a:prstDash val="solid"/>
+          </a:ln>
         </p:spPr>
         <p:txBody>
           <a:bodyPr/>
@@ -20769,7 +20774,7 @@
         </p:nvSpPr>
         <p:spPr>
           <a:xfrm>
-            <a:off x="1016000" y="3658741"/>
+            <a:off x="1022350" y="3658741"/>
             <a:ext cx="1831340" cy="274290"/>
           </a:xfrm>
           <a:prstGeom prst="rect">
@@ -20793,7 +20798,7 @@
             <a:r>
               <a:rPr lang="en-US" sz="1400" b="1" dirty="0">
                 <a:solidFill>
-                  <a:srgbClr val="F4F1E8"/>
+                  <a:srgbClr val="B05A26"/>
                 </a:solidFill>
                 <a:latin typeface="Public Sans" pitchFamily="34" charset="0"/>
                 <a:ea typeface="Public Sans" pitchFamily="34" charset="-122"/>
@@ -20813,8 +20818,8 @@
         </p:nvSpPr>
         <p:spPr>
           <a:xfrm>
-            <a:off x="2971800" y="3658741"/>
-            <a:ext cx="8450326" cy="274290"/>
+            <a:off x="2978150" y="3658741"/>
+            <a:ext cx="8437245" cy="274290"/>
           </a:xfrm>
           <a:prstGeom prst="rect">
             <a:avLst/>
@@ -20837,7 +20842,7 @@
             <a:r>
               <a:rPr lang="en-US" sz="1400" dirty="0">
                 <a:solidFill>
-                  <a:srgbClr val="F4F1E8"/>
+                  <a:srgbClr val="15213B"/>
                 </a:solidFill>
                 <a:latin typeface="Public Sans" pitchFamily="34" charset="0"/>
                 <a:ea typeface="Public Sans" pitchFamily="34" charset="-122"/>
@@ -20857,8 +20862,8 @@
         </p:nvSpPr>
         <p:spPr>
           <a:xfrm>
-            <a:off x="812800" y="4123531"/>
-            <a:ext cx="10566400" cy="528290"/>
+            <a:off x="815975" y="4123531"/>
+            <a:ext cx="10560050" cy="528290"/>
           </a:xfrm>
           <a:prstGeom prst="roundRect">
             <a:avLst>
@@ -20866,9 +20871,14 @@
             </a:avLst>
           </a:prstGeom>
           <a:solidFill>
-            <a:srgbClr val="15213B"/>
+            <a:srgbClr val="FDFDFB"/>
           </a:solidFill>
-          <a:ln/>
+          <a:ln w="6350">
+            <a:solidFill>
+              <a:srgbClr val="E2DFD6"/>
+            </a:solidFill>
+            <a:prstDash val="solid"/>
+          </a:ln>
         </p:spPr>
         <p:txBody>
           <a:bodyPr/>
@@ -20883,7 +20893,7 @@
         </p:nvSpPr>
         <p:spPr>
           <a:xfrm>
-            <a:off x="1016000" y="4263231"/>
+            <a:off x="1022350" y="4263231"/>
             <a:ext cx="1831340" cy="274290"/>
           </a:xfrm>
           <a:prstGeom prst="rect">
@@ -20907,7 +20917,7 @@
             <a:r>
               <a:rPr lang="en-US" sz="1400" b="1" dirty="0">
                 <a:solidFill>
-                  <a:srgbClr val="F4F1E8"/>
+                  <a:srgbClr val="B05A26"/>
                 </a:solidFill>
                 <a:latin typeface="Public Sans" pitchFamily="34" charset="0"/>
                 <a:ea typeface="Public Sans" pitchFamily="34" charset="-122"/>
@@ -20927,8 +20937,8 @@
         </p:nvSpPr>
         <p:spPr>
           <a:xfrm>
-            <a:off x="2971800" y="4263231"/>
-            <a:ext cx="8450326" cy="274290"/>
+            <a:off x="2978150" y="4263231"/>
+            <a:ext cx="8437245" cy="274290"/>
           </a:xfrm>
           <a:prstGeom prst="rect">
             <a:avLst/>
@@ -20951,7 +20961,7 @@
             <a:r>
               <a:rPr lang="en-US" sz="1400" dirty="0">
                 <a:solidFill>
-                  <a:srgbClr val="F4F1E8"/>
+                  <a:srgbClr val="15213B"/>
                 </a:solidFill>
                 <a:latin typeface="Public Sans" pitchFamily="34" charset="0"/>
                 <a:ea typeface="Public Sans" pitchFamily="34" charset="-122"/>
